--- a/slides/03_random_forests.pptx
+++ b/slides/03_random_forests.pptx
@@ -15,6 +15,7 @@
     <p:sldId id="263" r:id="rId9"/>
     <p:sldId id="264" r:id="rId10"/>
     <p:sldId id="265" r:id="rId11"/>
+    <p:sldId id="266" r:id="rId12"/>
   </p:sldIdLst>
   <p:sldSz cx="12192000" cy="6858000"/>
   <p:notesSz cx="6858000" cy="9144000"/>
@@ -268,7 +269,7 @@
           <a:p>
             <a:fld id="{BC72280C-62AA-E14C-8AA3-A8B9D4E264B1}" type="datetimeFigureOut">
               <a:rPr lang="en-US" smtClean="0"/>
-              <a:t>4/12/2026</a:t>
+              <a:t>4/13/2026</a:t>
             </a:fld>
             <a:endParaRPr lang="en-US"/>
           </a:p>
@@ -466,7 +467,7 @@
           <a:p>
             <a:fld id="{BC72280C-62AA-E14C-8AA3-A8B9D4E264B1}" type="datetimeFigureOut">
               <a:rPr lang="en-US" smtClean="0"/>
-              <a:t>4/12/2026</a:t>
+              <a:t>4/13/2026</a:t>
             </a:fld>
             <a:endParaRPr lang="en-US"/>
           </a:p>
@@ -674,7 +675,7 @@
           <a:p>
             <a:fld id="{BC72280C-62AA-E14C-8AA3-A8B9D4E264B1}" type="datetimeFigureOut">
               <a:rPr lang="en-US" smtClean="0"/>
-              <a:t>4/12/2026</a:t>
+              <a:t>4/13/2026</a:t>
             </a:fld>
             <a:endParaRPr lang="en-US"/>
           </a:p>
@@ -872,7 +873,7 @@
           <a:p>
             <a:fld id="{BC72280C-62AA-E14C-8AA3-A8B9D4E264B1}" type="datetimeFigureOut">
               <a:rPr lang="en-US" smtClean="0"/>
-              <a:t>4/12/2026</a:t>
+              <a:t>4/13/2026</a:t>
             </a:fld>
             <a:endParaRPr lang="en-US"/>
           </a:p>
@@ -1147,7 +1148,7 @@
           <a:p>
             <a:fld id="{BC72280C-62AA-E14C-8AA3-A8B9D4E264B1}" type="datetimeFigureOut">
               <a:rPr lang="en-US" smtClean="0"/>
-              <a:t>4/12/2026</a:t>
+              <a:t>4/13/2026</a:t>
             </a:fld>
             <a:endParaRPr lang="en-US"/>
           </a:p>
@@ -1412,7 +1413,7 @@
           <a:p>
             <a:fld id="{BC72280C-62AA-E14C-8AA3-A8B9D4E264B1}" type="datetimeFigureOut">
               <a:rPr lang="en-US" smtClean="0"/>
-              <a:t>4/12/2026</a:t>
+              <a:t>4/13/2026</a:t>
             </a:fld>
             <a:endParaRPr lang="en-US"/>
           </a:p>
@@ -1824,7 +1825,7 @@
           <a:p>
             <a:fld id="{BC72280C-62AA-E14C-8AA3-A8B9D4E264B1}" type="datetimeFigureOut">
               <a:rPr lang="en-US" smtClean="0"/>
-              <a:t>4/12/2026</a:t>
+              <a:t>4/13/2026</a:t>
             </a:fld>
             <a:endParaRPr lang="en-US"/>
           </a:p>
@@ -1965,7 +1966,7 @@
           <a:p>
             <a:fld id="{BC72280C-62AA-E14C-8AA3-A8B9D4E264B1}" type="datetimeFigureOut">
               <a:rPr lang="en-US" smtClean="0"/>
-              <a:t>4/12/2026</a:t>
+              <a:t>4/13/2026</a:t>
             </a:fld>
             <a:endParaRPr lang="en-US"/>
           </a:p>
@@ -2078,7 +2079,7 @@
           <a:p>
             <a:fld id="{BC72280C-62AA-E14C-8AA3-A8B9D4E264B1}" type="datetimeFigureOut">
               <a:rPr lang="en-US" smtClean="0"/>
-              <a:t>4/12/2026</a:t>
+              <a:t>4/13/2026</a:t>
             </a:fld>
             <a:endParaRPr lang="en-US"/>
           </a:p>
@@ -2389,7 +2390,7 @@
           <a:p>
             <a:fld id="{BC72280C-62AA-E14C-8AA3-A8B9D4E264B1}" type="datetimeFigureOut">
               <a:rPr lang="en-US" smtClean="0"/>
-              <a:t>4/12/2026</a:t>
+              <a:t>4/13/2026</a:t>
             </a:fld>
             <a:endParaRPr lang="en-US"/>
           </a:p>
@@ -2677,7 +2678,7 @@
           <a:p>
             <a:fld id="{BC72280C-62AA-E14C-8AA3-A8B9D4E264B1}" type="datetimeFigureOut">
               <a:rPr lang="en-US" smtClean="0"/>
-              <a:t>4/12/2026</a:t>
+              <a:t>4/13/2026</a:t>
             </a:fld>
             <a:endParaRPr lang="en-US"/>
           </a:p>
@@ -2918,7 +2919,7 @@
           <a:p>
             <a:fld id="{BC72280C-62AA-E14C-8AA3-A8B9D4E264B1}" type="datetimeFigureOut">
               <a:rPr lang="en-US" smtClean="0"/>
-              <a:t>4/12/2026</a:t>
+              <a:t>4/13/2026</a:t>
             </a:fld>
             <a:endParaRPr lang="en-US"/>
           </a:p>
@@ -3431,10 +3432,10 @@
       </p:grpSpPr>
       <p:pic>
         <p:nvPicPr>
-          <p:cNvPr id="5" name="Picture 4">
-            <a:extLst>
-              <a:ext uri="{FF2B5EF4-FFF2-40B4-BE49-F238E27FC236}">
-                <a16:creationId xmlns:a16="http://schemas.microsoft.com/office/drawing/2014/main" id="{3BF591F6-EB08-CE03-60BC-352BE42589EA}"/>
+          <p:cNvPr id="6" name="Picture 5">
+            <a:extLst>
+              <a:ext uri="{FF2B5EF4-FFF2-40B4-BE49-F238E27FC236}">
+                <a16:creationId xmlns:a16="http://schemas.microsoft.com/office/drawing/2014/main" id="{C9CF30A9-ACE5-693B-2653-D56462548A45}"/>
               </a:ext>
             </a:extLst>
           </p:cNvPr>
@@ -3451,8 +3452,8 @@
         </p:blipFill>
         <p:spPr>
           <a:xfrm>
-            <a:off x="6016625" y="1311275"/>
-            <a:ext cx="6115050" cy="5181600"/>
+            <a:off x="6470650" y="1310810"/>
+            <a:ext cx="5395677" cy="5182065"/>
           </a:xfrm>
           <a:prstGeom prst="rect">
             <a:avLst/>
@@ -3558,6 +3559,6031 @@
     <p:extLst>
       <p:ext uri="{BB962C8B-B14F-4D97-AF65-F5344CB8AC3E}">
         <p14:creationId xmlns:p14="http://schemas.microsoft.com/office/powerpoint/2010/main" val="2319284346"/>
+      </p:ext>
+    </p:extLst>
+  </p:cSld>
+  <p:clrMapOvr>
+    <a:masterClrMapping/>
+  </p:clrMapOvr>
+</p:sld>
+</file>
+
+<file path=ppt/slides/slide11.xml><?xml version="1.0" encoding="utf-8"?>
+<p:sld xmlns:a="http://schemas.openxmlformats.org/drawingml/2006/main" xmlns:r="http://schemas.openxmlformats.org/officeDocument/2006/relationships" xmlns:p="http://schemas.openxmlformats.org/presentationml/2006/main">
+  <p:cSld>
+    <p:spTree>
+      <p:nvGrpSpPr>
+        <p:cNvPr id="1" name=""/>
+        <p:cNvGrpSpPr/>
+        <p:nvPr/>
+      </p:nvGrpSpPr>
+      <p:grpSpPr>
+        <a:xfrm>
+          <a:off x="0" y="0"/>
+          <a:ext cx="0" cy="0"/>
+          <a:chOff x="0" y="0"/>
+          <a:chExt cx="0" cy="0"/>
+        </a:xfrm>
+      </p:grpSpPr>
+      <p:sp>
+        <p:nvSpPr>
+          <p:cNvPr id="2" name="Title 1">
+            <a:extLst>
+              <a:ext uri="{FF2B5EF4-FFF2-40B4-BE49-F238E27FC236}">
+                <a16:creationId xmlns:a16="http://schemas.microsoft.com/office/drawing/2014/main" id="{2E46B9C6-5795-1E65-F8FA-B39DAA9D9F00}"/>
+              </a:ext>
+            </a:extLst>
+          </p:cNvPr>
+          <p:cNvSpPr>
+            <a:spLocks noGrp="1"/>
+          </p:cNvSpPr>
+          <p:nvPr>
+            <p:ph type="title"/>
+          </p:nvPr>
+        </p:nvSpPr>
+        <p:spPr/>
+        <p:txBody>
+          <a:bodyPr/>
+          <a:lstStyle/>
+          <a:p>
+            <a:r>
+              <a:rPr lang="en-US" dirty="0"/>
+              <a:t>Variable importance</a:t>
+            </a:r>
+          </a:p>
+        </p:txBody>
+      </p:sp>
+      <p:sp>
+        <p:nvSpPr>
+          <p:cNvPr id="3" name="Content Placeholder 2">
+            <a:extLst>
+              <a:ext uri="{FF2B5EF4-FFF2-40B4-BE49-F238E27FC236}">
+                <a16:creationId xmlns:a16="http://schemas.microsoft.com/office/drawing/2014/main" id="{22382B77-006A-A3DF-DB8F-B7EEEC05A540}"/>
+              </a:ext>
+            </a:extLst>
+          </p:cNvPr>
+          <p:cNvSpPr>
+            <a:spLocks noGrp="1"/>
+          </p:cNvSpPr>
+          <p:nvPr>
+            <p:ph idx="1"/>
+          </p:nvPr>
+        </p:nvSpPr>
+        <p:spPr>
+          <a:xfrm>
+            <a:off x="838200" y="1825625"/>
+            <a:ext cx="5101958" cy="4351338"/>
+          </a:xfrm>
+        </p:spPr>
+        <p:txBody>
+          <a:bodyPr>
+            <a:normAutofit fontScale="92500" lnSpcReduction="10000"/>
+          </a:bodyPr>
+          <a:lstStyle/>
+          <a:p>
+            <a:pPr marL="0" indent="0">
+              <a:buNone/>
+            </a:pPr>
+            <a:r>
+              <a:rPr lang="en-US" dirty="0"/>
+              <a:t>Find variables that influence the outcome</a:t>
+            </a:r>
+          </a:p>
+          <a:p>
+            <a:r>
+              <a:rPr lang="en-US" dirty="0"/>
+              <a:t>Start with some baseline measure of fit (OOB error)</a:t>
+            </a:r>
+          </a:p>
+          <a:p>
+            <a:r>
+              <a:rPr lang="en-US" dirty="0"/>
+              <a:t>Shuffle the value (one at a time) for each of the </a:t>
+            </a:r>
+            <a:r>
+              <a:rPr lang="en-US" i="1" dirty="0">
+                <a:solidFill>
+                  <a:schemeClr val="accent1"/>
+                </a:solidFill>
+              </a:rPr>
+              <a:t>p</a:t>
+            </a:r>
+            <a:r>
+              <a:rPr lang="en-US" dirty="0"/>
+              <a:t> predictors</a:t>
+            </a:r>
+          </a:p>
+          <a:p>
+            <a:r>
+              <a:rPr lang="en-US" dirty="0"/>
+              <a:t>Pass these randomly permuted values of a single </a:t>
+            </a:r>
+            <a:r>
+              <a:rPr lang="en-US" i="1" dirty="0">
+                <a:solidFill>
+                  <a:schemeClr val="accent1"/>
+                </a:solidFill>
+              </a:rPr>
+              <a:t>p</a:t>
+            </a:r>
+            <a:r>
+              <a:rPr lang="en-US" dirty="0"/>
+              <a:t> back through the tree</a:t>
+            </a:r>
+          </a:p>
+          <a:p>
+            <a:r>
+              <a:rPr lang="en-US" dirty="0"/>
+              <a:t>Compare resulting shift in accuracy across forest</a:t>
+            </a:r>
+          </a:p>
+          <a:p>
+            <a:endParaRPr lang="en-US" dirty="0"/>
+          </a:p>
+        </p:txBody>
+      </p:sp>
+      <p:sp>
+        <p:nvSpPr>
+          <p:cNvPr id="14" name="TextBox 13">
+            <a:extLst>
+              <a:ext uri="{FF2B5EF4-FFF2-40B4-BE49-F238E27FC236}">
+                <a16:creationId xmlns:a16="http://schemas.microsoft.com/office/drawing/2014/main" id="{3E36E9E6-E5CB-EC83-4AEC-75C3652B0483}"/>
+              </a:ext>
+            </a:extLst>
+          </p:cNvPr>
+          <p:cNvSpPr txBox="1"/>
+          <p:nvPr/>
+        </p:nvSpPr>
+        <p:spPr>
+          <a:xfrm>
+            <a:off x="10522756" y="981353"/>
+            <a:ext cx="389288" cy="369332"/>
+          </a:xfrm>
+          <a:prstGeom prst="rect">
+            <a:avLst/>
+          </a:prstGeom>
+          <a:noFill/>
+        </p:spPr>
+        <p:txBody>
+          <a:bodyPr wrap="square" rtlCol="0">
+            <a:spAutoFit/>
+          </a:bodyPr>
+          <a:lstStyle/>
+          <a:p>
+            <a:r>
+              <a:rPr lang="en-US" dirty="0"/>
+              <a:t>…</a:t>
+            </a:r>
+          </a:p>
+        </p:txBody>
+      </p:sp>
+      <p:sp>
+        <p:nvSpPr>
+          <p:cNvPr id="15" name="Rectangle 14">
+            <a:extLst>
+              <a:ext uri="{FF2B5EF4-FFF2-40B4-BE49-F238E27FC236}">
+                <a16:creationId xmlns:a16="http://schemas.microsoft.com/office/drawing/2014/main" id="{D0C2E909-9090-6246-BA89-54128D107454}"/>
+              </a:ext>
+            </a:extLst>
+          </p:cNvPr>
+          <p:cNvSpPr/>
+          <p:nvPr/>
+        </p:nvSpPr>
+        <p:spPr>
+          <a:xfrm>
+            <a:off x="8166100" y="641350"/>
+            <a:ext cx="3187700" cy="1049338"/>
+          </a:xfrm>
+          <a:prstGeom prst="rect">
+            <a:avLst/>
+          </a:prstGeom>
+          <a:noFill/>
+          <a:ln w="57150">
+            <a:solidFill>
+              <a:schemeClr val="accent1"/>
+            </a:solidFill>
+          </a:ln>
+        </p:spPr>
+        <p:style>
+          <a:lnRef idx="2">
+            <a:schemeClr val="accent1">
+              <a:shade val="15000"/>
+            </a:schemeClr>
+          </a:lnRef>
+          <a:fillRef idx="1">
+            <a:schemeClr val="accent1"/>
+          </a:fillRef>
+          <a:effectRef idx="0">
+            <a:schemeClr val="accent1"/>
+          </a:effectRef>
+          <a:fontRef idx="minor">
+            <a:schemeClr val="lt1"/>
+          </a:fontRef>
+        </p:style>
+        <p:txBody>
+          <a:bodyPr rtlCol="0" anchor="ctr"/>
+          <a:lstStyle/>
+          <a:p>
+            <a:pPr algn="ctr"/>
+            <a:endParaRPr lang="en-US"/>
+          </a:p>
+        </p:txBody>
+      </p:sp>
+      <p:sp>
+        <p:nvSpPr>
+          <p:cNvPr id="16" name="TextBox 15">
+            <a:extLst>
+              <a:ext uri="{FF2B5EF4-FFF2-40B4-BE49-F238E27FC236}">
+                <a16:creationId xmlns:a16="http://schemas.microsoft.com/office/drawing/2014/main" id="{F1D9CF4A-E451-B88F-965E-1E9FC8D25122}"/>
+              </a:ext>
+            </a:extLst>
+          </p:cNvPr>
+          <p:cNvSpPr txBox="1"/>
+          <p:nvPr/>
+        </p:nvSpPr>
+        <p:spPr>
+          <a:xfrm>
+            <a:off x="9223688" y="691634"/>
+            <a:ext cx="1222375" cy="369332"/>
+          </a:xfrm>
+          <a:prstGeom prst="rect">
+            <a:avLst/>
+          </a:prstGeom>
+          <a:noFill/>
+        </p:spPr>
+        <p:txBody>
+          <a:bodyPr wrap="square" rtlCol="0">
+            <a:spAutoFit/>
+          </a:bodyPr>
+          <a:lstStyle/>
+          <a:p>
+            <a:r>
+              <a:rPr lang="en-US" dirty="0">
+                <a:solidFill>
+                  <a:schemeClr val="accent1"/>
+                </a:solidFill>
+              </a:rPr>
+              <a:t>Predictors</a:t>
+            </a:r>
+          </a:p>
+        </p:txBody>
+      </p:sp>
+      <p:sp>
+        <p:nvSpPr>
+          <p:cNvPr id="17" name="TextBox 16">
+            <a:extLst>
+              <a:ext uri="{FF2B5EF4-FFF2-40B4-BE49-F238E27FC236}">
+                <a16:creationId xmlns:a16="http://schemas.microsoft.com/office/drawing/2014/main" id="{7E3FBF93-B796-4C1A-49B3-CC81E082D55D}"/>
+              </a:ext>
+            </a:extLst>
+          </p:cNvPr>
+          <p:cNvSpPr txBox="1"/>
+          <p:nvPr/>
+        </p:nvSpPr>
+        <p:spPr>
+          <a:xfrm>
+            <a:off x="8223250" y="1321356"/>
+            <a:ext cx="3086099" cy="369332"/>
+          </a:xfrm>
+          <a:prstGeom prst="rect">
+            <a:avLst/>
+          </a:prstGeom>
+          <a:noFill/>
+        </p:spPr>
+        <p:txBody>
+          <a:bodyPr wrap="square" rtlCol="0">
+            <a:spAutoFit/>
+          </a:bodyPr>
+          <a:lstStyle/>
+          <a:p>
+            <a:r>
+              <a:rPr lang="en-US" dirty="0">
+                <a:solidFill>
+                  <a:schemeClr val="accent1"/>
+                </a:solidFill>
+              </a:rPr>
+              <a:t>1,     2,     3,   4,      5,    6,   …     </a:t>
+            </a:r>
+            <a:r>
+              <a:rPr lang="en-US" i="1" dirty="0">
+                <a:solidFill>
+                  <a:schemeClr val="accent1"/>
+                </a:solidFill>
+              </a:rPr>
+              <a:t>p</a:t>
+            </a:r>
+          </a:p>
+        </p:txBody>
+      </p:sp>
+      <p:sp>
+        <p:nvSpPr>
+          <p:cNvPr id="18" name="Rectangle 17">
+            <a:extLst>
+              <a:ext uri="{FF2B5EF4-FFF2-40B4-BE49-F238E27FC236}">
+                <a16:creationId xmlns:a16="http://schemas.microsoft.com/office/drawing/2014/main" id="{9233B778-3651-993B-EBE8-9C9AA6D348FA}"/>
+              </a:ext>
+            </a:extLst>
+          </p:cNvPr>
+          <p:cNvSpPr/>
+          <p:nvPr/>
+        </p:nvSpPr>
+        <p:spPr>
+          <a:xfrm>
+            <a:off x="8273635" y="1111250"/>
+            <a:ext cx="202445" cy="210106"/>
+          </a:xfrm>
+          <a:prstGeom prst="rect">
+            <a:avLst/>
+          </a:prstGeom>
+          <a:solidFill>
+            <a:schemeClr val="bg1">
+              <a:lumMod val="85000"/>
+            </a:schemeClr>
+          </a:solidFill>
+        </p:spPr>
+        <p:style>
+          <a:lnRef idx="2">
+            <a:schemeClr val="accent1">
+              <a:shade val="15000"/>
+            </a:schemeClr>
+          </a:lnRef>
+          <a:fillRef idx="1">
+            <a:schemeClr val="accent1"/>
+          </a:fillRef>
+          <a:effectRef idx="0">
+            <a:schemeClr val="accent1"/>
+          </a:effectRef>
+          <a:fontRef idx="minor">
+            <a:schemeClr val="lt1"/>
+          </a:fontRef>
+        </p:style>
+        <p:txBody>
+          <a:bodyPr rtlCol="0" anchor="ctr"/>
+          <a:lstStyle/>
+          <a:p>
+            <a:pPr algn="ctr"/>
+            <a:endParaRPr lang="en-US"/>
+          </a:p>
+        </p:txBody>
+      </p:sp>
+      <p:sp>
+        <p:nvSpPr>
+          <p:cNvPr id="19" name="Rectangle 18">
+            <a:extLst>
+              <a:ext uri="{FF2B5EF4-FFF2-40B4-BE49-F238E27FC236}">
+                <a16:creationId xmlns:a16="http://schemas.microsoft.com/office/drawing/2014/main" id="{DD5A6F53-D52D-3ADA-1594-D66BDF18C563}"/>
+              </a:ext>
+            </a:extLst>
+          </p:cNvPr>
+          <p:cNvSpPr/>
+          <p:nvPr/>
+        </p:nvSpPr>
+        <p:spPr>
+          <a:xfrm>
+            <a:off x="8664286" y="1111250"/>
+            <a:ext cx="202445" cy="210106"/>
+          </a:xfrm>
+          <a:prstGeom prst="rect">
+            <a:avLst/>
+          </a:prstGeom>
+          <a:solidFill>
+            <a:schemeClr val="accent2">
+              <a:lumMod val="50000"/>
+            </a:schemeClr>
+          </a:solidFill>
+        </p:spPr>
+        <p:style>
+          <a:lnRef idx="2">
+            <a:schemeClr val="accent1">
+              <a:shade val="15000"/>
+            </a:schemeClr>
+          </a:lnRef>
+          <a:fillRef idx="1">
+            <a:schemeClr val="accent1"/>
+          </a:fillRef>
+          <a:effectRef idx="0">
+            <a:schemeClr val="accent1"/>
+          </a:effectRef>
+          <a:fontRef idx="minor">
+            <a:schemeClr val="lt1"/>
+          </a:fontRef>
+        </p:style>
+        <p:txBody>
+          <a:bodyPr rtlCol="0" anchor="ctr"/>
+          <a:lstStyle/>
+          <a:p>
+            <a:pPr algn="ctr"/>
+            <a:endParaRPr lang="en-US"/>
+          </a:p>
+        </p:txBody>
+      </p:sp>
+      <p:sp>
+        <p:nvSpPr>
+          <p:cNvPr id="20" name="Rectangle 19">
+            <a:extLst>
+              <a:ext uri="{FF2B5EF4-FFF2-40B4-BE49-F238E27FC236}">
+                <a16:creationId xmlns:a16="http://schemas.microsoft.com/office/drawing/2014/main" id="{677D8039-E85B-7CE3-E762-8D1921B31BFF}"/>
+              </a:ext>
+            </a:extLst>
+          </p:cNvPr>
+          <p:cNvSpPr/>
+          <p:nvPr/>
+        </p:nvSpPr>
+        <p:spPr>
+          <a:xfrm>
+            <a:off x="9054937" y="1111250"/>
+            <a:ext cx="202445" cy="210106"/>
+          </a:xfrm>
+          <a:prstGeom prst="rect">
+            <a:avLst/>
+          </a:prstGeom>
+          <a:solidFill>
+            <a:schemeClr val="accent2">
+              <a:lumMod val="40000"/>
+              <a:lumOff val="60000"/>
+            </a:schemeClr>
+          </a:solidFill>
+        </p:spPr>
+        <p:style>
+          <a:lnRef idx="2">
+            <a:schemeClr val="accent1">
+              <a:shade val="15000"/>
+            </a:schemeClr>
+          </a:lnRef>
+          <a:fillRef idx="1">
+            <a:schemeClr val="accent1"/>
+          </a:fillRef>
+          <a:effectRef idx="0">
+            <a:schemeClr val="accent1"/>
+          </a:effectRef>
+          <a:fontRef idx="minor">
+            <a:schemeClr val="lt1"/>
+          </a:fontRef>
+        </p:style>
+        <p:txBody>
+          <a:bodyPr rtlCol="0" anchor="ctr"/>
+          <a:lstStyle/>
+          <a:p>
+            <a:pPr algn="ctr"/>
+            <a:endParaRPr lang="en-US"/>
+          </a:p>
+        </p:txBody>
+      </p:sp>
+      <p:sp>
+        <p:nvSpPr>
+          <p:cNvPr id="21" name="Rectangle 20">
+            <a:extLst>
+              <a:ext uri="{FF2B5EF4-FFF2-40B4-BE49-F238E27FC236}">
+                <a16:creationId xmlns:a16="http://schemas.microsoft.com/office/drawing/2014/main" id="{EEDB777D-7AF7-3196-EDFF-26B9CD9BC21D}"/>
+              </a:ext>
+            </a:extLst>
+          </p:cNvPr>
+          <p:cNvSpPr/>
+          <p:nvPr/>
+        </p:nvSpPr>
+        <p:spPr>
+          <a:xfrm>
+            <a:off x="9445588" y="1111250"/>
+            <a:ext cx="202445" cy="210106"/>
+          </a:xfrm>
+          <a:prstGeom prst="rect">
+            <a:avLst/>
+          </a:prstGeom>
+          <a:solidFill>
+            <a:schemeClr val="accent6">
+              <a:lumMod val="40000"/>
+              <a:lumOff val="60000"/>
+            </a:schemeClr>
+          </a:solidFill>
+        </p:spPr>
+        <p:style>
+          <a:lnRef idx="2">
+            <a:schemeClr val="accent1">
+              <a:shade val="15000"/>
+            </a:schemeClr>
+          </a:lnRef>
+          <a:fillRef idx="1">
+            <a:schemeClr val="accent1"/>
+          </a:fillRef>
+          <a:effectRef idx="0">
+            <a:schemeClr val="accent1"/>
+          </a:effectRef>
+          <a:fontRef idx="minor">
+            <a:schemeClr val="lt1"/>
+          </a:fontRef>
+        </p:style>
+        <p:txBody>
+          <a:bodyPr rtlCol="0" anchor="ctr"/>
+          <a:lstStyle/>
+          <a:p>
+            <a:pPr algn="ctr"/>
+            <a:endParaRPr lang="en-US"/>
+          </a:p>
+        </p:txBody>
+      </p:sp>
+      <p:sp>
+        <p:nvSpPr>
+          <p:cNvPr id="22" name="Rectangle 21">
+            <a:extLst>
+              <a:ext uri="{FF2B5EF4-FFF2-40B4-BE49-F238E27FC236}">
+                <a16:creationId xmlns:a16="http://schemas.microsoft.com/office/drawing/2014/main" id="{3B85343B-DC2F-A672-9543-A88E62677AA7}"/>
+              </a:ext>
+            </a:extLst>
+          </p:cNvPr>
+          <p:cNvSpPr/>
+          <p:nvPr/>
+        </p:nvSpPr>
+        <p:spPr>
+          <a:xfrm>
+            <a:off x="9834876" y="1111250"/>
+            <a:ext cx="202445" cy="210106"/>
+          </a:xfrm>
+          <a:prstGeom prst="rect">
+            <a:avLst/>
+          </a:prstGeom>
+          <a:solidFill>
+            <a:schemeClr val="accent5">
+              <a:lumMod val="60000"/>
+              <a:lumOff val="40000"/>
+            </a:schemeClr>
+          </a:solidFill>
+        </p:spPr>
+        <p:style>
+          <a:lnRef idx="2">
+            <a:schemeClr val="accent1">
+              <a:shade val="15000"/>
+            </a:schemeClr>
+          </a:lnRef>
+          <a:fillRef idx="1">
+            <a:schemeClr val="accent1"/>
+          </a:fillRef>
+          <a:effectRef idx="0">
+            <a:schemeClr val="accent1"/>
+          </a:effectRef>
+          <a:fontRef idx="minor">
+            <a:schemeClr val="lt1"/>
+          </a:fontRef>
+        </p:style>
+        <p:txBody>
+          <a:bodyPr rtlCol="0" anchor="ctr"/>
+          <a:lstStyle/>
+          <a:p>
+            <a:pPr algn="ctr"/>
+            <a:endParaRPr lang="en-US"/>
+          </a:p>
+        </p:txBody>
+      </p:sp>
+      <p:sp>
+        <p:nvSpPr>
+          <p:cNvPr id="23" name="Rectangle 22">
+            <a:extLst>
+              <a:ext uri="{FF2B5EF4-FFF2-40B4-BE49-F238E27FC236}">
+                <a16:creationId xmlns:a16="http://schemas.microsoft.com/office/drawing/2014/main" id="{7ECCD3D9-6F90-F6B6-0434-030DE5DA7E20}"/>
+              </a:ext>
+            </a:extLst>
+          </p:cNvPr>
+          <p:cNvSpPr/>
+          <p:nvPr/>
+        </p:nvSpPr>
+        <p:spPr>
+          <a:xfrm>
+            <a:off x="10225527" y="1111250"/>
+            <a:ext cx="202445" cy="210106"/>
+          </a:xfrm>
+          <a:prstGeom prst="rect">
+            <a:avLst/>
+          </a:prstGeom>
+          <a:solidFill>
+            <a:srgbClr val="FFC000"/>
+          </a:solidFill>
+        </p:spPr>
+        <p:style>
+          <a:lnRef idx="2">
+            <a:schemeClr val="accent1">
+              <a:shade val="15000"/>
+            </a:schemeClr>
+          </a:lnRef>
+          <a:fillRef idx="1">
+            <a:schemeClr val="accent1"/>
+          </a:fillRef>
+          <a:effectRef idx="0">
+            <a:schemeClr val="accent1"/>
+          </a:effectRef>
+          <a:fontRef idx="minor">
+            <a:schemeClr val="lt1"/>
+          </a:fontRef>
+        </p:style>
+        <p:txBody>
+          <a:bodyPr rtlCol="0" anchor="ctr"/>
+          <a:lstStyle/>
+          <a:p>
+            <a:pPr algn="ctr"/>
+            <a:endParaRPr lang="en-US"/>
+          </a:p>
+        </p:txBody>
+      </p:sp>
+      <p:sp>
+        <p:nvSpPr>
+          <p:cNvPr id="24" name="Rectangle 23">
+            <a:extLst>
+              <a:ext uri="{FF2B5EF4-FFF2-40B4-BE49-F238E27FC236}">
+                <a16:creationId xmlns:a16="http://schemas.microsoft.com/office/drawing/2014/main" id="{27DAE466-4D63-5274-DB9F-BB976EDABAC6}"/>
+              </a:ext>
+            </a:extLst>
+          </p:cNvPr>
+          <p:cNvSpPr/>
+          <p:nvPr/>
+        </p:nvSpPr>
+        <p:spPr>
+          <a:xfrm>
+            <a:off x="11006829" y="1111250"/>
+            <a:ext cx="202445" cy="210106"/>
+          </a:xfrm>
+          <a:prstGeom prst="rect">
+            <a:avLst/>
+          </a:prstGeom>
+          <a:solidFill>
+            <a:schemeClr val="accent1">
+              <a:lumMod val="60000"/>
+              <a:lumOff val="40000"/>
+            </a:schemeClr>
+          </a:solidFill>
+        </p:spPr>
+        <p:style>
+          <a:lnRef idx="2">
+            <a:schemeClr val="accent1">
+              <a:shade val="15000"/>
+            </a:schemeClr>
+          </a:lnRef>
+          <a:fillRef idx="1">
+            <a:schemeClr val="accent1"/>
+          </a:fillRef>
+          <a:effectRef idx="0">
+            <a:schemeClr val="accent1"/>
+          </a:effectRef>
+          <a:fontRef idx="minor">
+            <a:schemeClr val="lt1"/>
+          </a:fontRef>
+        </p:style>
+        <p:txBody>
+          <a:bodyPr rtlCol="0" anchor="ctr"/>
+          <a:lstStyle/>
+          <a:p>
+            <a:pPr algn="ctr"/>
+            <a:endParaRPr lang="en-US"/>
+          </a:p>
+        </p:txBody>
+      </p:sp>
+      <p:sp>
+        <p:nvSpPr>
+          <p:cNvPr id="25" name="Rectangle 24">
+            <a:extLst>
+              <a:ext uri="{FF2B5EF4-FFF2-40B4-BE49-F238E27FC236}">
+                <a16:creationId xmlns:a16="http://schemas.microsoft.com/office/drawing/2014/main" id="{1B497F4A-1BFB-B20D-8801-80E701BFE928}"/>
+              </a:ext>
+            </a:extLst>
+          </p:cNvPr>
+          <p:cNvSpPr/>
+          <p:nvPr/>
+        </p:nvSpPr>
+        <p:spPr>
+          <a:xfrm>
+            <a:off x="7395158" y="2265641"/>
+            <a:ext cx="202445" cy="210106"/>
+          </a:xfrm>
+          <a:prstGeom prst="rect">
+            <a:avLst/>
+          </a:prstGeom>
+          <a:solidFill>
+            <a:schemeClr val="bg1">
+              <a:lumMod val="85000"/>
+            </a:schemeClr>
+          </a:solidFill>
+        </p:spPr>
+        <p:style>
+          <a:lnRef idx="2">
+            <a:schemeClr val="accent1">
+              <a:shade val="15000"/>
+            </a:schemeClr>
+          </a:lnRef>
+          <a:fillRef idx="1">
+            <a:schemeClr val="accent1"/>
+          </a:fillRef>
+          <a:effectRef idx="0">
+            <a:schemeClr val="accent1"/>
+          </a:effectRef>
+          <a:fontRef idx="minor">
+            <a:schemeClr val="lt1"/>
+          </a:fontRef>
+        </p:style>
+        <p:txBody>
+          <a:bodyPr rtlCol="0" anchor="ctr"/>
+          <a:lstStyle/>
+          <a:p>
+            <a:pPr algn="ctr"/>
+            <a:endParaRPr lang="en-US"/>
+          </a:p>
+        </p:txBody>
+      </p:sp>
+      <p:sp>
+        <p:nvSpPr>
+          <p:cNvPr id="26" name="TextBox 25">
+            <a:extLst>
+              <a:ext uri="{FF2B5EF4-FFF2-40B4-BE49-F238E27FC236}">
+                <a16:creationId xmlns:a16="http://schemas.microsoft.com/office/drawing/2014/main" id="{A1E32DE7-2FE2-864E-2E6C-7C3E8C29ABFA}"/>
+              </a:ext>
+            </a:extLst>
+          </p:cNvPr>
+          <p:cNvSpPr txBox="1"/>
+          <p:nvPr/>
+        </p:nvSpPr>
+        <p:spPr>
+          <a:xfrm>
+            <a:off x="7211884" y="1896309"/>
+            <a:ext cx="568991" cy="369332"/>
+          </a:xfrm>
+          <a:prstGeom prst="rect">
+            <a:avLst/>
+          </a:prstGeom>
+          <a:noFill/>
+        </p:spPr>
+        <p:txBody>
+          <a:bodyPr wrap="square" rtlCol="0">
+            <a:spAutoFit/>
+          </a:bodyPr>
+          <a:lstStyle/>
+          <a:p>
+            <a:r>
+              <a:rPr lang="en-US" i="1" dirty="0">
+                <a:solidFill>
+                  <a:schemeClr val="accent1"/>
+                </a:solidFill>
+              </a:rPr>
+              <a:t>p</a:t>
+            </a:r>
+            <a:r>
+              <a:rPr lang="en-US" dirty="0">
+                <a:solidFill>
+                  <a:schemeClr val="accent1"/>
+                </a:solidFill>
+              </a:rPr>
+              <a:t>=1</a:t>
+            </a:r>
+            <a:endParaRPr lang="en-US" i="1" dirty="0">
+              <a:solidFill>
+                <a:schemeClr val="accent1"/>
+              </a:solidFill>
+            </a:endParaRPr>
+          </a:p>
+        </p:txBody>
+      </p:sp>
+      <p:sp>
+        <p:nvSpPr>
+          <p:cNvPr id="47" name="TextBox 46">
+            <a:extLst>
+              <a:ext uri="{FF2B5EF4-FFF2-40B4-BE49-F238E27FC236}">
+                <a16:creationId xmlns:a16="http://schemas.microsoft.com/office/drawing/2014/main" id="{C0E0A1F9-AD3C-6D41-048C-EC3B804DF6BB}"/>
+              </a:ext>
+            </a:extLst>
+          </p:cNvPr>
+          <p:cNvSpPr txBox="1"/>
+          <p:nvPr/>
+        </p:nvSpPr>
+        <p:spPr>
+          <a:xfrm>
+            <a:off x="7809130" y="1724363"/>
+            <a:ext cx="1136433" cy="646331"/>
+          </a:xfrm>
+          <a:prstGeom prst="rect">
+            <a:avLst/>
+          </a:prstGeom>
+          <a:noFill/>
+        </p:spPr>
+        <p:txBody>
+          <a:bodyPr wrap="square" rtlCol="0">
+            <a:spAutoFit/>
+          </a:bodyPr>
+          <a:lstStyle/>
+          <a:p>
+            <a:pPr algn="ctr"/>
+            <a:r>
+              <a:rPr lang="en-US" dirty="0">
+                <a:solidFill>
+                  <a:schemeClr val="accent1"/>
+                </a:solidFill>
+              </a:rPr>
+              <a:t>Original values</a:t>
+            </a:r>
+          </a:p>
+        </p:txBody>
+      </p:sp>
+      <p:grpSp>
+        <p:nvGrpSpPr>
+          <p:cNvPr id="114" name="Group 113">
+            <a:extLst>
+              <a:ext uri="{FF2B5EF4-FFF2-40B4-BE49-F238E27FC236}">
+                <a16:creationId xmlns:a16="http://schemas.microsoft.com/office/drawing/2014/main" id="{AC972632-3763-23F1-C209-34BBB1E12844}"/>
+              </a:ext>
+            </a:extLst>
+          </p:cNvPr>
+          <p:cNvGrpSpPr/>
+          <p:nvPr/>
+        </p:nvGrpSpPr>
+        <p:grpSpPr>
+          <a:xfrm rot="5400000">
+            <a:off x="9714730" y="1409969"/>
+            <a:ext cx="876715" cy="1929954"/>
+            <a:chOff x="7289385" y="3024188"/>
+            <a:chExt cx="876715" cy="1929954"/>
+          </a:xfrm>
+        </p:grpSpPr>
+        <p:sp>
+          <p:nvSpPr>
+            <p:cNvPr id="27" name="Rectangle 26">
+              <a:extLst>
+                <a:ext uri="{FF2B5EF4-FFF2-40B4-BE49-F238E27FC236}">
+                  <a16:creationId xmlns:a16="http://schemas.microsoft.com/office/drawing/2014/main" id="{F546C317-1526-EE4E-9AFA-068383F12618}"/>
+                </a:ext>
+              </a:extLst>
+            </p:cNvPr>
+            <p:cNvSpPr/>
+            <p:nvPr/>
+          </p:nvSpPr>
+          <p:spPr>
+            <a:xfrm>
+              <a:off x="7289385" y="3024188"/>
+              <a:ext cx="202445" cy="210106"/>
+            </a:xfrm>
+            <a:prstGeom prst="rect">
+              <a:avLst/>
+            </a:prstGeom>
+            <a:solidFill>
+              <a:schemeClr val="bg1">
+                <a:lumMod val="65000"/>
+              </a:schemeClr>
+            </a:solidFill>
+            <a:ln>
+              <a:noFill/>
+            </a:ln>
+          </p:spPr>
+          <p:style>
+            <a:lnRef idx="2">
+              <a:schemeClr val="accent1">
+                <a:shade val="15000"/>
+              </a:schemeClr>
+            </a:lnRef>
+            <a:fillRef idx="1">
+              <a:schemeClr val="accent1"/>
+            </a:fillRef>
+            <a:effectRef idx="0">
+              <a:schemeClr val="accent1"/>
+            </a:effectRef>
+            <a:fontRef idx="minor">
+              <a:schemeClr val="lt1"/>
+            </a:fontRef>
+          </p:style>
+          <p:txBody>
+            <a:bodyPr rtlCol="0" anchor="ctr"/>
+            <a:lstStyle/>
+            <a:p>
+              <a:pPr algn="ctr"/>
+              <a:endParaRPr lang="en-US"/>
+            </a:p>
+          </p:txBody>
+        </p:sp>
+        <p:sp>
+          <p:nvSpPr>
+            <p:cNvPr id="28" name="Rectangle 27">
+              <a:extLst>
+                <a:ext uri="{FF2B5EF4-FFF2-40B4-BE49-F238E27FC236}">
+                  <a16:creationId xmlns:a16="http://schemas.microsoft.com/office/drawing/2014/main" id="{398FAA97-A014-9D6F-481B-12DD6A72B70A}"/>
+                </a:ext>
+              </a:extLst>
+            </p:cNvPr>
+            <p:cNvSpPr/>
+            <p:nvPr/>
+          </p:nvSpPr>
+          <p:spPr>
+            <a:xfrm>
+              <a:off x="7289385" y="3218894"/>
+              <a:ext cx="202445" cy="210106"/>
+            </a:xfrm>
+            <a:prstGeom prst="rect">
+              <a:avLst/>
+            </a:prstGeom>
+            <a:solidFill>
+              <a:schemeClr val="bg2"/>
+            </a:solidFill>
+            <a:ln>
+              <a:noFill/>
+            </a:ln>
+          </p:spPr>
+          <p:style>
+            <a:lnRef idx="2">
+              <a:schemeClr val="accent1">
+                <a:shade val="15000"/>
+              </a:schemeClr>
+            </a:lnRef>
+            <a:fillRef idx="1">
+              <a:schemeClr val="accent1"/>
+            </a:fillRef>
+            <a:effectRef idx="0">
+              <a:schemeClr val="accent1"/>
+            </a:effectRef>
+            <a:fontRef idx="minor">
+              <a:schemeClr val="lt1"/>
+            </a:fontRef>
+          </p:style>
+          <p:txBody>
+            <a:bodyPr rtlCol="0" anchor="ctr"/>
+            <a:lstStyle/>
+            <a:p>
+              <a:pPr algn="ctr"/>
+              <a:endParaRPr lang="en-US"/>
+            </a:p>
+          </p:txBody>
+        </p:sp>
+        <p:sp>
+          <p:nvSpPr>
+            <p:cNvPr id="29" name="Rectangle 28">
+              <a:extLst>
+                <a:ext uri="{FF2B5EF4-FFF2-40B4-BE49-F238E27FC236}">
+                  <a16:creationId xmlns:a16="http://schemas.microsoft.com/office/drawing/2014/main" id="{8A0AE286-68BF-F6D2-51AC-ECA4FE36F273}"/>
+                </a:ext>
+              </a:extLst>
+            </p:cNvPr>
+            <p:cNvSpPr/>
+            <p:nvPr/>
+          </p:nvSpPr>
+          <p:spPr>
+            <a:xfrm>
+              <a:off x="7289385" y="3403682"/>
+              <a:ext cx="202445" cy="210106"/>
+            </a:xfrm>
+            <a:prstGeom prst="rect">
+              <a:avLst/>
+            </a:prstGeom>
+            <a:solidFill>
+              <a:schemeClr val="bg2">
+                <a:lumMod val="10000"/>
+              </a:schemeClr>
+            </a:solidFill>
+            <a:ln>
+              <a:noFill/>
+            </a:ln>
+          </p:spPr>
+          <p:style>
+            <a:lnRef idx="2">
+              <a:schemeClr val="accent1">
+                <a:shade val="15000"/>
+              </a:schemeClr>
+            </a:lnRef>
+            <a:fillRef idx="1">
+              <a:schemeClr val="accent1"/>
+            </a:fillRef>
+            <a:effectRef idx="0">
+              <a:schemeClr val="accent1"/>
+            </a:effectRef>
+            <a:fontRef idx="minor">
+              <a:schemeClr val="lt1"/>
+            </a:fontRef>
+          </p:style>
+          <p:txBody>
+            <a:bodyPr rtlCol="0" anchor="ctr"/>
+            <a:lstStyle/>
+            <a:p>
+              <a:pPr algn="ctr"/>
+              <a:endParaRPr lang="en-US"/>
+            </a:p>
+          </p:txBody>
+        </p:sp>
+        <p:sp>
+          <p:nvSpPr>
+            <p:cNvPr id="30" name="Rectangle 29">
+              <a:extLst>
+                <a:ext uri="{FF2B5EF4-FFF2-40B4-BE49-F238E27FC236}">
+                  <a16:creationId xmlns:a16="http://schemas.microsoft.com/office/drawing/2014/main" id="{05775650-2C82-5735-EE61-F3BC93AA8995}"/>
+                </a:ext>
+              </a:extLst>
+            </p:cNvPr>
+            <p:cNvSpPr/>
+            <p:nvPr/>
+          </p:nvSpPr>
+          <p:spPr>
+            <a:xfrm>
+              <a:off x="7289385" y="3613788"/>
+              <a:ext cx="202445" cy="210106"/>
+            </a:xfrm>
+            <a:prstGeom prst="rect">
+              <a:avLst/>
+            </a:prstGeom>
+            <a:solidFill>
+              <a:schemeClr val="bg1">
+                <a:lumMod val="85000"/>
+              </a:schemeClr>
+            </a:solidFill>
+            <a:ln>
+              <a:noFill/>
+            </a:ln>
+          </p:spPr>
+          <p:style>
+            <a:lnRef idx="2">
+              <a:schemeClr val="accent1">
+                <a:shade val="15000"/>
+              </a:schemeClr>
+            </a:lnRef>
+            <a:fillRef idx="1">
+              <a:schemeClr val="accent1"/>
+            </a:fillRef>
+            <a:effectRef idx="0">
+              <a:schemeClr val="accent1"/>
+            </a:effectRef>
+            <a:fontRef idx="minor">
+              <a:schemeClr val="lt1"/>
+            </a:fontRef>
+          </p:style>
+          <p:txBody>
+            <a:bodyPr rtlCol="0" anchor="ctr"/>
+            <a:lstStyle/>
+            <a:p>
+              <a:pPr algn="ctr"/>
+              <a:endParaRPr lang="en-US"/>
+            </a:p>
+          </p:txBody>
+        </p:sp>
+        <p:sp>
+          <p:nvSpPr>
+            <p:cNvPr id="31" name="Rectangle 30">
+              <a:extLst>
+                <a:ext uri="{FF2B5EF4-FFF2-40B4-BE49-F238E27FC236}">
+                  <a16:creationId xmlns:a16="http://schemas.microsoft.com/office/drawing/2014/main" id="{060C2E64-6DC5-1EDB-E8E1-8AA496115ABE}"/>
+                </a:ext>
+              </a:extLst>
+            </p:cNvPr>
+            <p:cNvSpPr/>
+            <p:nvPr/>
+          </p:nvSpPr>
+          <p:spPr>
+            <a:xfrm>
+              <a:off x="7289385" y="3798576"/>
+              <a:ext cx="202445" cy="210106"/>
+            </a:xfrm>
+            <a:prstGeom prst="rect">
+              <a:avLst/>
+            </a:prstGeom>
+            <a:solidFill>
+              <a:schemeClr val="bg2">
+                <a:lumMod val="90000"/>
+              </a:schemeClr>
+            </a:solidFill>
+            <a:ln>
+              <a:noFill/>
+            </a:ln>
+          </p:spPr>
+          <p:style>
+            <a:lnRef idx="2">
+              <a:schemeClr val="accent1">
+                <a:shade val="15000"/>
+              </a:schemeClr>
+            </a:lnRef>
+            <a:fillRef idx="1">
+              <a:schemeClr val="accent1"/>
+            </a:fillRef>
+            <a:effectRef idx="0">
+              <a:schemeClr val="accent1"/>
+            </a:effectRef>
+            <a:fontRef idx="minor">
+              <a:schemeClr val="lt1"/>
+            </a:fontRef>
+          </p:style>
+          <p:txBody>
+            <a:bodyPr rtlCol="0" anchor="ctr"/>
+            <a:lstStyle/>
+            <a:p>
+              <a:pPr algn="ctr"/>
+              <a:endParaRPr lang="en-US"/>
+            </a:p>
+          </p:txBody>
+        </p:sp>
+        <p:sp>
+          <p:nvSpPr>
+            <p:cNvPr id="32" name="Rectangle 31">
+              <a:extLst>
+                <a:ext uri="{FF2B5EF4-FFF2-40B4-BE49-F238E27FC236}">
+                  <a16:creationId xmlns:a16="http://schemas.microsoft.com/office/drawing/2014/main" id="{6A2D4B19-B5A8-01EB-E8C4-191BFB66BE0A}"/>
+                </a:ext>
+              </a:extLst>
+            </p:cNvPr>
+            <p:cNvSpPr/>
+            <p:nvPr/>
+          </p:nvSpPr>
+          <p:spPr>
+            <a:xfrm>
+              <a:off x="7289385" y="3983364"/>
+              <a:ext cx="202445" cy="210106"/>
+            </a:xfrm>
+            <a:prstGeom prst="rect">
+              <a:avLst/>
+            </a:prstGeom>
+            <a:solidFill>
+              <a:schemeClr val="bg1">
+                <a:lumMod val="85000"/>
+              </a:schemeClr>
+            </a:solidFill>
+            <a:ln>
+              <a:noFill/>
+            </a:ln>
+          </p:spPr>
+          <p:style>
+            <a:lnRef idx="2">
+              <a:schemeClr val="accent1">
+                <a:shade val="15000"/>
+              </a:schemeClr>
+            </a:lnRef>
+            <a:fillRef idx="1">
+              <a:schemeClr val="accent1"/>
+            </a:fillRef>
+            <a:effectRef idx="0">
+              <a:schemeClr val="accent1"/>
+            </a:effectRef>
+            <a:fontRef idx="minor">
+              <a:schemeClr val="lt1"/>
+            </a:fontRef>
+          </p:style>
+          <p:txBody>
+            <a:bodyPr rtlCol="0" anchor="ctr"/>
+            <a:lstStyle/>
+            <a:p>
+              <a:pPr algn="ctr"/>
+              <a:endParaRPr lang="en-US"/>
+            </a:p>
+          </p:txBody>
+        </p:sp>
+        <p:sp>
+          <p:nvSpPr>
+            <p:cNvPr id="33" name="Rectangle 32">
+              <a:extLst>
+                <a:ext uri="{FF2B5EF4-FFF2-40B4-BE49-F238E27FC236}">
+                  <a16:creationId xmlns:a16="http://schemas.microsoft.com/office/drawing/2014/main" id="{5C5F057C-CDB9-99E4-05E3-F4AF62805E2B}"/>
+                </a:ext>
+              </a:extLst>
+            </p:cNvPr>
+            <p:cNvSpPr/>
+            <p:nvPr/>
+          </p:nvSpPr>
+          <p:spPr>
+            <a:xfrm>
+              <a:off x="7289385" y="4168152"/>
+              <a:ext cx="202445" cy="210106"/>
+            </a:xfrm>
+            <a:prstGeom prst="rect">
+              <a:avLst/>
+            </a:prstGeom>
+            <a:solidFill>
+              <a:schemeClr val="bg1">
+                <a:lumMod val="65000"/>
+              </a:schemeClr>
+            </a:solidFill>
+            <a:ln>
+              <a:noFill/>
+            </a:ln>
+          </p:spPr>
+          <p:style>
+            <a:lnRef idx="2">
+              <a:schemeClr val="accent1">
+                <a:shade val="15000"/>
+              </a:schemeClr>
+            </a:lnRef>
+            <a:fillRef idx="1">
+              <a:schemeClr val="accent1"/>
+            </a:fillRef>
+            <a:effectRef idx="0">
+              <a:schemeClr val="accent1"/>
+            </a:effectRef>
+            <a:fontRef idx="minor">
+              <a:schemeClr val="lt1"/>
+            </a:fontRef>
+          </p:style>
+          <p:txBody>
+            <a:bodyPr rtlCol="0" anchor="ctr"/>
+            <a:lstStyle/>
+            <a:p>
+              <a:pPr algn="ctr"/>
+              <a:endParaRPr lang="en-US"/>
+            </a:p>
+          </p:txBody>
+        </p:sp>
+        <p:sp>
+          <p:nvSpPr>
+            <p:cNvPr id="34" name="Rectangle 33">
+              <a:extLst>
+                <a:ext uri="{FF2B5EF4-FFF2-40B4-BE49-F238E27FC236}">
+                  <a16:creationId xmlns:a16="http://schemas.microsoft.com/office/drawing/2014/main" id="{F1557BBA-51E6-F665-A0C5-8A6CA3EA28D7}"/>
+                </a:ext>
+              </a:extLst>
+            </p:cNvPr>
+            <p:cNvSpPr/>
+            <p:nvPr/>
+          </p:nvSpPr>
+          <p:spPr>
+            <a:xfrm>
+              <a:off x="7289385" y="4349142"/>
+              <a:ext cx="202445" cy="210106"/>
+            </a:xfrm>
+            <a:prstGeom prst="rect">
+              <a:avLst/>
+            </a:prstGeom>
+            <a:solidFill>
+              <a:schemeClr val="tx1">
+                <a:lumMod val="65000"/>
+                <a:lumOff val="35000"/>
+              </a:schemeClr>
+            </a:solidFill>
+            <a:ln>
+              <a:noFill/>
+            </a:ln>
+          </p:spPr>
+          <p:style>
+            <a:lnRef idx="2">
+              <a:schemeClr val="accent1">
+                <a:shade val="15000"/>
+              </a:schemeClr>
+            </a:lnRef>
+            <a:fillRef idx="1">
+              <a:schemeClr val="accent1"/>
+            </a:fillRef>
+            <a:effectRef idx="0">
+              <a:schemeClr val="accent1"/>
+            </a:effectRef>
+            <a:fontRef idx="minor">
+              <a:schemeClr val="lt1"/>
+            </a:fontRef>
+          </p:style>
+          <p:txBody>
+            <a:bodyPr rtlCol="0" anchor="ctr"/>
+            <a:lstStyle/>
+            <a:p>
+              <a:pPr algn="ctr"/>
+              <a:endParaRPr lang="en-US"/>
+            </a:p>
+          </p:txBody>
+        </p:sp>
+        <p:sp>
+          <p:nvSpPr>
+            <p:cNvPr id="35" name="Rectangle 34">
+              <a:extLst>
+                <a:ext uri="{FF2B5EF4-FFF2-40B4-BE49-F238E27FC236}">
+                  <a16:creationId xmlns:a16="http://schemas.microsoft.com/office/drawing/2014/main" id="{CB2F66A5-53EF-D67A-B153-E71EF33F25BF}"/>
+                </a:ext>
+              </a:extLst>
+            </p:cNvPr>
+            <p:cNvSpPr/>
+            <p:nvPr/>
+          </p:nvSpPr>
+          <p:spPr>
+            <a:xfrm>
+              <a:off x="7289385" y="4533930"/>
+              <a:ext cx="202445" cy="210106"/>
+            </a:xfrm>
+            <a:prstGeom prst="rect">
+              <a:avLst/>
+            </a:prstGeom>
+            <a:solidFill>
+              <a:schemeClr val="bg1">
+                <a:lumMod val="85000"/>
+              </a:schemeClr>
+            </a:solidFill>
+            <a:ln>
+              <a:noFill/>
+            </a:ln>
+          </p:spPr>
+          <p:style>
+            <a:lnRef idx="2">
+              <a:schemeClr val="accent1">
+                <a:shade val="15000"/>
+              </a:schemeClr>
+            </a:lnRef>
+            <a:fillRef idx="1">
+              <a:schemeClr val="accent1"/>
+            </a:fillRef>
+            <a:effectRef idx="0">
+              <a:schemeClr val="accent1"/>
+            </a:effectRef>
+            <a:fontRef idx="minor">
+              <a:schemeClr val="lt1"/>
+            </a:fontRef>
+          </p:style>
+          <p:txBody>
+            <a:bodyPr rtlCol="0" anchor="ctr"/>
+            <a:lstStyle/>
+            <a:p>
+              <a:pPr algn="ctr"/>
+              <a:endParaRPr lang="en-US"/>
+            </a:p>
+          </p:txBody>
+        </p:sp>
+        <p:sp>
+          <p:nvSpPr>
+            <p:cNvPr id="36" name="Rectangle 35">
+              <a:extLst>
+                <a:ext uri="{FF2B5EF4-FFF2-40B4-BE49-F238E27FC236}">
+                  <a16:creationId xmlns:a16="http://schemas.microsoft.com/office/drawing/2014/main" id="{4DDA4F5C-5578-1D0C-B573-8B6DCA532832}"/>
+                </a:ext>
+              </a:extLst>
+            </p:cNvPr>
+            <p:cNvSpPr/>
+            <p:nvPr/>
+          </p:nvSpPr>
+          <p:spPr>
+            <a:xfrm>
+              <a:off x="7289385" y="4744036"/>
+              <a:ext cx="202445" cy="210106"/>
+            </a:xfrm>
+            <a:prstGeom prst="rect">
+              <a:avLst/>
+            </a:prstGeom>
+            <a:solidFill>
+              <a:schemeClr val="bg1">
+                <a:lumMod val="50000"/>
+              </a:schemeClr>
+            </a:solidFill>
+            <a:ln>
+              <a:noFill/>
+            </a:ln>
+          </p:spPr>
+          <p:style>
+            <a:lnRef idx="2">
+              <a:schemeClr val="accent1">
+                <a:shade val="15000"/>
+              </a:schemeClr>
+            </a:lnRef>
+            <a:fillRef idx="1">
+              <a:schemeClr val="accent1"/>
+            </a:fillRef>
+            <a:effectRef idx="0">
+              <a:schemeClr val="accent1"/>
+            </a:effectRef>
+            <a:fontRef idx="minor">
+              <a:schemeClr val="lt1"/>
+            </a:fontRef>
+          </p:style>
+          <p:txBody>
+            <a:bodyPr rtlCol="0" anchor="ctr"/>
+            <a:lstStyle/>
+            <a:p>
+              <a:pPr algn="ctr"/>
+              <a:endParaRPr lang="en-US"/>
+            </a:p>
+          </p:txBody>
+        </p:sp>
+        <p:sp>
+          <p:nvSpPr>
+            <p:cNvPr id="37" name="Rectangle 36">
+              <a:extLst>
+                <a:ext uri="{FF2B5EF4-FFF2-40B4-BE49-F238E27FC236}">
+                  <a16:creationId xmlns:a16="http://schemas.microsoft.com/office/drawing/2014/main" id="{ECDEB391-F6BE-3908-5492-D09D4BC48E49}"/>
+                </a:ext>
+              </a:extLst>
+            </p:cNvPr>
+            <p:cNvSpPr/>
+            <p:nvPr/>
+          </p:nvSpPr>
+          <p:spPr>
+            <a:xfrm>
+              <a:off x="7963655" y="3024188"/>
+              <a:ext cx="202445" cy="210106"/>
+            </a:xfrm>
+            <a:prstGeom prst="rect">
+              <a:avLst/>
+            </a:prstGeom>
+            <a:solidFill>
+              <a:schemeClr val="bg1">
+                <a:lumMod val="85000"/>
+              </a:schemeClr>
+            </a:solidFill>
+            <a:ln>
+              <a:noFill/>
+            </a:ln>
+          </p:spPr>
+          <p:style>
+            <a:lnRef idx="2">
+              <a:schemeClr val="accent1">
+                <a:shade val="15000"/>
+              </a:schemeClr>
+            </a:lnRef>
+            <a:fillRef idx="1">
+              <a:schemeClr val="accent1"/>
+            </a:fillRef>
+            <a:effectRef idx="0">
+              <a:schemeClr val="accent1"/>
+            </a:effectRef>
+            <a:fontRef idx="minor">
+              <a:schemeClr val="lt1"/>
+            </a:fontRef>
+          </p:style>
+          <p:txBody>
+            <a:bodyPr rtlCol="0" anchor="ctr"/>
+            <a:lstStyle/>
+            <a:p>
+              <a:pPr algn="ctr"/>
+              <a:endParaRPr lang="en-US"/>
+            </a:p>
+          </p:txBody>
+        </p:sp>
+        <p:sp>
+          <p:nvSpPr>
+            <p:cNvPr id="38" name="Rectangle 37">
+              <a:extLst>
+                <a:ext uri="{FF2B5EF4-FFF2-40B4-BE49-F238E27FC236}">
+                  <a16:creationId xmlns:a16="http://schemas.microsoft.com/office/drawing/2014/main" id="{064E3068-BBB6-124A-BE96-AF19312D3834}"/>
+                </a:ext>
+              </a:extLst>
+            </p:cNvPr>
+            <p:cNvSpPr/>
+            <p:nvPr/>
+          </p:nvSpPr>
+          <p:spPr>
+            <a:xfrm>
+              <a:off x="7963655" y="3218894"/>
+              <a:ext cx="202445" cy="210106"/>
+            </a:xfrm>
+            <a:prstGeom prst="rect">
+              <a:avLst/>
+            </a:prstGeom>
+            <a:solidFill>
+              <a:schemeClr val="tx1">
+                <a:lumMod val="50000"/>
+                <a:lumOff val="50000"/>
+              </a:schemeClr>
+            </a:solidFill>
+            <a:ln>
+              <a:noFill/>
+            </a:ln>
+          </p:spPr>
+          <p:style>
+            <a:lnRef idx="2">
+              <a:schemeClr val="accent1">
+                <a:shade val="15000"/>
+              </a:schemeClr>
+            </a:lnRef>
+            <a:fillRef idx="1">
+              <a:schemeClr val="accent1"/>
+            </a:fillRef>
+            <a:effectRef idx="0">
+              <a:schemeClr val="accent1"/>
+            </a:effectRef>
+            <a:fontRef idx="minor">
+              <a:schemeClr val="lt1"/>
+            </a:fontRef>
+          </p:style>
+          <p:txBody>
+            <a:bodyPr rtlCol="0" anchor="ctr"/>
+            <a:lstStyle/>
+            <a:p>
+              <a:pPr algn="ctr"/>
+              <a:endParaRPr lang="en-US"/>
+            </a:p>
+          </p:txBody>
+        </p:sp>
+        <p:sp>
+          <p:nvSpPr>
+            <p:cNvPr id="39" name="Rectangle 38">
+              <a:extLst>
+                <a:ext uri="{FF2B5EF4-FFF2-40B4-BE49-F238E27FC236}">
+                  <a16:creationId xmlns:a16="http://schemas.microsoft.com/office/drawing/2014/main" id="{765B5B97-591E-3A25-ABD6-334375ABAABB}"/>
+                </a:ext>
+              </a:extLst>
+            </p:cNvPr>
+            <p:cNvSpPr/>
+            <p:nvPr/>
+          </p:nvSpPr>
+          <p:spPr>
+            <a:xfrm>
+              <a:off x="7963655" y="3403682"/>
+              <a:ext cx="202445" cy="210106"/>
+            </a:xfrm>
+            <a:prstGeom prst="rect">
+              <a:avLst/>
+            </a:prstGeom>
+            <a:solidFill>
+              <a:schemeClr val="bg1">
+                <a:lumMod val="85000"/>
+              </a:schemeClr>
+            </a:solidFill>
+            <a:ln>
+              <a:noFill/>
+            </a:ln>
+          </p:spPr>
+          <p:style>
+            <a:lnRef idx="2">
+              <a:schemeClr val="accent1">
+                <a:shade val="15000"/>
+              </a:schemeClr>
+            </a:lnRef>
+            <a:fillRef idx="1">
+              <a:schemeClr val="accent1"/>
+            </a:fillRef>
+            <a:effectRef idx="0">
+              <a:schemeClr val="accent1"/>
+            </a:effectRef>
+            <a:fontRef idx="minor">
+              <a:schemeClr val="lt1"/>
+            </a:fontRef>
+          </p:style>
+          <p:txBody>
+            <a:bodyPr rtlCol="0" anchor="ctr"/>
+            <a:lstStyle/>
+            <a:p>
+              <a:pPr algn="ctr"/>
+              <a:endParaRPr lang="en-US"/>
+            </a:p>
+          </p:txBody>
+        </p:sp>
+        <p:sp>
+          <p:nvSpPr>
+            <p:cNvPr id="40" name="Rectangle 39">
+              <a:extLst>
+                <a:ext uri="{FF2B5EF4-FFF2-40B4-BE49-F238E27FC236}">
+                  <a16:creationId xmlns:a16="http://schemas.microsoft.com/office/drawing/2014/main" id="{4044642B-3C3F-E6E9-11EC-ACA48A7479C8}"/>
+                </a:ext>
+              </a:extLst>
+            </p:cNvPr>
+            <p:cNvSpPr/>
+            <p:nvPr/>
+          </p:nvSpPr>
+          <p:spPr>
+            <a:xfrm>
+              <a:off x="7963655" y="3613788"/>
+              <a:ext cx="202445" cy="210106"/>
+            </a:xfrm>
+            <a:prstGeom prst="rect">
+              <a:avLst/>
+            </a:prstGeom>
+            <a:solidFill>
+              <a:schemeClr val="bg2">
+                <a:lumMod val="75000"/>
+              </a:schemeClr>
+            </a:solidFill>
+            <a:ln>
+              <a:noFill/>
+            </a:ln>
+          </p:spPr>
+          <p:style>
+            <a:lnRef idx="2">
+              <a:schemeClr val="accent1">
+                <a:shade val="15000"/>
+              </a:schemeClr>
+            </a:lnRef>
+            <a:fillRef idx="1">
+              <a:schemeClr val="accent1"/>
+            </a:fillRef>
+            <a:effectRef idx="0">
+              <a:schemeClr val="accent1"/>
+            </a:effectRef>
+            <a:fontRef idx="minor">
+              <a:schemeClr val="lt1"/>
+            </a:fontRef>
+          </p:style>
+          <p:txBody>
+            <a:bodyPr rtlCol="0" anchor="ctr"/>
+            <a:lstStyle/>
+            <a:p>
+              <a:pPr algn="ctr"/>
+              <a:endParaRPr lang="en-US"/>
+            </a:p>
+          </p:txBody>
+        </p:sp>
+        <p:sp>
+          <p:nvSpPr>
+            <p:cNvPr id="41" name="Rectangle 40">
+              <a:extLst>
+                <a:ext uri="{FF2B5EF4-FFF2-40B4-BE49-F238E27FC236}">
+                  <a16:creationId xmlns:a16="http://schemas.microsoft.com/office/drawing/2014/main" id="{929D0C2B-E4E2-C2CC-5BDD-BFB8893C3E0B}"/>
+                </a:ext>
+              </a:extLst>
+            </p:cNvPr>
+            <p:cNvSpPr/>
+            <p:nvPr/>
+          </p:nvSpPr>
+          <p:spPr>
+            <a:xfrm>
+              <a:off x="7963655" y="3798576"/>
+              <a:ext cx="202445" cy="210106"/>
+            </a:xfrm>
+            <a:prstGeom prst="rect">
+              <a:avLst/>
+            </a:prstGeom>
+            <a:solidFill>
+              <a:schemeClr val="bg1">
+                <a:lumMod val="85000"/>
+              </a:schemeClr>
+            </a:solidFill>
+            <a:ln>
+              <a:noFill/>
+            </a:ln>
+          </p:spPr>
+          <p:style>
+            <a:lnRef idx="2">
+              <a:schemeClr val="accent1">
+                <a:shade val="15000"/>
+              </a:schemeClr>
+            </a:lnRef>
+            <a:fillRef idx="1">
+              <a:schemeClr val="accent1"/>
+            </a:fillRef>
+            <a:effectRef idx="0">
+              <a:schemeClr val="accent1"/>
+            </a:effectRef>
+            <a:fontRef idx="minor">
+              <a:schemeClr val="lt1"/>
+            </a:fontRef>
+          </p:style>
+          <p:txBody>
+            <a:bodyPr rtlCol="0" anchor="ctr"/>
+            <a:lstStyle/>
+            <a:p>
+              <a:pPr algn="ctr"/>
+              <a:endParaRPr lang="en-US"/>
+            </a:p>
+          </p:txBody>
+        </p:sp>
+        <p:sp>
+          <p:nvSpPr>
+            <p:cNvPr id="42" name="Rectangle 41">
+              <a:extLst>
+                <a:ext uri="{FF2B5EF4-FFF2-40B4-BE49-F238E27FC236}">
+                  <a16:creationId xmlns:a16="http://schemas.microsoft.com/office/drawing/2014/main" id="{B2649E2A-9A4D-9892-EC26-362D72EFCEDB}"/>
+                </a:ext>
+              </a:extLst>
+            </p:cNvPr>
+            <p:cNvSpPr/>
+            <p:nvPr/>
+          </p:nvSpPr>
+          <p:spPr>
+            <a:xfrm>
+              <a:off x="7963655" y="3983364"/>
+              <a:ext cx="202445" cy="210106"/>
+            </a:xfrm>
+            <a:prstGeom prst="rect">
+              <a:avLst/>
+            </a:prstGeom>
+            <a:solidFill>
+              <a:schemeClr val="bg2"/>
+            </a:solidFill>
+            <a:ln>
+              <a:noFill/>
+            </a:ln>
+          </p:spPr>
+          <p:style>
+            <a:lnRef idx="2">
+              <a:schemeClr val="accent1">
+                <a:shade val="15000"/>
+              </a:schemeClr>
+            </a:lnRef>
+            <a:fillRef idx="1">
+              <a:schemeClr val="accent1"/>
+            </a:fillRef>
+            <a:effectRef idx="0">
+              <a:schemeClr val="accent1"/>
+            </a:effectRef>
+            <a:fontRef idx="minor">
+              <a:schemeClr val="lt1"/>
+            </a:fontRef>
+          </p:style>
+          <p:txBody>
+            <a:bodyPr rtlCol="0" anchor="ctr"/>
+            <a:lstStyle/>
+            <a:p>
+              <a:pPr algn="ctr"/>
+              <a:endParaRPr lang="en-US"/>
+            </a:p>
+          </p:txBody>
+        </p:sp>
+        <p:sp>
+          <p:nvSpPr>
+            <p:cNvPr id="43" name="Rectangle 42">
+              <a:extLst>
+                <a:ext uri="{FF2B5EF4-FFF2-40B4-BE49-F238E27FC236}">
+                  <a16:creationId xmlns:a16="http://schemas.microsoft.com/office/drawing/2014/main" id="{32C27274-EE55-60FB-6BC1-7EAA742EB61D}"/>
+                </a:ext>
+              </a:extLst>
+            </p:cNvPr>
+            <p:cNvSpPr/>
+            <p:nvPr/>
+          </p:nvSpPr>
+          <p:spPr>
+            <a:xfrm>
+              <a:off x="7963655" y="4168152"/>
+              <a:ext cx="202445" cy="210106"/>
+            </a:xfrm>
+            <a:prstGeom prst="rect">
+              <a:avLst/>
+            </a:prstGeom>
+            <a:solidFill>
+              <a:schemeClr val="bg1">
+                <a:lumMod val="85000"/>
+              </a:schemeClr>
+            </a:solidFill>
+            <a:ln>
+              <a:noFill/>
+            </a:ln>
+          </p:spPr>
+          <p:style>
+            <a:lnRef idx="2">
+              <a:schemeClr val="accent1">
+                <a:shade val="15000"/>
+              </a:schemeClr>
+            </a:lnRef>
+            <a:fillRef idx="1">
+              <a:schemeClr val="accent1"/>
+            </a:fillRef>
+            <a:effectRef idx="0">
+              <a:schemeClr val="accent1"/>
+            </a:effectRef>
+            <a:fontRef idx="minor">
+              <a:schemeClr val="lt1"/>
+            </a:fontRef>
+          </p:style>
+          <p:txBody>
+            <a:bodyPr rtlCol="0" anchor="ctr"/>
+            <a:lstStyle/>
+            <a:p>
+              <a:pPr algn="ctr"/>
+              <a:endParaRPr lang="en-US"/>
+            </a:p>
+          </p:txBody>
+        </p:sp>
+        <p:sp>
+          <p:nvSpPr>
+            <p:cNvPr id="44" name="Rectangle 43">
+              <a:extLst>
+                <a:ext uri="{FF2B5EF4-FFF2-40B4-BE49-F238E27FC236}">
+                  <a16:creationId xmlns:a16="http://schemas.microsoft.com/office/drawing/2014/main" id="{CE16C78C-7D34-642B-1FDA-8C43AC53F748}"/>
+                </a:ext>
+              </a:extLst>
+            </p:cNvPr>
+            <p:cNvSpPr/>
+            <p:nvPr/>
+          </p:nvSpPr>
+          <p:spPr>
+            <a:xfrm>
+              <a:off x="7963655" y="4349142"/>
+              <a:ext cx="202445" cy="210106"/>
+            </a:xfrm>
+            <a:prstGeom prst="rect">
+              <a:avLst/>
+            </a:prstGeom>
+            <a:solidFill>
+              <a:schemeClr val="bg2"/>
+            </a:solidFill>
+            <a:ln>
+              <a:noFill/>
+            </a:ln>
+          </p:spPr>
+          <p:style>
+            <a:lnRef idx="2">
+              <a:schemeClr val="accent1">
+                <a:shade val="15000"/>
+              </a:schemeClr>
+            </a:lnRef>
+            <a:fillRef idx="1">
+              <a:schemeClr val="accent1"/>
+            </a:fillRef>
+            <a:effectRef idx="0">
+              <a:schemeClr val="accent1"/>
+            </a:effectRef>
+            <a:fontRef idx="minor">
+              <a:schemeClr val="lt1"/>
+            </a:fontRef>
+          </p:style>
+          <p:txBody>
+            <a:bodyPr rtlCol="0" anchor="ctr"/>
+            <a:lstStyle/>
+            <a:p>
+              <a:pPr algn="ctr"/>
+              <a:endParaRPr lang="en-US"/>
+            </a:p>
+          </p:txBody>
+        </p:sp>
+        <p:sp>
+          <p:nvSpPr>
+            <p:cNvPr id="45" name="Rectangle 44">
+              <a:extLst>
+                <a:ext uri="{FF2B5EF4-FFF2-40B4-BE49-F238E27FC236}">
+                  <a16:creationId xmlns:a16="http://schemas.microsoft.com/office/drawing/2014/main" id="{FB49594C-D5C4-502D-1E87-3666E338EC78}"/>
+                </a:ext>
+              </a:extLst>
+            </p:cNvPr>
+            <p:cNvSpPr/>
+            <p:nvPr/>
+          </p:nvSpPr>
+          <p:spPr>
+            <a:xfrm>
+              <a:off x="7963655" y="4533930"/>
+              <a:ext cx="202445" cy="210106"/>
+            </a:xfrm>
+            <a:prstGeom prst="rect">
+              <a:avLst/>
+            </a:prstGeom>
+            <a:solidFill>
+              <a:schemeClr val="bg1">
+                <a:lumMod val="65000"/>
+              </a:schemeClr>
+            </a:solidFill>
+            <a:ln>
+              <a:noFill/>
+            </a:ln>
+          </p:spPr>
+          <p:style>
+            <a:lnRef idx="2">
+              <a:schemeClr val="accent1">
+                <a:shade val="15000"/>
+              </a:schemeClr>
+            </a:lnRef>
+            <a:fillRef idx="1">
+              <a:schemeClr val="accent1"/>
+            </a:fillRef>
+            <a:effectRef idx="0">
+              <a:schemeClr val="accent1"/>
+            </a:effectRef>
+            <a:fontRef idx="minor">
+              <a:schemeClr val="lt1"/>
+            </a:fontRef>
+          </p:style>
+          <p:txBody>
+            <a:bodyPr rtlCol="0" anchor="ctr"/>
+            <a:lstStyle/>
+            <a:p>
+              <a:pPr algn="ctr"/>
+              <a:endParaRPr lang="en-US"/>
+            </a:p>
+          </p:txBody>
+        </p:sp>
+        <p:sp>
+          <p:nvSpPr>
+            <p:cNvPr id="46" name="Rectangle 45">
+              <a:extLst>
+                <a:ext uri="{FF2B5EF4-FFF2-40B4-BE49-F238E27FC236}">
+                  <a16:creationId xmlns:a16="http://schemas.microsoft.com/office/drawing/2014/main" id="{7CEB0AF9-06D5-7844-B1BD-27123C9677B7}"/>
+                </a:ext>
+              </a:extLst>
+            </p:cNvPr>
+            <p:cNvSpPr/>
+            <p:nvPr/>
+          </p:nvSpPr>
+          <p:spPr>
+            <a:xfrm>
+              <a:off x="7963655" y="4744036"/>
+              <a:ext cx="202445" cy="210106"/>
+            </a:xfrm>
+            <a:prstGeom prst="rect">
+              <a:avLst/>
+            </a:prstGeom>
+            <a:solidFill>
+              <a:schemeClr val="bg2">
+                <a:lumMod val="10000"/>
+              </a:schemeClr>
+            </a:solidFill>
+            <a:ln>
+              <a:noFill/>
+            </a:ln>
+          </p:spPr>
+          <p:style>
+            <a:lnRef idx="2">
+              <a:schemeClr val="accent1">
+                <a:shade val="15000"/>
+              </a:schemeClr>
+            </a:lnRef>
+            <a:fillRef idx="1">
+              <a:schemeClr val="accent1"/>
+            </a:fillRef>
+            <a:effectRef idx="0">
+              <a:schemeClr val="accent1"/>
+            </a:effectRef>
+            <a:fontRef idx="minor">
+              <a:schemeClr val="lt1"/>
+            </a:fontRef>
+          </p:style>
+          <p:txBody>
+            <a:bodyPr rtlCol="0" anchor="ctr"/>
+            <a:lstStyle/>
+            <a:p>
+              <a:pPr algn="ctr"/>
+              <a:endParaRPr lang="en-US"/>
+            </a:p>
+          </p:txBody>
+        </p:sp>
+        <p:sp>
+          <p:nvSpPr>
+            <p:cNvPr id="48" name="Arrow: Right 47">
+              <a:extLst>
+                <a:ext uri="{FF2B5EF4-FFF2-40B4-BE49-F238E27FC236}">
+                  <a16:creationId xmlns:a16="http://schemas.microsoft.com/office/drawing/2014/main" id="{CB36C9AC-3BD5-6B20-B8E9-2A87ACA8AB3B}"/>
+                </a:ext>
+              </a:extLst>
+            </p:cNvPr>
+            <p:cNvSpPr/>
+            <p:nvPr/>
+          </p:nvSpPr>
+          <p:spPr>
+            <a:xfrm>
+              <a:off x="7581900" y="3352800"/>
+              <a:ext cx="266701" cy="210106"/>
+            </a:xfrm>
+            <a:prstGeom prst="rightArrow">
+              <a:avLst/>
+            </a:prstGeom>
+          </p:spPr>
+          <p:style>
+            <a:lnRef idx="2">
+              <a:schemeClr val="accent1">
+                <a:shade val="15000"/>
+              </a:schemeClr>
+            </a:lnRef>
+            <a:fillRef idx="1">
+              <a:schemeClr val="accent1"/>
+            </a:fillRef>
+            <a:effectRef idx="0">
+              <a:schemeClr val="accent1"/>
+            </a:effectRef>
+            <a:fontRef idx="minor">
+              <a:schemeClr val="lt1"/>
+            </a:fontRef>
+          </p:style>
+          <p:txBody>
+            <a:bodyPr rtlCol="0" anchor="ctr"/>
+            <a:lstStyle/>
+            <a:p>
+              <a:pPr algn="ctr"/>
+              <a:endParaRPr lang="en-US"/>
+            </a:p>
+          </p:txBody>
+        </p:sp>
+        <p:sp>
+          <p:nvSpPr>
+            <p:cNvPr id="49" name="Arrow: Right 48">
+              <a:extLst>
+                <a:ext uri="{FF2B5EF4-FFF2-40B4-BE49-F238E27FC236}">
+                  <a16:creationId xmlns:a16="http://schemas.microsoft.com/office/drawing/2014/main" id="{C3FFD429-9744-4F44-1BE8-B93561A67263}"/>
+                </a:ext>
+              </a:extLst>
+            </p:cNvPr>
+            <p:cNvSpPr/>
+            <p:nvPr/>
+          </p:nvSpPr>
+          <p:spPr>
+            <a:xfrm>
+              <a:off x="7594392" y="4638983"/>
+              <a:ext cx="266701" cy="210106"/>
+            </a:xfrm>
+            <a:prstGeom prst="rightArrow">
+              <a:avLst/>
+            </a:prstGeom>
+          </p:spPr>
+          <p:style>
+            <a:lnRef idx="2">
+              <a:schemeClr val="accent1">
+                <a:shade val="15000"/>
+              </a:schemeClr>
+            </a:lnRef>
+            <a:fillRef idx="1">
+              <a:schemeClr val="accent1"/>
+            </a:fillRef>
+            <a:effectRef idx="0">
+              <a:schemeClr val="accent1"/>
+            </a:effectRef>
+            <a:fontRef idx="minor">
+              <a:schemeClr val="lt1"/>
+            </a:fontRef>
+          </p:style>
+          <p:txBody>
+            <a:bodyPr rtlCol="0" anchor="ctr"/>
+            <a:lstStyle/>
+            <a:p>
+              <a:pPr algn="ctr"/>
+              <a:endParaRPr lang="en-US"/>
+            </a:p>
+          </p:txBody>
+        </p:sp>
+        <p:sp>
+          <p:nvSpPr>
+            <p:cNvPr id="50" name="Arrow: Right 49">
+              <a:extLst>
+                <a:ext uri="{FF2B5EF4-FFF2-40B4-BE49-F238E27FC236}">
+                  <a16:creationId xmlns:a16="http://schemas.microsoft.com/office/drawing/2014/main" id="{E478C581-A2FF-588F-EF6A-A96E305E068A}"/>
+                </a:ext>
+              </a:extLst>
+            </p:cNvPr>
+            <p:cNvSpPr/>
+            <p:nvPr/>
+          </p:nvSpPr>
+          <p:spPr>
+            <a:xfrm>
+              <a:off x="7581899" y="3995891"/>
+              <a:ext cx="266701" cy="210106"/>
+            </a:xfrm>
+            <a:prstGeom prst="rightArrow">
+              <a:avLst/>
+            </a:prstGeom>
+          </p:spPr>
+          <p:style>
+            <a:lnRef idx="2">
+              <a:schemeClr val="accent1">
+                <a:shade val="15000"/>
+              </a:schemeClr>
+            </a:lnRef>
+            <a:fillRef idx="1">
+              <a:schemeClr val="accent1"/>
+            </a:fillRef>
+            <a:effectRef idx="0">
+              <a:schemeClr val="accent1"/>
+            </a:effectRef>
+            <a:fontRef idx="minor">
+              <a:schemeClr val="lt1"/>
+            </a:fontRef>
+          </p:style>
+          <p:txBody>
+            <a:bodyPr rtlCol="0" anchor="ctr"/>
+            <a:lstStyle/>
+            <a:p>
+              <a:pPr algn="ctr"/>
+              <a:endParaRPr lang="en-US"/>
+            </a:p>
+          </p:txBody>
+        </p:sp>
+      </p:grpSp>
+      <p:sp>
+        <p:nvSpPr>
+          <p:cNvPr id="51" name="Oval 50">
+            <a:extLst>
+              <a:ext uri="{FF2B5EF4-FFF2-40B4-BE49-F238E27FC236}">
+                <a16:creationId xmlns:a16="http://schemas.microsoft.com/office/drawing/2014/main" id="{8AEC8B05-DF33-4860-C58A-18ADAB1FE3EF}"/>
+              </a:ext>
+            </a:extLst>
+          </p:cNvPr>
+          <p:cNvSpPr/>
+          <p:nvPr/>
+        </p:nvSpPr>
+        <p:spPr>
+          <a:xfrm>
+            <a:off x="6931735" y="3325258"/>
+            <a:ext cx="266218" cy="266217"/>
+          </a:xfrm>
+          <a:prstGeom prst="ellipse">
+            <a:avLst/>
+          </a:prstGeom>
+          <a:solidFill>
+            <a:schemeClr val="bg2">
+              <a:lumMod val="50000"/>
+            </a:schemeClr>
+          </a:solidFill>
+          <a:ln>
+            <a:solidFill>
+              <a:schemeClr val="bg2">
+                <a:lumMod val="25000"/>
+              </a:schemeClr>
+            </a:solidFill>
+          </a:ln>
+        </p:spPr>
+        <p:style>
+          <a:lnRef idx="2">
+            <a:schemeClr val="accent1">
+              <a:shade val="15000"/>
+            </a:schemeClr>
+          </a:lnRef>
+          <a:fillRef idx="1">
+            <a:schemeClr val="accent1"/>
+          </a:fillRef>
+          <a:effectRef idx="0">
+            <a:schemeClr val="accent1"/>
+          </a:effectRef>
+          <a:fontRef idx="minor">
+            <a:schemeClr val="lt1"/>
+          </a:fontRef>
+        </p:style>
+        <p:txBody>
+          <a:bodyPr rtlCol="0" anchor="ctr"/>
+          <a:lstStyle>
+            <a:defPPr>
+              <a:defRPr lang="en-US"/>
+            </a:defPPr>
+            <a:lvl1pPr marL="0" algn="l" defTabSz="914400" rtl="0" eaLnBrk="1" latinLnBrk="0" hangingPunct="1">
+              <a:defRPr sz="1800" kern="1200">
+                <a:solidFill>
+                  <a:schemeClr val="lt1"/>
+                </a:solidFill>
+                <a:latin typeface="+mn-lt"/>
+                <a:ea typeface="+mn-ea"/>
+                <a:cs typeface="+mn-cs"/>
+              </a:defRPr>
+            </a:lvl1pPr>
+            <a:lvl2pPr marL="457200" algn="l" defTabSz="914400" rtl="0" eaLnBrk="1" latinLnBrk="0" hangingPunct="1">
+              <a:defRPr sz="1800" kern="1200">
+                <a:solidFill>
+                  <a:schemeClr val="lt1"/>
+                </a:solidFill>
+                <a:latin typeface="+mn-lt"/>
+                <a:ea typeface="+mn-ea"/>
+                <a:cs typeface="+mn-cs"/>
+              </a:defRPr>
+            </a:lvl2pPr>
+            <a:lvl3pPr marL="914400" algn="l" defTabSz="914400" rtl="0" eaLnBrk="1" latinLnBrk="0" hangingPunct="1">
+              <a:defRPr sz="1800" kern="1200">
+                <a:solidFill>
+                  <a:schemeClr val="lt1"/>
+                </a:solidFill>
+                <a:latin typeface="+mn-lt"/>
+                <a:ea typeface="+mn-ea"/>
+                <a:cs typeface="+mn-cs"/>
+              </a:defRPr>
+            </a:lvl3pPr>
+            <a:lvl4pPr marL="1371600" algn="l" defTabSz="914400" rtl="0" eaLnBrk="1" latinLnBrk="0" hangingPunct="1">
+              <a:defRPr sz="1800" kern="1200">
+                <a:solidFill>
+                  <a:schemeClr val="lt1"/>
+                </a:solidFill>
+                <a:latin typeface="+mn-lt"/>
+                <a:ea typeface="+mn-ea"/>
+                <a:cs typeface="+mn-cs"/>
+              </a:defRPr>
+            </a:lvl4pPr>
+            <a:lvl5pPr marL="1828800" algn="l" defTabSz="914400" rtl="0" eaLnBrk="1" latinLnBrk="0" hangingPunct="1">
+              <a:defRPr sz="1800" kern="1200">
+                <a:solidFill>
+                  <a:schemeClr val="lt1"/>
+                </a:solidFill>
+                <a:latin typeface="+mn-lt"/>
+                <a:ea typeface="+mn-ea"/>
+                <a:cs typeface="+mn-cs"/>
+              </a:defRPr>
+            </a:lvl5pPr>
+            <a:lvl6pPr marL="2286000" algn="l" defTabSz="914400" rtl="0" eaLnBrk="1" latinLnBrk="0" hangingPunct="1">
+              <a:defRPr sz="1800" kern="1200">
+                <a:solidFill>
+                  <a:schemeClr val="lt1"/>
+                </a:solidFill>
+                <a:latin typeface="+mn-lt"/>
+                <a:ea typeface="+mn-ea"/>
+                <a:cs typeface="+mn-cs"/>
+              </a:defRPr>
+            </a:lvl6pPr>
+            <a:lvl7pPr marL="2743200" algn="l" defTabSz="914400" rtl="0" eaLnBrk="1" latinLnBrk="0" hangingPunct="1">
+              <a:defRPr sz="1800" kern="1200">
+                <a:solidFill>
+                  <a:schemeClr val="lt1"/>
+                </a:solidFill>
+                <a:latin typeface="+mn-lt"/>
+                <a:ea typeface="+mn-ea"/>
+                <a:cs typeface="+mn-cs"/>
+              </a:defRPr>
+            </a:lvl7pPr>
+            <a:lvl8pPr marL="3200400" algn="l" defTabSz="914400" rtl="0" eaLnBrk="1" latinLnBrk="0" hangingPunct="1">
+              <a:defRPr sz="1800" kern="1200">
+                <a:solidFill>
+                  <a:schemeClr val="lt1"/>
+                </a:solidFill>
+                <a:latin typeface="+mn-lt"/>
+                <a:ea typeface="+mn-ea"/>
+                <a:cs typeface="+mn-cs"/>
+              </a:defRPr>
+            </a:lvl8pPr>
+            <a:lvl9pPr marL="3657600" algn="l" defTabSz="914400" rtl="0" eaLnBrk="1" latinLnBrk="0" hangingPunct="1">
+              <a:defRPr sz="1800" kern="1200">
+                <a:solidFill>
+                  <a:schemeClr val="lt1"/>
+                </a:solidFill>
+                <a:latin typeface="+mn-lt"/>
+                <a:ea typeface="+mn-ea"/>
+                <a:cs typeface="+mn-cs"/>
+              </a:defRPr>
+            </a:lvl9pPr>
+          </a:lstStyle>
+          <a:p>
+            <a:pPr algn="ctr"/>
+            <a:endParaRPr lang="en-US"/>
+          </a:p>
+        </p:txBody>
+      </p:sp>
+      <p:sp>
+        <p:nvSpPr>
+          <p:cNvPr id="52" name="Oval 51">
+            <a:extLst>
+              <a:ext uri="{FF2B5EF4-FFF2-40B4-BE49-F238E27FC236}">
+                <a16:creationId xmlns:a16="http://schemas.microsoft.com/office/drawing/2014/main" id="{FD888E89-300B-4959-11A8-4F58E894FB21}"/>
+              </a:ext>
+            </a:extLst>
+          </p:cNvPr>
+          <p:cNvSpPr/>
+          <p:nvPr/>
+        </p:nvSpPr>
+        <p:spPr>
+          <a:xfrm>
+            <a:off x="6529400" y="3802609"/>
+            <a:ext cx="266218" cy="266217"/>
+          </a:xfrm>
+          <a:prstGeom prst="ellipse">
+            <a:avLst/>
+          </a:prstGeom>
+          <a:solidFill>
+            <a:schemeClr val="bg2">
+              <a:lumMod val="50000"/>
+            </a:schemeClr>
+          </a:solidFill>
+          <a:ln>
+            <a:solidFill>
+              <a:schemeClr val="bg2">
+                <a:lumMod val="25000"/>
+              </a:schemeClr>
+            </a:solidFill>
+          </a:ln>
+        </p:spPr>
+        <p:style>
+          <a:lnRef idx="2">
+            <a:schemeClr val="accent1">
+              <a:shade val="15000"/>
+            </a:schemeClr>
+          </a:lnRef>
+          <a:fillRef idx="1">
+            <a:schemeClr val="accent1"/>
+          </a:fillRef>
+          <a:effectRef idx="0">
+            <a:schemeClr val="accent1"/>
+          </a:effectRef>
+          <a:fontRef idx="minor">
+            <a:schemeClr val="lt1"/>
+          </a:fontRef>
+        </p:style>
+        <p:txBody>
+          <a:bodyPr rtlCol="0" anchor="ctr"/>
+          <a:lstStyle>
+            <a:defPPr>
+              <a:defRPr lang="en-US"/>
+            </a:defPPr>
+            <a:lvl1pPr marL="0" algn="l" defTabSz="914400" rtl="0" eaLnBrk="1" latinLnBrk="0" hangingPunct="1">
+              <a:defRPr sz="1800" kern="1200">
+                <a:solidFill>
+                  <a:schemeClr val="lt1"/>
+                </a:solidFill>
+                <a:latin typeface="+mn-lt"/>
+                <a:ea typeface="+mn-ea"/>
+                <a:cs typeface="+mn-cs"/>
+              </a:defRPr>
+            </a:lvl1pPr>
+            <a:lvl2pPr marL="457200" algn="l" defTabSz="914400" rtl="0" eaLnBrk="1" latinLnBrk="0" hangingPunct="1">
+              <a:defRPr sz="1800" kern="1200">
+                <a:solidFill>
+                  <a:schemeClr val="lt1"/>
+                </a:solidFill>
+                <a:latin typeface="+mn-lt"/>
+                <a:ea typeface="+mn-ea"/>
+                <a:cs typeface="+mn-cs"/>
+              </a:defRPr>
+            </a:lvl2pPr>
+            <a:lvl3pPr marL="914400" algn="l" defTabSz="914400" rtl="0" eaLnBrk="1" latinLnBrk="0" hangingPunct="1">
+              <a:defRPr sz="1800" kern="1200">
+                <a:solidFill>
+                  <a:schemeClr val="lt1"/>
+                </a:solidFill>
+                <a:latin typeface="+mn-lt"/>
+                <a:ea typeface="+mn-ea"/>
+                <a:cs typeface="+mn-cs"/>
+              </a:defRPr>
+            </a:lvl3pPr>
+            <a:lvl4pPr marL="1371600" algn="l" defTabSz="914400" rtl="0" eaLnBrk="1" latinLnBrk="0" hangingPunct="1">
+              <a:defRPr sz="1800" kern="1200">
+                <a:solidFill>
+                  <a:schemeClr val="lt1"/>
+                </a:solidFill>
+                <a:latin typeface="+mn-lt"/>
+                <a:ea typeface="+mn-ea"/>
+                <a:cs typeface="+mn-cs"/>
+              </a:defRPr>
+            </a:lvl4pPr>
+            <a:lvl5pPr marL="1828800" algn="l" defTabSz="914400" rtl="0" eaLnBrk="1" latinLnBrk="0" hangingPunct="1">
+              <a:defRPr sz="1800" kern="1200">
+                <a:solidFill>
+                  <a:schemeClr val="lt1"/>
+                </a:solidFill>
+                <a:latin typeface="+mn-lt"/>
+                <a:ea typeface="+mn-ea"/>
+                <a:cs typeface="+mn-cs"/>
+              </a:defRPr>
+            </a:lvl5pPr>
+            <a:lvl6pPr marL="2286000" algn="l" defTabSz="914400" rtl="0" eaLnBrk="1" latinLnBrk="0" hangingPunct="1">
+              <a:defRPr sz="1800" kern="1200">
+                <a:solidFill>
+                  <a:schemeClr val="lt1"/>
+                </a:solidFill>
+                <a:latin typeface="+mn-lt"/>
+                <a:ea typeface="+mn-ea"/>
+                <a:cs typeface="+mn-cs"/>
+              </a:defRPr>
+            </a:lvl6pPr>
+            <a:lvl7pPr marL="2743200" algn="l" defTabSz="914400" rtl="0" eaLnBrk="1" latinLnBrk="0" hangingPunct="1">
+              <a:defRPr sz="1800" kern="1200">
+                <a:solidFill>
+                  <a:schemeClr val="lt1"/>
+                </a:solidFill>
+                <a:latin typeface="+mn-lt"/>
+                <a:ea typeface="+mn-ea"/>
+                <a:cs typeface="+mn-cs"/>
+              </a:defRPr>
+            </a:lvl7pPr>
+            <a:lvl8pPr marL="3200400" algn="l" defTabSz="914400" rtl="0" eaLnBrk="1" latinLnBrk="0" hangingPunct="1">
+              <a:defRPr sz="1800" kern="1200">
+                <a:solidFill>
+                  <a:schemeClr val="lt1"/>
+                </a:solidFill>
+                <a:latin typeface="+mn-lt"/>
+                <a:ea typeface="+mn-ea"/>
+                <a:cs typeface="+mn-cs"/>
+              </a:defRPr>
+            </a:lvl8pPr>
+            <a:lvl9pPr marL="3657600" algn="l" defTabSz="914400" rtl="0" eaLnBrk="1" latinLnBrk="0" hangingPunct="1">
+              <a:defRPr sz="1800" kern="1200">
+                <a:solidFill>
+                  <a:schemeClr val="lt1"/>
+                </a:solidFill>
+                <a:latin typeface="+mn-lt"/>
+                <a:ea typeface="+mn-ea"/>
+                <a:cs typeface="+mn-cs"/>
+              </a:defRPr>
+            </a:lvl9pPr>
+          </a:lstStyle>
+          <a:p>
+            <a:pPr algn="ctr"/>
+            <a:endParaRPr lang="en-US"/>
+          </a:p>
+        </p:txBody>
+      </p:sp>
+      <p:sp>
+        <p:nvSpPr>
+          <p:cNvPr id="53" name="Oval 52">
+            <a:extLst>
+              <a:ext uri="{FF2B5EF4-FFF2-40B4-BE49-F238E27FC236}">
+                <a16:creationId xmlns:a16="http://schemas.microsoft.com/office/drawing/2014/main" id="{DF80D481-6078-CE8D-B891-89B843FA9949}"/>
+              </a:ext>
+            </a:extLst>
+          </p:cNvPr>
+          <p:cNvSpPr/>
+          <p:nvPr/>
+        </p:nvSpPr>
+        <p:spPr>
+          <a:xfrm>
+            <a:off x="7351212" y="3802609"/>
+            <a:ext cx="266218" cy="266217"/>
+          </a:xfrm>
+          <a:prstGeom prst="ellipse">
+            <a:avLst/>
+          </a:prstGeom>
+          <a:solidFill>
+            <a:schemeClr val="bg2">
+              <a:lumMod val="50000"/>
+            </a:schemeClr>
+          </a:solidFill>
+          <a:ln>
+            <a:solidFill>
+              <a:schemeClr val="bg2">
+                <a:lumMod val="25000"/>
+              </a:schemeClr>
+            </a:solidFill>
+          </a:ln>
+        </p:spPr>
+        <p:style>
+          <a:lnRef idx="2">
+            <a:schemeClr val="accent1">
+              <a:shade val="15000"/>
+            </a:schemeClr>
+          </a:lnRef>
+          <a:fillRef idx="1">
+            <a:schemeClr val="accent1"/>
+          </a:fillRef>
+          <a:effectRef idx="0">
+            <a:schemeClr val="accent1"/>
+          </a:effectRef>
+          <a:fontRef idx="minor">
+            <a:schemeClr val="lt1"/>
+          </a:fontRef>
+        </p:style>
+        <p:txBody>
+          <a:bodyPr rtlCol="0" anchor="ctr"/>
+          <a:lstStyle>
+            <a:defPPr>
+              <a:defRPr lang="en-US"/>
+            </a:defPPr>
+            <a:lvl1pPr marL="0" algn="l" defTabSz="914400" rtl="0" eaLnBrk="1" latinLnBrk="0" hangingPunct="1">
+              <a:defRPr sz="1800" kern="1200">
+                <a:solidFill>
+                  <a:schemeClr val="lt1"/>
+                </a:solidFill>
+                <a:latin typeface="+mn-lt"/>
+                <a:ea typeface="+mn-ea"/>
+                <a:cs typeface="+mn-cs"/>
+              </a:defRPr>
+            </a:lvl1pPr>
+            <a:lvl2pPr marL="457200" algn="l" defTabSz="914400" rtl="0" eaLnBrk="1" latinLnBrk="0" hangingPunct="1">
+              <a:defRPr sz="1800" kern="1200">
+                <a:solidFill>
+                  <a:schemeClr val="lt1"/>
+                </a:solidFill>
+                <a:latin typeface="+mn-lt"/>
+                <a:ea typeface="+mn-ea"/>
+                <a:cs typeface="+mn-cs"/>
+              </a:defRPr>
+            </a:lvl2pPr>
+            <a:lvl3pPr marL="914400" algn="l" defTabSz="914400" rtl="0" eaLnBrk="1" latinLnBrk="0" hangingPunct="1">
+              <a:defRPr sz="1800" kern="1200">
+                <a:solidFill>
+                  <a:schemeClr val="lt1"/>
+                </a:solidFill>
+                <a:latin typeface="+mn-lt"/>
+                <a:ea typeface="+mn-ea"/>
+                <a:cs typeface="+mn-cs"/>
+              </a:defRPr>
+            </a:lvl3pPr>
+            <a:lvl4pPr marL="1371600" algn="l" defTabSz="914400" rtl="0" eaLnBrk="1" latinLnBrk="0" hangingPunct="1">
+              <a:defRPr sz="1800" kern="1200">
+                <a:solidFill>
+                  <a:schemeClr val="lt1"/>
+                </a:solidFill>
+                <a:latin typeface="+mn-lt"/>
+                <a:ea typeface="+mn-ea"/>
+                <a:cs typeface="+mn-cs"/>
+              </a:defRPr>
+            </a:lvl4pPr>
+            <a:lvl5pPr marL="1828800" algn="l" defTabSz="914400" rtl="0" eaLnBrk="1" latinLnBrk="0" hangingPunct="1">
+              <a:defRPr sz="1800" kern="1200">
+                <a:solidFill>
+                  <a:schemeClr val="lt1"/>
+                </a:solidFill>
+                <a:latin typeface="+mn-lt"/>
+                <a:ea typeface="+mn-ea"/>
+                <a:cs typeface="+mn-cs"/>
+              </a:defRPr>
+            </a:lvl5pPr>
+            <a:lvl6pPr marL="2286000" algn="l" defTabSz="914400" rtl="0" eaLnBrk="1" latinLnBrk="0" hangingPunct="1">
+              <a:defRPr sz="1800" kern="1200">
+                <a:solidFill>
+                  <a:schemeClr val="lt1"/>
+                </a:solidFill>
+                <a:latin typeface="+mn-lt"/>
+                <a:ea typeface="+mn-ea"/>
+                <a:cs typeface="+mn-cs"/>
+              </a:defRPr>
+            </a:lvl6pPr>
+            <a:lvl7pPr marL="2743200" algn="l" defTabSz="914400" rtl="0" eaLnBrk="1" latinLnBrk="0" hangingPunct="1">
+              <a:defRPr sz="1800" kern="1200">
+                <a:solidFill>
+                  <a:schemeClr val="lt1"/>
+                </a:solidFill>
+                <a:latin typeface="+mn-lt"/>
+                <a:ea typeface="+mn-ea"/>
+                <a:cs typeface="+mn-cs"/>
+              </a:defRPr>
+            </a:lvl7pPr>
+            <a:lvl8pPr marL="3200400" algn="l" defTabSz="914400" rtl="0" eaLnBrk="1" latinLnBrk="0" hangingPunct="1">
+              <a:defRPr sz="1800" kern="1200">
+                <a:solidFill>
+                  <a:schemeClr val="lt1"/>
+                </a:solidFill>
+                <a:latin typeface="+mn-lt"/>
+                <a:ea typeface="+mn-ea"/>
+                <a:cs typeface="+mn-cs"/>
+              </a:defRPr>
+            </a:lvl8pPr>
+            <a:lvl9pPr marL="3657600" algn="l" defTabSz="914400" rtl="0" eaLnBrk="1" latinLnBrk="0" hangingPunct="1">
+              <a:defRPr sz="1800" kern="1200">
+                <a:solidFill>
+                  <a:schemeClr val="lt1"/>
+                </a:solidFill>
+                <a:latin typeface="+mn-lt"/>
+                <a:ea typeface="+mn-ea"/>
+                <a:cs typeface="+mn-cs"/>
+              </a:defRPr>
+            </a:lvl9pPr>
+          </a:lstStyle>
+          <a:p>
+            <a:pPr algn="ctr"/>
+            <a:endParaRPr lang="en-US"/>
+          </a:p>
+        </p:txBody>
+      </p:sp>
+      <p:sp>
+        <p:nvSpPr>
+          <p:cNvPr id="54" name="Oval 53">
+            <a:extLst>
+              <a:ext uri="{FF2B5EF4-FFF2-40B4-BE49-F238E27FC236}">
+                <a16:creationId xmlns:a16="http://schemas.microsoft.com/office/drawing/2014/main" id="{CD4B3FCF-FC6A-0118-6963-D4BDB1807CE3}"/>
+              </a:ext>
+            </a:extLst>
+          </p:cNvPr>
+          <p:cNvSpPr/>
+          <p:nvPr/>
+        </p:nvSpPr>
+        <p:spPr>
+          <a:xfrm>
+            <a:off x="6164932" y="4221090"/>
+            <a:ext cx="266218" cy="266217"/>
+          </a:xfrm>
+          <a:prstGeom prst="ellipse">
+            <a:avLst/>
+          </a:prstGeom>
+          <a:solidFill>
+            <a:schemeClr val="bg2">
+              <a:lumMod val="50000"/>
+            </a:schemeClr>
+          </a:solidFill>
+          <a:ln>
+            <a:solidFill>
+              <a:schemeClr val="bg2">
+                <a:lumMod val="25000"/>
+              </a:schemeClr>
+            </a:solidFill>
+          </a:ln>
+        </p:spPr>
+        <p:style>
+          <a:lnRef idx="2">
+            <a:schemeClr val="accent1">
+              <a:shade val="15000"/>
+            </a:schemeClr>
+          </a:lnRef>
+          <a:fillRef idx="1">
+            <a:schemeClr val="accent1"/>
+          </a:fillRef>
+          <a:effectRef idx="0">
+            <a:schemeClr val="accent1"/>
+          </a:effectRef>
+          <a:fontRef idx="minor">
+            <a:schemeClr val="lt1"/>
+          </a:fontRef>
+        </p:style>
+        <p:txBody>
+          <a:bodyPr rtlCol="0" anchor="ctr"/>
+          <a:lstStyle>
+            <a:defPPr>
+              <a:defRPr lang="en-US"/>
+            </a:defPPr>
+            <a:lvl1pPr marL="0" algn="l" defTabSz="914400" rtl="0" eaLnBrk="1" latinLnBrk="0" hangingPunct="1">
+              <a:defRPr sz="1800" kern="1200">
+                <a:solidFill>
+                  <a:schemeClr val="lt1"/>
+                </a:solidFill>
+                <a:latin typeface="+mn-lt"/>
+                <a:ea typeface="+mn-ea"/>
+                <a:cs typeface="+mn-cs"/>
+              </a:defRPr>
+            </a:lvl1pPr>
+            <a:lvl2pPr marL="457200" algn="l" defTabSz="914400" rtl="0" eaLnBrk="1" latinLnBrk="0" hangingPunct="1">
+              <a:defRPr sz="1800" kern="1200">
+                <a:solidFill>
+                  <a:schemeClr val="lt1"/>
+                </a:solidFill>
+                <a:latin typeface="+mn-lt"/>
+                <a:ea typeface="+mn-ea"/>
+                <a:cs typeface="+mn-cs"/>
+              </a:defRPr>
+            </a:lvl2pPr>
+            <a:lvl3pPr marL="914400" algn="l" defTabSz="914400" rtl="0" eaLnBrk="1" latinLnBrk="0" hangingPunct="1">
+              <a:defRPr sz="1800" kern="1200">
+                <a:solidFill>
+                  <a:schemeClr val="lt1"/>
+                </a:solidFill>
+                <a:latin typeface="+mn-lt"/>
+                <a:ea typeface="+mn-ea"/>
+                <a:cs typeface="+mn-cs"/>
+              </a:defRPr>
+            </a:lvl3pPr>
+            <a:lvl4pPr marL="1371600" algn="l" defTabSz="914400" rtl="0" eaLnBrk="1" latinLnBrk="0" hangingPunct="1">
+              <a:defRPr sz="1800" kern="1200">
+                <a:solidFill>
+                  <a:schemeClr val="lt1"/>
+                </a:solidFill>
+                <a:latin typeface="+mn-lt"/>
+                <a:ea typeface="+mn-ea"/>
+                <a:cs typeface="+mn-cs"/>
+              </a:defRPr>
+            </a:lvl4pPr>
+            <a:lvl5pPr marL="1828800" algn="l" defTabSz="914400" rtl="0" eaLnBrk="1" latinLnBrk="0" hangingPunct="1">
+              <a:defRPr sz="1800" kern="1200">
+                <a:solidFill>
+                  <a:schemeClr val="lt1"/>
+                </a:solidFill>
+                <a:latin typeface="+mn-lt"/>
+                <a:ea typeface="+mn-ea"/>
+                <a:cs typeface="+mn-cs"/>
+              </a:defRPr>
+            </a:lvl5pPr>
+            <a:lvl6pPr marL="2286000" algn="l" defTabSz="914400" rtl="0" eaLnBrk="1" latinLnBrk="0" hangingPunct="1">
+              <a:defRPr sz="1800" kern="1200">
+                <a:solidFill>
+                  <a:schemeClr val="lt1"/>
+                </a:solidFill>
+                <a:latin typeface="+mn-lt"/>
+                <a:ea typeface="+mn-ea"/>
+                <a:cs typeface="+mn-cs"/>
+              </a:defRPr>
+            </a:lvl6pPr>
+            <a:lvl7pPr marL="2743200" algn="l" defTabSz="914400" rtl="0" eaLnBrk="1" latinLnBrk="0" hangingPunct="1">
+              <a:defRPr sz="1800" kern="1200">
+                <a:solidFill>
+                  <a:schemeClr val="lt1"/>
+                </a:solidFill>
+                <a:latin typeface="+mn-lt"/>
+                <a:ea typeface="+mn-ea"/>
+                <a:cs typeface="+mn-cs"/>
+              </a:defRPr>
+            </a:lvl7pPr>
+            <a:lvl8pPr marL="3200400" algn="l" defTabSz="914400" rtl="0" eaLnBrk="1" latinLnBrk="0" hangingPunct="1">
+              <a:defRPr sz="1800" kern="1200">
+                <a:solidFill>
+                  <a:schemeClr val="lt1"/>
+                </a:solidFill>
+                <a:latin typeface="+mn-lt"/>
+                <a:ea typeface="+mn-ea"/>
+                <a:cs typeface="+mn-cs"/>
+              </a:defRPr>
+            </a:lvl8pPr>
+            <a:lvl9pPr marL="3657600" algn="l" defTabSz="914400" rtl="0" eaLnBrk="1" latinLnBrk="0" hangingPunct="1">
+              <a:defRPr sz="1800" kern="1200">
+                <a:solidFill>
+                  <a:schemeClr val="lt1"/>
+                </a:solidFill>
+                <a:latin typeface="+mn-lt"/>
+                <a:ea typeface="+mn-ea"/>
+                <a:cs typeface="+mn-cs"/>
+              </a:defRPr>
+            </a:lvl9pPr>
+          </a:lstStyle>
+          <a:p>
+            <a:pPr algn="ctr"/>
+            <a:endParaRPr lang="en-US"/>
+          </a:p>
+        </p:txBody>
+      </p:sp>
+      <p:sp>
+        <p:nvSpPr>
+          <p:cNvPr id="55" name="Oval 54">
+            <a:extLst>
+              <a:ext uri="{FF2B5EF4-FFF2-40B4-BE49-F238E27FC236}">
+                <a16:creationId xmlns:a16="http://schemas.microsoft.com/office/drawing/2014/main" id="{21DFA42F-0BDE-9527-356B-AF88FC7B140D}"/>
+              </a:ext>
+            </a:extLst>
+          </p:cNvPr>
+          <p:cNvSpPr/>
+          <p:nvPr/>
+        </p:nvSpPr>
+        <p:spPr>
+          <a:xfrm>
+            <a:off x="6882549" y="4206707"/>
+            <a:ext cx="266218" cy="266217"/>
+          </a:xfrm>
+          <a:prstGeom prst="ellipse">
+            <a:avLst/>
+          </a:prstGeom>
+          <a:solidFill>
+            <a:schemeClr val="bg2">
+              <a:lumMod val="50000"/>
+            </a:schemeClr>
+          </a:solidFill>
+          <a:ln>
+            <a:solidFill>
+              <a:schemeClr val="bg2">
+                <a:lumMod val="25000"/>
+              </a:schemeClr>
+            </a:solidFill>
+          </a:ln>
+        </p:spPr>
+        <p:style>
+          <a:lnRef idx="2">
+            <a:schemeClr val="accent1">
+              <a:shade val="15000"/>
+            </a:schemeClr>
+          </a:lnRef>
+          <a:fillRef idx="1">
+            <a:schemeClr val="accent1"/>
+          </a:fillRef>
+          <a:effectRef idx="0">
+            <a:schemeClr val="accent1"/>
+          </a:effectRef>
+          <a:fontRef idx="minor">
+            <a:schemeClr val="lt1"/>
+          </a:fontRef>
+        </p:style>
+        <p:txBody>
+          <a:bodyPr rtlCol="0" anchor="ctr"/>
+          <a:lstStyle>
+            <a:defPPr>
+              <a:defRPr lang="en-US"/>
+            </a:defPPr>
+            <a:lvl1pPr marL="0" algn="l" defTabSz="914400" rtl="0" eaLnBrk="1" latinLnBrk="0" hangingPunct="1">
+              <a:defRPr sz="1800" kern="1200">
+                <a:solidFill>
+                  <a:schemeClr val="lt1"/>
+                </a:solidFill>
+                <a:latin typeface="+mn-lt"/>
+                <a:ea typeface="+mn-ea"/>
+                <a:cs typeface="+mn-cs"/>
+              </a:defRPr>
+            </a:lvl1pPr>
+            <a:lvl2pPr marL="457200" algn="l" defTabSz="914400" rtl="0" eaLnBrk="1" latinLnBrk="0" hangingPunct="1">
+              <a:defRPr sz="1800" kern="1200">
+                <a:solidFill>
+                  <a:schemeClr val="lt1"/>
+                </a:solidFill>
+                <a:latin typeface="+mn-lt"/>
+                <a:ea typeface="+mn-ea"/>
+                <a:cs typeface="+mn-cs"/>
+              </a:defRPr>
+            </a:lvl2pPr>
+            <a:lvl3pPr marL="914400" algn="l" defTabSz="914400" rtl="0" eaLnBrk="1" latinLnBrk="0" hangingPunct="1">
+              <a:defRPr sz="1800" kern="1200">
+                <a:solidFill>
+                  <a:schemeClr val="lt1"/>
+                </a:solidFill>
+                <a:latin typeface="+mn-lt"/>
+                <a:ea typeface="+mn-ea"/>
+                <a:cs typeface="+mn-cs"/>
+              </a:defRPr>
+            </a:lvl3pPr>
+            <a:lvl4pPr marL="1371600" algn="l" defTabSz="914400" rtl="0" eaLnBrk="1" latinLnBrk="0" hangingPunct="1">
+              <a:defRPr sz="1800" kern="1200">
+                <a:solidFill>
+                  <a:schemeClr val="lt1"/>
+                </a:solidFill>
+                <a:latin typeface="+mn-lt"/>
+                <a:ea typeface="+mn-ea"/>
+                <a:cs typeface="+mn-cs"/>
+              </a:defRPr>
+            </a:lvl4pPr>
+            <a:lvl5pPr marL="1828800" algn="l" defTabSz="914400" rtl="0" eaLnBrk="1" latinLnBrk="0" hangingPunct="1">
+              <a:defRPr sz="1800" kern="1200">
+                <a:solidFill>
+                  <a:schemeClr val="lt1"/>
+                </a:solidFill>
+                <a:latin typeface="+mn-lt"/>
+                <a:ea typeface="+mn-ea"/>
+                <a:cs typeface="+mn-cs"/>
+              </a:defRPr>
+            </a:lvl5pPr>
+            <a:lvl6pPr marL="2286000" algn="l" defTabSz="914400" rtl="0" eaLnBrk="1" latinLnBrk="0" hangingPunct="1">
+              <a:defRPr sz="1800" kern="1200">
+                <a:solidFill>
+                  <a:schemeClr val="lt1"/>
+                </a:solidFill>
+                <a:latin typeface="+mn-lt"/>
+                <a:ea typeface="+mn-ea"/>
+                <a:cs typeface="+mn-cs"/>
+              </a:defRPr>
+            </a:lvl6pPr>
+            <a:lvl7pPr marL="2743200" algn="l" defTabSz="914400" rtl="0" eaLnBrk="1" latinLnBrk="0" hangingPunct="1">
+              <a:defRPr sz="1800" kern="1200">
+                <a:solidFill>
+                  <a:schemeClr val="lt1"/>
+                </a:solidFill>
+                <a:latin typeface="+mn-lt"/>
+                <a:ea typeface="+mn-ea"/>
+                <a:cs typeface="+mn-cs"/>
+              </a:defRPr>
+            </a:lvl7pPr>
+            <a:lvl8pPr marL="3200400" algn="l" defTabSz="914400" rtl="0" eaLnBrk="1" latinLnBrk="0" hangingPunct="1">
+              <a:defRPr sz="1800" kern="1200">
+                <a:solidFill>
+                  <a:schemeClr val="lt1"/>
+                </a:solidFill>
+                <a:latin typeface="+mn-lt"/>
+                <a:ea typeface="+mn-ea"/>
+                <a:cs typeface="+mn-cs"/>
+              </a:defRPr>
+            </a:lvl8pPr>
+            <a:lvl9pPr marL="3657600" algn="l" defTabSz="914400" rtl="0" eaLnBrk="1" latinLnBrk="0" hangingPunct="1">
+              <a:defRPr sz="1800" kern="1200">
+                <a:solidFill>
+                  <a:schemeClr val="lt1"/>
+                </a:solidFill>
+                <a:latin typeface="+mn-lt"/>
+                <a:ea typeface="+mn-ea"/>
+                <a:cs typeface="+mn-cs"/>
+              </a:defRPr>
+            </a:lvl9pPr>
+          </a:lstStyle>
+          <a:p>
+            <a:pPr algn="ctr"/>
+            <a:endParaRPr lang="en-US"/>
+          </a:p>
+        </p:txBody>
+      </p:sp>
+      <p:cxnSp>
+        <p:nvCxnSpPr>
+          <p:cNvPr id="56" name="Straight Connector 55">
+            <a:extLst>
+              <a:ext uri="{FF2B5EF4-FFF2-40B4-BE49-F238E27FC236}">
+                <a16:creationId xmlns:a16="http://schemas.microsoft.com/office/drawing/2014/main" id="{EB752452-38AC-53FA-5450-449DBDC35597}"/>
+              </a:ext>
+            </a:extLst>
+          </p:cNvPr>
+          <p:cNvCxnSpPr>
+            <a:cxnSpLocks/>
+            <a:stCxn id="52" idx="3"/>
+            <a:endCxn id="54" idx="7"/>
+          </p:cNvCxnSpPr>
+          <p:nvPr/>
+        </p:nvCxnSpPr>
+        <p:spPr>
+          <a:xfrm flipH="1">
+            <a:off x="6392163" y="4029839"/>
+            <a:ext cx="176224" cy="230238"/>
+          </a:xfrm>
+          <a:prstGeom prst="line">
+            <a:avLst/>
+          </a:prstGeom>
+          <a:ln>
+            <a:solidFill>
+              <a:schemeClr val="bg2">
+                <a:lumMod val="25000"/>
+              </a:schemeClr>
+            </a:solidFill>
+          </a:ln>
+        </p:spPr>
+        <p:style>
+          <a:lnRef idx="2">
+            <a:schemeClr val="accent1"/>
+          </a:lnRef>
+          <a:fillRef idx="0">
+            <a:schemeClr val="accent1"/>
+          </a:fillRef>
+          <a:effectRef idx="1">
+            <a:schemeClr val="accent1"/>
+          </a:effectRef>
+          <a:fontRef idx="minor">
+            <a:schemeClr val="tx1"/>
+          </a:fontRef>
+        </p:style>
+      </p:cxnSp>
+      <p:cxnSp>
+        <p:nvCxnSpPr>
+          <p:cNvPr id="57" name="Straight Connector 56">
+            <a:extLst>
+              <a:ext uri="{FF2B5EF4-FFF2-40B4-BE49-F238E27FC236}">
+                <a16:creationId xmlns:a16="http://schemas.microsoft.com/office/drawing/2014/main" id="{020168A5-F029-B4E1-BE14-5298CF8E8969}"/>
+              </a:ext>
+            </a:extLst>
+          </p:cNvPr>
+          <p:cNvCxnSpPr>
+            <a:cxnSpLocks/>
+            <a:stCxn id="52" idx="5"/>
+            <a:endCxn id="55" idx="1"/>
+          </p:cNvCxnSpPr>
+          <p:nvPr/>
+        </p:nvCxnSpPr>
+        <p:spPr>
+          <a:xfrm>
+            <a:off x="6756631" y="4029839"/>
+            <a:ext cx="164905" cy="215855"/>
+          </a:xfrm>
+          <a:prstGeom prst="line">
+            <a:avLst/>
+          </a:prstGeom>
+          <a:ln>
+            <a:solidFill>
+              <a:schemeClr val="bg2">
+                <a:lumMod val="25000"/>
+              </a:schemeClr>
+            </a:solidFill>
+          </a:ln>
+        </p:spPr>
+        <p:style>
+          <a:lnRef idx="2">
+            <a:schemeClr val="accent1"/>
+          </a:lnRef>
+          <a:fillRef idx="0">
+            <a:schemeClr val="accent1"/>
+          </a:fillRef>
+          <a:effectRef idx="1">
+            <a:schemeClr val="accent1"/>
+          </a:effectRef>
+          <a:fontRef idx="minor">
+            <a:schemeClr val="tx1"/>
+          </a:fontRef>
+        </p:style>
+      </p:cxnSp>
+      <p:cxnSp>
+        <p:nvCxnSpPr>
+          <p:cNvPr id="58" name="Straight Connector 57">
+            <a:extLst>
+              <a:ext uri="{FF2B5EF4-FFF2-40B4-BE49-F238E27FC236}">
+                <a16:creationId xmlns:a16="http://schemas.microsoft.com/office/drawing/2014/main" id="{371B247F-D3DB-60C3-FFFA-9214C0A3FD27}"/>
+              </a:ext>
+            </a:extLst>
+          </p:cNvPr>
+          <p:cNvCxnSpPr>
+            <a:cxnSpLocks/>
+            <a:stCxn id="51" idx="5"/>
+            <a:endCxn id="53" idx="1"/>
+          </p:cNvCxnSpPr>
+          <p:nvPr/>
+        </p:nvCxnSpPr>
+        <p:spPr>
+          <a:xfrm>
+            <a:off x="7158966" y="3552488"/>
+            <a:ext cx="231233" cy="289108"/>
+          </a:xfrm>
+          <a:prstGeom prst="line">
+            <a:avLst/>
+          </a:prstGeom>
+          <a:ln>
+            <a:solidFill>
+              <a:schemeClr val="bg2">
+                <a:lumMod val="25000"/>
+              </a:schemeClr>
+            </a:solidFill>
+          </a:ln>
+        </p:spPr>
+        <p:style>
+          <a:lnRef idx="2">
+            <a:schemeClr val="accent1"/>
+          </a:lnRef>
+          <a:fillRef idx="0">
+            <a:schemeClr val="accent1"/>
+          </a:fillRef>
+          <a:effectRef idx="1">
+            <a:schemeClr val="accent1"/>
+          </a:effectRef>
+          <a:fontRef idx="minor">
+            <a:schemeClr val="tx1"/>
+          </a:fontRef>
+        </p:style>
+      </p:cxnSp>
+      <p:cxnSp>
+        <p:nvCxnSpPr>
+          <p:cNvPr id="59" name="Straight Connector 58">
+            <a:extLst>
+              <a:ext uri="{FF2B5EF4-FFF2-40B4-BE49-F238E27FC236}">
+                <a16:creationId xmlns:a16="http://schemas.microsoft.com/office/drawing/2014/main" id="{B2FD3F32-75F3-1571-0C64-BEEED61E665F}"/>
+              </a:ext>
+            </a:extLst>
+          </p:cNvPr>
+          <p:cNvCxnSpPr>
+            <a:cxnSpLocks/>
+            <a:stCxn id="51" idx="3"/>
+            <a:endCxn id="52" idx="7"/>
+          </p:cNvCxnSpPr>
+          <p:nvPr/>
+        </p:nvCxnSpPr>
+        <p:spPr>
+          <a:xfrm flipH="1">
+            <a:off x="6756631" y="3552488"/>
+            <a:ext cx="214091" cy="289108"/>
+          </a:xfrm>
+          <a:prstGeom prst="line">
+            <a:avLst/>
+          </a:prstGeom>
+          <a:ln>
+            <a:solidFill>
+              <a:schemeClr val="bg2">
+                <a:lumMod val="25000"/>
+              </a:schemeClr>
+            </a:solidFill>
+          </a:ln>
+        </p:spPr>
+        <p:style>
+          <a:lnRef idx="2">
+            <a:schemeClr val="accent1"/>
+          </a:lnRef>
+          <a:fillRef idx="0">
+            <a:schemeClr val="accent1"/>
+          </a:fillRef>
+          <a:effectRef idx="1">
+            <a:schemeClr val="accent1"/>
+          </a:effectRef>
+          <a:fontRef idx="minor">
+            <a:schemeClr val="tx1"/>
+          </a:fontRef>
+        </p:style>
+      </p:cxnSp>
+      <p:sp>
+        <p:nvSpPr>
+          <p:cNvPr id="60" name="Oval 59">
+            <a:extLst>
+              <a:ext uri="{FF2B5EF4-FFF2-40B4-BE49-F238E27FC236}">
+                <a16:creationId xmlns:a16="http://schemas.microsoft.com/office/drawing/2014/main" id="{622F999F-C555-9B07-31C5-5F53597F4390}"/>
+              </a:ext>
+            </a:extLst>
+          </p:cNvPr>
+          <p:cNvSpPr/>
+          <p:nvPr/>
+        </p:nvSpPr>
+        <p:spPr>
+          <a:xfrm>
+            <a:off x="7702876" y="4206707"/>
+            <a:ext cx="266218" cy="266217"/>
+          </a:xfrm>
+          <a:prstGeom prst="ellipse">
+            <a:avLst/>
+          </a:prstGeom>
+          <a:solidFill>
+            <a:schemeClr val="bg2">
+              <a:lumMod val="50000"/>
+            </a:schemeClr>
+          </a:solidFill>
+          <a:ln>
+            <a:solidFill>
+              <a:schemeClr val="bg2">
+                <a:lumMod val="25000"/>
+              </a:schemeClr>
+            </a:solidFill>
+          </a:ln>
+        </p:spPr>
+        <p:style>
+          <a:lnRef idx="2">
+            <a:schemeClr val="accent1">
+              <a:shade val="15000"/>
+            </a:schemeClr>
+          </a:lnRef>
+          <a:fillRef idx="1">
+            <a:schemeClr val="accent1"/>
+          </a:fillRef>
+          <a:effectRef idx="0">
+            <a:schemeClr val="accent1"/>
+          </a:effectRef>
+          <a:fontRef idx="minor">
+            <a:schemeClr val="lt1"/>
+          </a:fontRef>
+        </p:style>
+        <p:txBody>
+          <a:bodyPr rtlCol="0" anchor="ctr"/>
+          <a:lstStyle>
+            <a:defPPr>
+              <a:defRPr lang="en-US"/>
+            </a:defPPr>
+            <a:lvl1pPr marL="0" algn="l" defTabSz="914400" rtl="0" eaLnBrk="1" latinLnBrk="0" hangingPunct="1">
+              <a:defRPr sz="1800" kern="1200">
+                <a:solidFill>
+                  <a:schemeClr val="lt1"/>
+                </a:solidFill>
+                <a:latin typeface="+mn-lt"/>
+                <a:ea typeface="+mn-ea"/>
+                <a:cs typeface="+mn-cs"/>
+              </a:defRPr>
+            </a:lvl1pPr>
+            <a:lvl2pPr marL="457200" algn="l" defTabSz="914400" rtl="0" eaLnBrk="1" latinLnBrk="0" hangingPunct="1">
+              <a:defRPr sz="1800" kern="1200">
+                <a:solidFill>
+                  <a:schemeClr val="lt1"/>
+                </a:solidFill>
+                <a:latin typeface="+mn-lt"/>
+                <a:ea typeface="+mn-ea"/>
+                <a:cs typeface="+mn-cs"/>
+              </a:defRPr>
+            </a:lvl2pPr>
+            <a:lvl3pPr marL="914400" algn="l" defTabSz="914400" rtl="0" eaLnBrk="1" latinLnBrk="0" hangingPunct="1">
+              <a:defRPr sz="1800" kern="1200">
+                <a:solidFill>
+                  <a:schemeClr val="lt1"/>
+                </a:solidFill>
+                <a:latin typeface="+mn-lt"/>
+                <a:ea typeface="+mn-ea"/>
+                <a:cs typeface="+mn-cs"/>
+              </a:defRPr>
+            </a:lvl3pPr>
+            <a:lvl4pPr marL="1371600" algn="l" defTabSz="914400" rtl="0" eaLnBrk="1" latinLnBrk="0" hangingPunct="1">
+              <a:defRPr sz="1800" kern="1200">
+                <a:solidFill>
+                  <a:schemeClr val="lt1"/>
+                </a:solidFill>
+                <a:latin typeface="+mn-lt"/>
+                <a:ea typeface="+mn-ea"/>
+                <a:cs typeface="+mn-cs"/>
+              </a:defRPr>
+            </a:lvl4pPr>
+            <a:lvl5pPr marL="1828800" algn="l" defTabSz="914400" rtl="0" eaLnBrk="1" latinLnBrk="0" hangingPunct="1">
+              <a:defRPr sz="1800" kern="1200">
+                <a:solidFill>
+                  <a:schemeClr val="lt1"/>
+                </a:solidFill>
+                <a:latin typeface="+mn-lt"/>
+                <a:ea typeface="+mn-ea"/>
+                <a:cs typeface="+mn-cs"/>
+              </a:defRPr>
+            </a:lvl5pPr>
+            <a:lvl6pPr marL="2286000" algn="l" defTabSz="914400" rtl="0" eaLnBrk="1" latinLnBrk="0" hangingPunct="1">
+              <a:defRPr sz="1800" kern="1200">
+                <a:solidFill>
+                  <a:schemeClr val="lt1"/>
+                </a:solidFill>
+                <a:latin typeface="+mn-lt"/>
+                <a:ea typeface="+mn-ea"/>
+                <a:cs typeface="+mn-cs"/>
+              </a:defRPr>
+            </a:lvl6pPr>
+            <a:lvl7pPr marL="2743200" algn="l" defTabSz="914400" rtl="0" eaLnBrk="1" latinLnBrk="0" hangingPunct="1">
+              <a:defRPr sz="1800" kern="1200">
+                <a:solidFill>
+                  <a:schemeClr val="lt1"/>
+                </a:solidFill>
+                <a:latin typeface="+mn-lt"/>
+                <a:ea typeface="+mn-ea"/>
+                <a:cs typeface="+mn-cs"/>
+              </a:defRPr>
+            </a:lvl7pPr>
+            <a:lvl8pPr marL="3200400" algn="l" defTabSz="914400" rtl="0" eaLnBrk="1" latinLnBrk="0" hangingPunct="1">
+              <a:defRPr sz="1800" kern="1200">
+                <a:solidFill>
+                  <a:schemeClr val="lt1"/>
+                </a:solidFill>
+                <a:latin typeface="+mn-lt"/>
+                <a:ea typeface="+mn-ea"/>
+                <a:cs typeface="+mn-cs"/>
+              </a:defRPr>
+            </a:lvl8pPr>
+            <a:lvl9pPr marL="3657600" algn="l" defTabSz="914400" rtl="0" eaLnBrk="1" latinLnBrk="0" hangingPunct="1">
+              <a:defRPr sz="1800" kern="1200">
+                <a:solidFill>
+                  <a:schemeClr val="lt1"/>
+                </a:solidFill>
+                <a:latin typeface="+mn-lt"/>
+                <a:ea typeface="+mn-ea"/>
+                <a:cs typeface="+mn-cs"/>
+              </a:defRPr>
+            </a:lvl9pPr>
+          </a:lstStyle>
+          <a:p>
+            <a:pPr algn="ctr"/>
+            <a:endParaRPr lang="en-US"/>
+          </a:p>
+        </p:txBody>
+      </p:sp>
+      <p:cxnSp>
+        <p:nvCxnSpPr>
+          <p:cNvPr id="61" name="Straight Connector 60">
+            <a:extLst>
+              <a:ext uri="{FF2B5EF4-FFF2-40B4-BE49-F238E27FC236}">
+                <a16:creationId xmlns:a16="http://schemas.microsoft.com/office/drawing/2014/main" id="{11281AFB-B93A-DFC1-3966-92B369399598}"/>
+              </a:ext>
+            </a:extLst>
+          </p:cNvPr>
+          <p:cNvCxnSpPr>
+            <a:cxnSpLocks/>
+            <a:stCxn id="53" idx="5"/>
+            <a:endCxn id="60" idx="1"/>
+          </p:cNvCxnSpPr>
+          <p:nvPr/>
+        </p:nvCxnSpPr>
+        <p:spPr>
+          <a:xfrm>
+            <a:off x="7578443" y="4029839"/>
+            <a:ext cx="163420" cy="215855"/>
+          </a:xfrm>
+          <a:prstGeom prst="line">
+            <a:avLst/>
+          </a:prstGeom>
+          <a:ln>
+            <a:solidFill>
+              <a:schemeClr val="bg2">
+                <a:lumMod val="25000"/>
+              </a:schemeClr>
+            </a:solidFill>
+          </a:ln>
+        </p:spPr>
+        <p:style>
+          <a:lnRef idx="2">
+            <a:schemeClr val="accent1"/>
+          </a:lnRef>
+          <a:fillRef idx="0">
+            <a:schemeClr val="accent1"/>
+          </a:fillRef>
+          <a:effectRef idx="1">
+            <a:schemeClr val="accent1"/>
+          </a:effectRef>
+          <a:fontRef idx="minor">
+            <a:schemeClr val="tx1"/>
+          </a:fontRef>
+        </p:style>
+      </p:cxnSp>
+      <p:sp>
+        <p:nvSpPr>
+          <p:cNvPr id="62" name="Rectangle 61">
+            <a:extLst>
+              <a:ext uri="{FF2B5EF4-FFF2-40B4-BE49-F238E27FC236}">
+                <a16:creationId xmlns:a16="http://schemas.microsoft.com/office/drawing/2014/main" id="{CD0F353F-3467-E539-4ABE-9E52C7D5ED61}"/>
+              </a:ext>
+            </a:extLst>
+          </p:cNvPr>
+          <p:cNvSpPr/>
+          <p:nvPr/>
+        </p:nvSpPr>
+        <p:spPr>
+          <a:xfrm>
+            <a:off x="6394731" y="3318351"/>
+            <a:ext cx="202445" cy="210106"/>
+          </a:xfrm>
+          <a:prstGeom prst="rect">
+            <a:avLst/>
+          </a:prstGeom>
+          <a:solidFill>
+            <a:srgbClr val="7030A0"/>
+          </a:solidFill>
+          <a:ln>
+            <a:solidFill>
+              <a:schemeClr val="bg2"/>
+            </a:solidFill>
+          </a:ln>
+        </p:spPr>
+        <p:style>
+          <a:lnRef idx="2">
+            <a:schemeClr val="accent1">
+              <a:shade val="15000"/>
+            </a:schemeClr>
+          </a:lnRef>
+          <a:fillRef idx="1">
+            <a:schemeClr val="accent1"/>
+          </a:fillRef>
+          <a:effectRef idx="0">
+            <a:schemeClr val="accent1"/>
+          </a:effectRef>
+          <a:fontRef idx="minor">
+            <a:schemeClr val="lt1"/>
+          </a:fontRef>
+        </p:style>
+        <p:txBody>
+          <a:bodyPr rtlCol="0" anchor="ctr"/>
+          <a:lstStyle/>
+          <a:p>
+            <a:pPr algn="ctr"/>
+            <a:endParaRPr lang="en-US"/>
+          </a:p>
+        </p:txBody>
+      </p:sp>
+      <p:sp>
+        <p:nvSpPr>
+          <p:cNvPr id="63" name="Rectangle 62">
+            <a:extLst>
+              <a:ext uri="{FF2B5EF4-FFF2-40B4-BE49-F238E27FC236}">
+                <a16:creationId xmlns:a16="http://schemas.microsoft.com/office/drawing/2014/main" id="{827AF04B-797A-BAD1-523A-D74F3180DE4F}"/>
+              </a:ext>
+            </a:extLst>
+          </p:cNvPr>
+          <p:cNvSpPr/>
+          <p:nvPr/>
+        </p:nvSpPr>
+        <p:spPr>
+          <a:xfrm>
+            <a:off x="6609258" y="3318351"/>
+            <a:ext cx="202445" cy="210106"/>
+          </a:xfrm>
+          <a:prstGeom prst="rect">
+            <a:avLst/>
+          </a:prstGeom>
+          <a:solidFill>
+            <a:schemeClr val="tx2">
+              <a:lumMod val="50000"/>
+              <a:lumOff val="50000"/>
+            </a:schemeClr>
+          </a:solidFill>
+          <a:ln>
+            <a:solidFill>
+              <a:schemeClr val="bg2"/>
+            </a:solidFill>
+          </a:ln>
+        </p:spPr>
+        <p:style>
+          <a:lnRef idx="2">
+            <a:schemeClr val="accent1">
+              <a:shade val="15000"/>
+            </a:schemeClr>
+          </a:lnRef>
+          <a:fillRef idx="1">
+            <a:schemeClr val="accent1"/>
+          </a:fillRef>
+          <a:effectRef idx="0">
+            <a:schemeClr val="accent1"/>
+          </a:effectRef>
+          <a:fontRef idx="minor">
+            <a:schemeClr val="lt1"/>
+          </a:fontRef>
+        </p:style>
+        <p:txBody>
+          <a:bodyPr rtlCol="0" anchor="ctr"/>
+          <a:lstStyle/>
+          <a:p>
+            <a:pPr algn="ctr"/>
+            <a:endParaRPr lang="en-US"/>
+          </a:p>
+        </p:txBody>
+      </p:sp>
+      <p:sp>
+        <p:nvSpPr>
+          <p:cNvPr id="64" name="Rectangle 63">
+            <a:extLst>
+              <a:ext uri="{FF2B5EF4-FFF2-40B4-BE49-F238E27FC236}">
+                <a16:creationId xmlns:a16="http://schemas.microsoft.com/office/drawing/2014/main" id="{7A6637FA-560F-62BC-6977-D88E9233E92F}"/>
+              </a:ext>
+            </a:extLst>
+          </p:cNvPr>
+          <p:cNvSpPr/>
+          <p:nvPr/>
+        </p:nvSpPr>
+        <p:spPr>
+          <a:xfrm>
+            <a:off x="6170072" y="3318351"/>
+            <a:ext cx="202445" cy="210106"/>
+          </a:xfrm>
+          <a:prstGeom prst="rect">
+            <a:avLst/>
+          </a:prstGeom>
+          <a:solidFill>
+            <a:srgbClr val="FFFF00"/>
+          </a:solidFill>
+          <a:ln>
+            <a:solidFill>
+              <a:schemeClr val="tx2"/>
+            </a:solidFill>
+          </a:ln>
+        </p:spPr>
+        <p:style>
+          <a:lnRef idx="2">
+            <a:schemeClr val="accent1">
+              <a:shade val="15000"/>
+            </a:schemeClr>
+          </a:lnRef>
+          <a:fillRef idx="1">
+            <a:schemeClr val="accent1"/>
+          </a:fillRef>
+          <a:effectRef idx="0">
+            <a:schemeClr val="accent1"/>
+          </a:effectRef>
+          <a:fontRef idx="minor">
+            <a:schemeClr val="lt1"/>
+          </a:fontRef>
+        </p:style>
+        <p:txBody>
+          <a:bodyPr rtlCol="0" anchor="ctr"/>
+          <a:lstStyle/>
+          <a:p>
+            <a:pPr algn="ctr"/>
+            <a:endParaRPr lang="en-US"/>
+          </a:p>
+        </p:txBody>
+      </p:sp>
+      <p:sp>
+        <p:nvSpPr>
+          <p:cNvPr id="65" name="Rectangle 64">
+            <a:extLst>
+              <a:ext uri="{FF2B5EF4-FFF2-40B4-BE49-F238E27FC236}">
+                <a16:creationId xmlns:a16="http://schemas.microsoft.com/office/drawing/2014/main" id="{BBA120CD-5DEA-9C5F-87E0-0FE7B0910F68}"/>
+              </a:ext>
+            </a:extLst>
+          </p:cNvPr>
+          <p:cNvSpPr/>
+          <p:nvPr/>
+        </p:nvSpPr>
+        <p:spPr>
+          <a:xfrm>
+            <a:off x="5967553" y="3800877"/>
+            <a:ext cx="202445" cy="210106"/>
+          </a:xfrm>
+          <a:prstGeom prst="rect">
+            <a:avLst/>
+          </a:prstGeom>
+          <a:solidFill>
+            <a:schemeClr val="accent5">
+              <a:lumMod val="60000"/>
+              <a:lumOff val="40000"/>
+            </a:schemeClr>
+          </a:solidFill>
+          <a:ln>
+            <a:solidFill>
+              <a:schemeClr val="bg2"/>
+            </a:solidFill>
+          </a:ln>
+        </p:spPr>
+        <p:style>
+          <a:lnRef idx="2">
+            <a:schemeClr val="accent1">
+              <a:shade val="15000"/>
+            </a:schemeClr>
+          </a:lnRef>
+          <a:fillRef idx="1">
+            <a:schemeClr val="accent1"/>
+          </a:fillRef>
+          <a:effectRef idx="0">
+            <a:schemeClr val="accent1"/>
+          </a:effectRef>
+          <a:fontRef idx="minor">
+            <a:schemeClr val="lt1"/>
+          </a:fontRef>
+        </p:style>
+        <p:txBody>
+          <a:bodyPr rtlCol="0" anchor="ctr"/>
+          <a:lstStyle/>
+          <a:p>
+            <a:pPr algn="ctr"/>
+            <a:endParaRPr lang="en-US"/>
+          </a:p>
+        </p:txBody>
+      </p:sp>
+      <p:sp>
+        <p:nvSpPr>
+          <p:cNvPr id="66" name="Rectangle 65">
+            <a:extLst>
+              <a:ext uri="{FF2B5EF4-FFF2-40B4-BE49-F238E27FC236}">
+                <a16:creationId xmlns:a16="http://schemas.microsoft.com/office/drawing/2014/main" id="{C1D2356F-04C4-EAB5-1548-11E14710EB47}"/>
+              </a:ext>
+            </a:extLst>
+          </p:cNvPr>
+          <p:cNvSpPr/>
+          <p:nvPr/>
+        </p:nvSpPr>
+        <p:spPr>
+          <a:xfrm>
+            <a:off x="6175730" y="3800877"/>
+            <a:ext cx="202445" cy="210106"/>
+          </a:xfrm>
+          <a:prstGeom prst="rect">
+            <a:avLst/>
+          </a:prstGeom>
+          <a:solidFill>
+            <a:schemeClr val="accent3">
+              <a:lumMod val="75000"/>
+            </a:schemeClr>
+          </a:solidFill>
+          <a:ln>
+            <a:solidFill>
+              <a:schemeClr val="bg2"/>
+            </a:solidFill>
+          </a:ln>
+        </p:spPr>
+        <p:style>
+          <a:lnRef idx="2">
+            <a:schemeClr val="accent1">
+              <a:shade val="15000"/>
+            </a:schemeClr>
+          </a:lnRef>
+          <a:fillRef idx="1">
+            <a:schemeClr val="accent1"/>
+          </a:fillRef>
+          <a:effectRef idx="0">
+            <a:schemeClr val="accent1"/>
+          </a:effectRef>
+          <a:fontRef idx="minor">
+            <a:schemeClr val="lt1"/>
+          </a:fontRef>
+        </p:style>
+        <p:txBody>
+          <a:bodyPr rtlCol="0" anchor="ctr"/>
+          <a:lstStyle/>
+          <a:p>
+            <a:pPr algn="ctr"/>
+            <a:endParaRPr lang="en-US"/>
+          </a:p>
+        </p:txBody>
+      </p:sp>
+      <p:sp>
+        <p:nvSpPr>
+          <p:cNvPr id="67" name="Rectangle 66">
+            <a:extLst>
+              <a:ext uri="{FF2B5EF4-FFF2-40B4-BE49-F238E27FC236}">
+                <a16:creationId xmlns:a16="http://schemas.microsoft.com/office/drawing/2014/main" id="{A17DAB26-7DA3-1FA4-ADC9-D4DF4CEA207C}"/>
+              </a:ext>
+            </a:extLst>
+          </p:cNvPr>
+          <p:cNvSpPr/>
+          <p:nvPr/>
+        </p:nvSpPr>
+        <p:spPr>
+          <a:xfrm>
+            <a:off x="5749244" y="3800877"/>
+            <a:ext cx="202445" cy="210106"/>
+          </a:xfrm>
+          <a:prstGeom prst="rect">
+            <a:avLst/>
+          </a:prstGeom>
+          <a:solidFill>
+            <a:schemeClr val="accent4"/>
+          </a:solidFill>
+          <a:ln>
+            <a:solidFill>
+              <a:schemeClr val="tx2"/>
+            </a:solidFill>
+          </a:ln>
+        </p:spPr>
+        <p:style>
+          <a:lnRef idx="2">
+            <a:schemeClr val="accent1">
+              <a:shade val="15000"/>
+            </a:schemeClr>
+          </a:lnRef>
+          <a:fillRef idx="1">
+            <a:schemeClr val="accent1"/>
+          </a:fillRef>
+          <a:effectRef idx="0">
+            <a:schemeClr val="accent1"/>
+          </a:effectRef>
+          <a:fontRef idx="minor">
+            <a:schemeClr val="lt1"/>
+          </a:fontRef>
+        </p:style>
+        <p:txBody>
+          <a:bodyPr rtlCol="0" anchor="ctr"/>
+          <a:lstStyle/>
+          <a:p>
+            <a:pPr algn="ctr"/>
+            <a:endParaRPr lang="en-US"/>
+          </a:p>
+        </p:txBody>
+      </p:sp>
+      <p:sp>
+        <p:nvSpPr>
+          <p:cNvPr id="68" name="Rectangle 67">
+            <a:extLst>
+              <a:ext uri="{FF2B5EF4-FFF2-40B4-BE49-F238E27FC236}">
+                <a16:creationId xmlns:a16="http://schemas.microsoft.com/office/drawing/2014/main" id="{E4795100-422C-5ACA-6FAE-4E9F5B265DCD}"/>
+              </a:ext>
+            </a:extLst>
+          </p:cNvPr>
+          <p:cNvSpPr/>
+          <p:nvPr/>
+        </p:nvSpPr>
+        <p:spPr>
+          <a:xfrm>
+            <a:off x="7903723" y="3811171"/>
+            <a:ext cx="202445" cy="210106"/>
+          </a:xfrm>
+          <a:prstGeom prst="rect">
+            <a:avLst/>
+          </a:prstGeom>
+          <a:solidFill>
+            <a:schemeClr val="bg2">
+              <a:lumMod val="90000"/>
+            </a:schemeClr>
+          </a:solidFill>
+          <a:ln>
+            <a:solidFill>
+              <a:schemeClr val="bg2"/>
+            </a:solidFill>
+          </a:ln>
+        </p:spPr>
+        <p:style>
+          <a:lnRef idx="2">
+            <a:schemeClr val="accent1">
+              <a:shade val="15000"/>
+            </a:schemeClr>
+          </a:lnRef>
+          <a:fillRef idx="1">
+            <a:schemeClr val="accent1"/>
+          </a:fillRef>
+          <a:effectRef idx="0">
+            <a:schemeClr val="accent1"/>
+          </a:effectRef>
+          <a:fontRef idx="minor">
+            <a:schemeClr val="lt1"/>
+          </a:fontRef>
+        </p:style>
+        <p:txBody>
+          <a:bodyPr rtlCol="0" anchor="ctr"/>
+          <a:lstStyle/>
+          <a:p>
+            <a:pPr algn="ctr"/>
+            <a:endParaRPr lang="en-US"/>
+          </a:p>
+        </p:txBody>
+      </p:sp>
+      <p:sp>
+        <p:nvSpPr>
+          <p:cNvPr id="69" name="Rectangle 68">
+            <a:extLst>
+              <a:ext uri="{FF2B5EF4-FFF2-40B4-BE49-F238E27FC236}">
+                <a16:creationId xmlns:a16="http://schemas.microsoft.com/office/drawing/2014/main" id="{91800B39-81EB-DEAF-4BFC-E2C8AACC358A}"/>
+              </a:ext>
+            </a:extLst>
+          </p:cNvPr>
+          <p:cNvSpPr/>
+          <p:nvPr/>
+        </p:nvSpPr>
+        <p:spPr>
+          <a:xfrm>
+            <a:off x="8124600" y="3811171"/>
+            <a:ext cx="202445" cy="210106"/>
+          </a:xfrm>
+          <a:prstGeom prst="rect">
+            <a:avLst/>
+          </a:prstGeom>
+          <a:solidFill>
+            <a:srgbClr val="FFFF00"/>
+          </a:solidFill>
+          <a:ln>
+            <a:solidFill>
+              <a:schemeClr val="tx2"/>
+            </a:solidFill>
+          </a:ln>
+        </p:spPr>
+        <p:style>
+          <a:lnRef idx="2">
+            <a:schemeClr val="accent1">
+              <a:shade val="15000"/>
+            </a:schemeClr>
+          </a:lnRef>
+          <a:fillRef idx="1">
+            <a:schemeClr val="accent1"/>
+          </a:fillRef>
+          <a:effectRef idx="0">
+            <a:schemeClr val="accent1"/>
+          </a:effectRef>
+          <a:fontRef idx="minor">
+            <a:schemeClr val="lt1"/>
+          </a:fontRef>
+        </p:style>
+        <p:txBody>
+          <a:bodyPr rtlCol="0" anchor="ctr"/>
+          <a:lstStyle/>
+          <a:p>
+            <a:pPr algn="ctr"/>
+            <a:endParaRPr lang="en-US"/>
+          </a:p>
+        </p:txBody>
+      </p:sp>
+      <p:sp>
+        <p:nvSpPr>
+          <p:cNvPr id="70" name="Rectangle 69">
+            <a:extLst>
+              <a:ext uri="{FF2B5EF4-FFF2-40B4-BE49-F238E27FC236}">
+                <a16:creationId xmlns:a16="http://schemas.microsoft.com/office/drawing/2014/main" id="{3A953579-8DF9-BC1F-E2F5-1DADBEA931F7}"/>
+              </a:ext>
+            </a:extLst>
+          </p:cNvPr>
+          <p:cNvSpPr/>
+          <p:nvPr/>
+        </p:nvSpPr>
+        <p:spPr>
+          <a:xfrm>
+            <a:off x="7685414" y="3811171"/>
+            <a:ext cx="202445" cy="210106"/>
+          </a:xfrm>
+          <a:prstGeom prst="rect">
+            <a:avLst/>
+          </a:prstGeom>
+          <a:solidFill>
+            <a:srgbClr val="FFC000"/>
+          </a:solidFill>
+          <a:ln>
+            <a:solidFill>
+              <a:schemeClr val="bg2"/>
+            </a:solidFill>
+          </a:ln>
+        </p:spPr>
+        <p:style>
+          <a:lnRef idx="2">
+            <a:schemeClr val="accent1">
+              <a:shade val="15000"/>
+            </a:schemeClr>
+          </a:lnRef>
+          <a:fillRef idx="1">
+            <a:schemeClr val="accent1"/>
+          </a:fillRef>
+          <a:effectRef idx="0">
+            <a:schemeClr val="accent1"/>
+          </a:effectRef>
+          <a:fontRef idx="minor">
+            <a:schemeClr val="lt1"/>
+          </a:fontRef>
+        </p:style>
+        <p:txBody>
+          <a:bodyPr rtlCol="0" anchor="ctr"/>
+          <a:lstStyle/>
+          <a:p>
+            <a:pPr algn="ctr"/>
+            <a:endParaRPr lang="en-US"/>
+          </a:p>
+        </p:txBody>
+      </p:sp>
+      <p:sp>
+        <p:nvSpPr>
+          <p:cNvPr id="91" name="Oval 90">
+            <a:extLst>
+              <a:ext uri="{FF2B5EF4-FFF2-40B4-BE49-F238E27FC236}">
+                <a16:creationId xmlns:a16="http://schemas.microsoft.com/office/drawing/2014/main" id="{84495A65-4056-6597-192B-710D353DE891}"/>
+              </a:ext>
+            </a:extLst>
+          </p:cNvPr>
+          <p:cNvSpPr/>
+          <p:nvPr/>
+        </p:nvSpPr>
+        <p:spPr>
+          <a:xfrm>
+            <a:off x="10480476" y="3332165"/>
+            <a:ext cx="266218" cy="266217"/>
+          </a:xfrm>
+          <a:prstGeom prst="ellipse">
+            <a:avLst/>
+          </a:prstGeom>
+          <a:solidFill>
+            <a:schemeClr val="bg2">
+              <a:lumMod val="50000"/>
+            </a:schemeClr>
+          </a:solidFill>
+          <a:ln>
+            <a:solidFill>
+              <a:schemeClr val="bg2">
+                <a:lumMod val="25000"/>
+              </a:schemeClr>
+            </a:solidFill>
+          </a:ln>
+        </p:spPr>
+        <p:style>
+          <a:lnRef idx="2">
+            <a:schemeClr val="accent1">
+              <a:shade val="15000"/>
+            </a:schemeClr>
+          </a:lnRef>
+          <a:fillRef idx="1">
+            <a:schemeClr val="accent1"/>
+          </a:fillRef>
+          <a:effectRef idx="0">
+            <a:schemeClr val="accent1"/>
+          </a:effectRef>
+          <a:fontRef idx="minor">
+            <a:schemeClr val="lt1"/>
+          </a:fontRef>
+        </p:style>
+        <p:txBody>
+          <a:bodyPr rtlCol="0" anchor="ctr"/>
+          <a:lstStyle>
+            <a:defPPr>
+              <a:defRPr lang="en-US"/>
+            </a:defPPr>
+            <a:lvl1pPr marL="0" algn="l" defTabSz="914400" rtl="0" eaLnBrk="1" latinLnBrk="0" hangingPunct="1">
+              <a:defRPr sz="1800" kern="1200">
+                <a:solidFill>
+                  <a:schemeClr val="lt1"/>
+                </a:solidFill>
+                <a:latin typeface="+mn-lt"/>
+                <a:ea typeface="+mn-ea"/>
+                <a:cs typeface="+mn-cs"/>
+              </a:defRPr>
+            </a:lvl1pPr>
+            <a:lvl2pPr marL="457200" algn="l" defTabSz="914400" rtl="0" eaLnBrk="1" latinLnBrk="0" hangingPunct="1">
+              <a:defRPr sz="1800" kern="1200">
+                <a:solidFill>
+                  <a:schemeClr val="lt1"/>
+                </a:solidFill>
+                <a:latin typeface="+mn-lt"/>
+                <a:ea typeface="+mn-ea"/>
+                <a:cs typeface="+mn-cs"/>
+              </a:defRPr>
+            </a:lvl2pPr>
+            <a:lvl3pPr marL="914400" algn="l" defTabSz="914400" rtl="0" eaLnBrk="1" latinLnBrk="0" hangingPunct="1">
+              <a:defRPr sz="1800" kern="1200">
+                <a:solidFill>
+                  <a:schemeClr val="lt1"/>
+                </a:solidFill>
+                <a:latin typeface="+mn-lt"/>
+                <a:ea typeface="+mn-ea"/>
+                <a:cs typeface="+mn-cs"/>
+              </a:defRPr>
+            </a:lvl3pPr>
+            <a:lvl4pPr marL="1371600" algn="l" defTabSz="914400" rtl="0" eaLnBrk="1" latinLnBrk="0" hangingPunct="1">
+              <a:defRPr sz="1800" kern="1200">
+                <a:solidFill>
+                  <a:schemeClr val="lt1"/>
+                </a:solidFill>
+                <a:latin typeface="+mn-lt"/>
+                <a:ea typeface="+mn-ea"/>
+                <a:cs typeface="+mn-cs"/>
+              </a:defRPr>
+            </a:lvl4pPr>
+            <a:lvl5pPr marL="1828800" algn="l" defTabSz="914400" rtl="0" eaLnBrk="1" latinLnBrk="0" hangingPunct="1">
+              <a:defRPr sz="1800" kern="1200">
+                <a:solidFill>
+                  <a:schemeClr val="lt1"/>
+                </a:solidFill>
+                <a:latin typeface="+mn-lt"/>
+                <a:ea typeface="+mn-ea"/>
+                <a:cs typeface="+mn-cs"/>
+              </a:defRPr>
+            </a:lvl5pPr>
+            <a:lvl6pPr marL="2286000" algn="l" defTabSz="914400" rtl="0" eaLnBrk="1" latinLnBrk="0" hangingPunct="1">
+              <a:defRPr sz="1800" kern="1200">
+                <a:solidFill>
+                  <a:schemeClr val="lt1"/>
+                </a:solidFill>
+                <a:latin typeface="+mn-lt"/>
+                <a:ea typeface="+mn-ea"/>
+                <a:cs typeface="+mn-cs"/>
+              </a:defRPr>
+            </a:lvl6pPr>
+            <a:lvl7pPr marL="2743200" algn="l" defTabSz="914400" rtl="0" eaLnBrk="1" latinLnBrk="0" hangingPunct="1">
+              <a:defRPr sz="1800" kern="1200">
+                <a:solidFill>
+                  <a:schemeClr val="lt1"/>
+                </a:solidFill>
+                <a:latin typeface="+mn-lt"/>
+                <a:ea typeface="+mn-ea"/>
+                <a:cs typeface="+mn-cs"/>
+              </a:defRPr>
+            </a:lvl7pPr>
+            <a:lvl8pPr marL="3200400" algn="l" defTabSz="914400" rtl="0" eaLnBrk="1" latinLnBrk="0" hangingPunct="1">
+              <a:defRPr sz="1800" kern="1200">
+                <a:solidFill>
+                  <a:schemeClr val="lt1"/>
+                </a:solidFill>
+                <a:latin typeface="+mn-lt"/>
+                <a:ea typeface="+mn-ea"/>
+                <a:cs typeface="+mn-cs"/>
+              </a:defRPr>
+            </a:lvl8pPr>
+            <a:lvl9pPr marL="3657600" algn="l" defTabSz="914400" rtl="0" eaLnBrk="1" latinLnBrk="0" hangingPunct="1">
+              <a:defRPr sz="1800" kern="1200">
+                <a:solidFill>
+                  <a:schemeClr val="lt1"/>
+                </a:solidFill>
+                <a:latin typeface="+mn-lt"/>
+                <a:ea typeface="+mn-ea"/>
+                <a:cs typeface="+mn-cs"/>
+              </a:defRPr>
+            </a:lvl9pPr>
+          </a:lstStyle>
+          <a:p>
+            <a:pPr algn="ctr"/>
+            <a:endParaRPr lang="en-US"/>
+          </a:p>
+        </p:txBody>
+      </p:sp>
+      <p:sp>
+        <p:nvSpPr>
+          <p:cNvPr id="92" name="Oval 91">
+            <a:extLst>
+              <a:ext uri="{FF2B5EF4-FFF2-40B4-BE49-F238E27FC236}">
+                <a16:creationId xmlns:a16="http://schemas.microsoft.com/office/drawing/2014/main" id="{87AD3D5A-6A2E-C414-08CA-A790974001D7}"/>
+              </a:ext>
+            </a:extLst>
+          </p:cNvPr>
+          <p:cNvSpPr/>
+          <p:nvPr/>
+        </p:nvSpPr>
+        <p:spPr>
+          <a:xfrm>
+            <a:off x="10078141" y="3809516"/>
+            <a:ext cx="266218" cy="266217"/>
+          </a:xfrm>
+          <a:prstGeom prst="ellipse">
+            <a:avLst/>
+          </a:prstGeom>
+          <a:solidFill>
+            <a:schemeClr val="bg2">
+              <a:lumMod val="50000"/>
+            </a:schemeClr>
+          </a:solidFill>
+          <a:ln>
+            <a:solidFill>
+              <a:schemeClr val="bg2">
+                <a:lumMod val="25000"/>
+              </a:schemeClr>
+            </a:solidFill>
+          </a:ln>
+        </p:spPr>
+        <p:style>
+          <a:lnRef idx="2">
+            <a:schemeClr val="accent1">
+              <a:shade val="15000"/>
+            </a:schemeClr>
+          </a:lnRef>
+          <a:fillRef idx="1">
+            <a:schemeClr val="accent1"/>
+          </a:fillRef>
+          <a:effectRef idx="0">
+            <a:schemeClr val="accent1"/>
+          </a:effectRef>
+          <a:fontRef idx="minor">
+            <a:schemeClr val="lt1"/>
+          </a:fontRef>
+        </p:style>
+        <p:txBody>
+          <a:bodyPr rtlCol="0" anchor="ctr"/>
+          <a:lstStyle>
+            <a:defPPr>
+              <a:defRPr lang="en-US"/>
+            </a:defPPr>
+            <a:lvl1pPr marL="0" algn="l" defTabSz="914400" rtl="0" eaLnBrk="1" latinLnBrk="0" hangingPunct="1">
+              <a:defRPr sz="1800" kern="1200">
+                <a:solidFill>
+                  <a:schemeClr val="lt1"/>
+                </a:solidFill>
+                <a:latin typeface="+mn-lt"/>
+                <a:ea typeface="+mn-ea"/>
+                <a:cs typeface="+mn-cs"/>
+              </a:defRPr>
+            </a:lvl1pPr>
+            <a:lvl2pPr marL="457200" algn="l" defTabSz="914400" rtl="0" eaLnBrk="1" latinLnBrk="0" hangingPunct="1">
+              <a:defRPr sz="1800" kern="1200">
+                <a:solidFill>
+                  <a:schemeClr val="lt1"/>
+                </a:solidFill>
+                <a:latin typeface="+mn-lt"/>
+                <a:ea typeface="+mn-ea"/>
+                <a:cs typeface="+mn-cs"/>
+              </a:defRPr>
+            </a:lvl2pPr>
+            <a:lvl3pPr marL="914400" algn="l" defTabSz="914400" rtl="0" eaLnBrk="1" latinLnBrk="0" hangingPunct="1">
+              <a:defRPr sz="1800" kern="1200">
+                <a:solidFill>
+                  <a:schemeClr val="lt1"/>
+                </a:solidFill>
+                <a:latin typeface="+mn-lt"/>
+                <a:ea typeface="+mn-ea"/>
+                <a:cs typeface="+mn-cs"/>
+              </a:defRPr>
+            </a:lvl3pPr>
+            <a:lvl4pPr marL="1371600" algn="l" defTabSz="914400" rtl="0" eaLnBrk="1" latinLnBrk="0" hangingPunct="1">
+              <a:defRPr sz="1800" kern="1200">
+                <a:solidFill>
+                  <a:schemeClr val="lt1"/>
+                </a:solidFill>
+                <a:latin typeface="+mn-lt"/>
+                <a:ea typeface="+mn-ea"/>
+                <a:cs typeface="+mn-cs"/>
+              </a:defRPr>
+            </a:lvl4pPr>
+            <a:lvl5pPr marL="1828800" algn="l" defTabSz="914400" rtl="0" eaLnBrk="1" latinLnBrk="0" hangingPunct="1">
+              <a:defRPr sz="1800" kern="1200">
+                <a:solidFill>
+                  <a:schemeClr val="lt1"/>
+                </a:solidFill>
+                <a:latin typeface="+mn-lt"/>
+                <a:ea typeface="+mn-ea"/>
+                <a:cs typeface="+mn-cs"/>
+              </a:defRPr>
+            </a:lvl5pPr>
+            <a:lvl6pPr marL="2286000" algn="l" defTabSz="914400" rtl="0" eaLnBrk="1" latinLnBrk="0" hangingPunct="1">
+              <a:defRPr sz="1800" kern="1200">
+                <a:solidFill>
+                  <a:schemeClr val="lt1"/>
+                </a:solidFill>
+                <a:latin typeface="+mn-lt"/>
+                <a:ea typeface="+mn-ea"/>
+                <a:cs typeface="+mn-cs"/>
+              </a:defRPr>
+            </a:lvl6pPr>
+            <a:lvl7pPr marL="2743200" algn="l" defTabSz="914400" rtl="0" eaLnBrk="1" latinLnBrk="0" hangingPunct="1">
+              <a:defRPr sz="1800" kern="1200">
+                <a:solidFill>
+                  <a:schemeClr val="lt1"/>
+                </a:solidFill>
+                <a:latin typeface="+mn-lt"/>
+                <a:ea typeface="+mn-ea"/>
+                <a:cs typeface="+mn-cs"/>
+              </a:defRPr>
+            </a:lvl7pPr>
+            <a:lvl8pPr marL="3200400" algn="l" defTabSz="914400" rtl="0" eaLnBrk="1" latinLnBrk="0" hangingPunct="1">
+              <a:defRPr sz="1800" kern="1200">
+                <a:solidFill>
+                  <a:schemeClr val="lt1"/>
+                </a:solidFill>
+                <a:latin typeface="+mn-lt"/>
+                <a:ea typeface="+mn-ea"/>
+                <a:cs typeface="+mn-cs"/>
+              </a:defRPr>
+            </a:lvl8pPr>
+            <a:lvl9pPr marL="3657600" algn="l" defTabSz="914400" rtl="0" eaLnBrk="1" latinLnBrk="0" hangingPunct="1">
+              <a:defRPr sz="1800" kern="1200">
+                <a:solidFill>
+                  <a:schemeClr val="lt1"/>
+                </a:solidFill>
+                <a:latin typeface="+mn-lt"/>
+                <a:ea typeface="+mn-ea"/>
+                <a:cs typeface="+mn-cs"/>
+              </a:defRPr>
+            </a:lvl9pPr>
+          </a:lstStyle>
+          <a:p>
+            <a:pPr algn="ctr"/>
+            <a:endParaRPr lang="en-US"/>
+          </a:p>
+        </p:txBody>
+      </p:sp>
+      <p:sp>
+        <p:nvSpPr>
+          <p:cNvPr id="93" name="Oval 92">
+            <a:extLst>
+              <a:ext uri="{FF2B5EF4-FFF2-40B4-BE49-F238E27FC236}">
+                <a16:creationId xmlns:a16="http://schemas.microsoft.com/office/drawing/2014/main" id="{94C0D8AB-A789-FD8E-16A5-C8031C5FB7DC}"/>
+              </a:ext>
+            </a:extLst>
+          </p:cNvPr>
+          <p:cNvSpPr/>
+          <p:nvPr/>
+        </p:nvSpPr>
+        <p:spPr>
+          <a:xfrm>
+            <a:off x="10899953" y="3809516"/>
+            <a:ext cx="266218" cy="266217"/>
+          </a:xfrm>
+          <a:prstGeom prst="ellipse">
+            <a:avLst/>
+          </a:prstGeom>
+          <a:solidFill>
+            <a:schemeClr val="bg2">
+              <a:lumMod val="50000"/>
+            </a:schemeClr>
+          </a:solidFill>
+          <a:ln>
+            <a:solidFill>
+              <a:schemeClr val="bg2">
+                <a:lumMod val="25000"/>
+              </a:schemeClr>
+            </a:solidFill>
+          </a:ln>
+        </p:spPr>
+        <p:style>
+          <a:lnRef idx="2">
+            <a:schemeClr val="accent1">
+              <a:shade val="15000"/>
+            </a:schemeClr>
+          </a:lnRef>
+          <a:fillRef idx="1">
+            <a:schemeClr val="accent1"/>
+          </a:fillRef>
+          <a:effectRef idx="0">
+            <a:schemeClr val="accent1"/>
+          </a:effectRef>
+          <a:fontRef idx="minor">
+            <a:schemeClr val="lt1"/>
+          </a:fontRef>
+        </p:style>
+        <p:txBody>
+          <a:bodyPr rtlCol="0" anchor="ctr"/>
+          <a:lstStyle>
+            <a:defPPr>
+              <a:defRPr lang="en-US"/>
+            </a:defPPr>
+            <a:lvl1pPr marL="0" algn="l" defTabSz="914400" rtl="0" eaLnBrk="1" latinLnBrk="0" hangingPunct="1">
+              <a:defRPr sz="1800" kern="1200">
+                <a:solidFill>
+                  <a:schemeClr val="lt1"/>
+                </a:solidFill>
+                <a:latin typeface="+mn-lt"/>
+                <a:ea typeface="+mn-ea"/>
+                <a:cs typeface="+mn-cs"/>
+              </a:defRPr>
+            </a:lvl1pPr>
+            <a:lvl2pPr marL="457200" algn="l" defTabSz="914400" rtl="0" eaLnBrk="1" latinLnBrk="0" hangingPunct="1">
+              <a:defRPr sz="1800" kern="1200">
+                <a:solidFill>
+                  <a:schemeClr val="lt1"/>
+                </a:solidFill>
+                <a:latin typeface="+mn-lt"/>
+                <a:ea typeface="+mn-ea"/>
+                <a:cs typeface="+mn-cs"/>
+              </a:defRPr>
+            </a:lvl2pPr>
+            <a:lvl3pPr marL="914400" algn="l" defTabSz="914400" rtl="0" eaLnBrk="1" latinLnBrk="0" hangingPunct="1">
+              <a:defRPr sz="1800" kern="1200">
+                <a:solidFill>
+                  <a:schemeClr val="lt1"/>
+                </a:solidFill>
+                <a:latin typeface="+mn-lt"/>
+                <a:ea typeface="+mn-ea"/>
+                <a:cs typeface="+mn-cs"/>
+              </a:defRPr>
+            </a:lvl3pPr>
+            <a:lvl4pPr marL="1371600" algn="l" defTabSz="914400" rtl="0" eaLnBrk="1" latinLnBrk="0" hangingPunct="1">
+              <a:defRPr sz="1800" kern="1200">
+                <a:solidFill>
+                  <a:schemeClr val="lt1"/>
+                </a:solidFill>
+                <a:latin typeface="+mn-lt"/>
+                <a:ea typeface="+mn-ea"/>
+                <a:cs typeface="+mn-cs"/>
+              </a:defRPr>
+            </a:lvl4pPr>
+            <a:lvl5pPr marL="1828800" algn="l" defTabSz="914400" rtl="0" eaLnBrk="1" latinLnBrk="0" hangingPunct="1">
+              <a:defRPr sz="1800" kern="1200">
+                <a:solidFill>
+                  <a:schemeClr val="lt1"/>
+                </a:solidFill>
+                <a:latin typeface="+mn-lt"/>
+                <a:ea typeface="+mn-ea"/>
+                <a:cs typeface="+mn-cs"/>
+              </a:defRPr>
+            </a:lvl5pPr>
+            <a:lvl6pPr marL="2286000" algn="l" defTabSz="914400" rtl="0" eaLnBrk="1" latinLnBrk="0" hangingPunct="1">
+              <a:defRPr sz="1800" kern="1200">
+                <a:solidFill>
+                  <a:schemeClr val="lt1"/>
+                </a:solidFill>
+                <a:latin typeface="+mn-lt"/>
+                <a:ea typeface="+mn-ea"/>
+                <a:cs typeface="+mn-cs"/>
+              </a:defRPr>
+            </a:lvl6pPr>
+            <a:lvl7pPr marL="2743200" algn="l" defTabSz="914400" rtl="0" eaLnBrk="1" latinLnBrk="0" hangingPunct="1">
+              <a:defRPr sz="1800" kern="1200">
+                <a:solidFill>
+                  <a:schemeClr val="lt1"/>
+                </a:solidFill>
+                <a:latin typeface="+mn-lt"/>
+                <a:ea typeface="+mn-ea"/>
+                <a:cs typeface="+mn-cs"/>
+              </a:defRPr>
+            </a:lvl7pPr>
+            <a:lvl8pPr marL="3200400" algn="l" defTabSz="914400" rtl="0" eaLnBrk="1" latinLnBrk="0" hangingPunct="1">
+              <a:defRPr sz="1800" kern="1200">
+                <a:solidFill>
+                  <a:schemeClr val="lt1"/>
+                </a:solidFill>
+                <a:latin typeface="+mn-lt"/>
+                <a:ea typeface="+mn-ea"/>
+                <a:cs typeface="+mn-cs"/>
+              </a:defRPr>
+            </a:lvl8pPr>
+            <a:lvl9pPr marL="3657600" algn="l" defTabSz="914400" rtl="0" eaLnBrk="1" latinLnBrk="0" hangingPunct="1">
+              <a:defRPr sz="1800" kern="1200">
+                <a:solidFill>
+                  <a:schemeClr val="lt1"/>
+                </a:solidFill>
+                <a:latin typeface="+mn-lt"/>
+                <a:ea typeface="+mn-ea"/>
+                <a:cs typeface="+mn-cs"/>
+              </a:defRPr>
+            </a:lvl9pPr>
+          </a:lstStyle>
+          <a:p>
+            <a:pPr algn="ctr"/>
+            <a:endParaRPr lang="en-US"/>
+          </a:p>
+        </p:txBody>
+      </p:sp>
+      <p:sp>
+        <p:nvSpPr>
+          <p:cNvPr id="94" name="Oval 93">
+            <a:extLst>
+              <a:ext uri="{FF2B5EF4-FFF2-40B4-BE49-F238E27FC236}">
+                <a16:creationId xmlns:a16="http://schemas.microsoft.com/office/drawing/2014/main" id="{992E0D13-EC2D-8D08-2D7E-B5F1B80B665A}"/>
+              </a:ext>
+            </a:extLst>
+          </p:cNvPr>
+          <p:cNvSpPr/>
+          <p:nvPr/>
+        </p:nvSpPr>
+        <p:spPr>
+          <a:xfrm>
+            <a:off x="9713673" y="4227997"/>
+            <a:ext cx="266218" cy="266217"/>
+          </a:xfrm>
+          <a:prstGeom prst="ellipse">
+            <a:avLst/>
+          </a:prstGeom>
+          <a:solidFill>
+            <a:schemeClr val="bg2">
+              <a:lumMod val="50000"/>
+            </a:schemeClr>
+          </a:solidFill>
+          <a:ln>
+            <a:solidFill>
+              <a:schemeClr val="bg2">
+                <a:lumMod val="25000"/>
+              </a:schemeClr>
+            </a:solidFill>
+          </a:ln>
+        </p:spPr>
+        <p:style>
+          <a:lnRef idx="2">
+            <a:schemeClr val="accent1">
+              <a:shade val="15000"/>
+            </a:schemeClr>
+          </a:lnRef>
+          <a:fillRef idx="1">
+            <a:schemeClr val="accent1"/>
+          </a:fillRef>
+          <a:effectRef idx="0">
+            <a:schemeClr val="accent1"/>
+          </a:effectRef>
+          <a:fontRef idx="minor">
+            <a:schemeClr val="lt1"/>
+          </a:fontRef>
+        </p:style>
+        <p:txBody>
+          <a:bodyPr rtlCol="0" anchor="ctr"/>
+          <a:lstStyle>
+            <a:defPPr>
+              <a:defRPr lang="en-US"/>
+            </a:defPPr>
+            <a:lvl1pPr marL="0" algn="l" defTabSz="914400" rtl="0" eaLnBrk="1" latinLnBrk="0" hangingPunct="1">
+              <a:defRPr sz="1800" kern="1200">
+                <a:solidFill>
+                  <a:schemeClr val="lt1"/>
+                </a:solidFill>
+                <a:latin typeface="+mn-lt"/>
+                <a:ea typeface="+mn-ea"/>
+                <a:cs typeface="+mn-cs"/>
+              </a:defRPr>
+            </a:lvl1pPr>
+            <a:lvl2pPr marL="457200" algn="l" defTabSz="914400" rtl="0" eaLnBrk="1" latinLnBrk="0" hangingPunct="1">
+              <a:defRPr sz="1800" kern="1200">
+                <a:solidFill>
+                  <a:schemeClr val="lt1"/>
+                </a:solidFill>
+                <a:latin typeface="+mn-lt"/>
+                <a:ea typeface="+mn-ea"/>
+                <a:cs typeface="+mn-cs"/>
+              </a:defRPr>
+            </a:lvl2pPr>
+            <a:lvl3pPr marL="914400" algn="l" defTabSz="914400" rtl="0" eaLnBrk="1" latinLnBrk="0" hangingPunct="1">
+              <a:defRPr sz="1800" kern="1200">
+                <a:solidFill>
+                  <a:schemeClr val="lt1"/>
+                </a:solidFill>
+                <a:latin typeface="+mn-lt"/>
+                <a:ea typeface="+mn-ea"/>
+                <a:cs typeface="+mn-cs"/>
+              </a:defRPr>
+            </a:lvl3pPr>
+            <a:lvl4pPr marL="1371600" algn="l" defTabSz="914400" rtl="0" eaLnBrk="1" latinLnBrk="0" hangingPunct="1">
+              <a:defRPr sz="1800" kern="1200">
+                <a:solidFill>
+                  <a:schemeClr val="lt1"/>
+                </a:solidFill>
+                <a:latin typeface="+mn-lt"/>
+                <a:ea typeface="+mn-ea"/>
+                <a:cs typeface="+mn-cs"/>
+              </a:defRPr>
+            </a:lvl4pPr>
+            <a:lvl5pPr marL="1828800" algn="l" defTabSz="914400" rtl="0" eaLnBrk="1" latinLnBrk="0" hangingPunct="1">
+              <a:defRPr sz="1800" kern="1200">
+                <a:solidFill>
+                  <a:schemeClr val="lt1"/>
+                </a:solidFill>
+                <a:latin typeface="+mn-lt"/>
+                <a:ea typeface="+mn-ea"/>
+                <a:cs typeface="+mn-cs"/>
+              </a:defRPr>
+            </a:lvl5pPr>
+            <a:lvl6pPr marL="2286000" algn="l" defTabSz="914400" rtl="0" eaLnBrk="1" latinLnBrk="0" hangingPunct="1">
+              <a:defRPr sz="1800" kern="1200">
+                <a:solidFill>
+                  <a:schemeClr val="lt1"/>
+                </a:solidFill>
+                <a:latin typeface="+mn-lt"/>
+                <a:ea typeface="+mn-ea"/>
+                <a:cs typeface="+mn-cs"/>
+              </a:defRPr>
+            </a:lvl6pPr>
+            <a:lvl7pPr marL="2743200" algn="l" defTabSz="914400" rtl="0" eaLnBrk="1" latinLnBrk="0" hangingPunct="1">
+              <a:defRPr sz="1800" kern="1200">
+                <a:solidFill>
+                  <a:schemeClr val="lt1"/>
+                </a:solidFill>
+                <a:latin typeface="+mn-lt"/>
+                <a:ea typeface="+mn-ea"/>
+                <a:cs typeface="+mn-cs"/>
+              </a:defRPr>
+            </a:lvl7pPr>
+            <a:lvl8pPr marL="3200400" algn="l" defTabSz="914400" rtl="0" eaLnBrk="1" latinLnBrk="0" hangingPunct="1">
+              <a:defRPr sz="1800" kern="1200">
+                <a:solidFill>
+                  <a:schemeClr val="lt1"/>
+                </a:solidFill>
+                <a:latin typeface="+mn-lt"/>
+                <a:ea typeface="+mn-ea"/>
+                <a:cs typeface="+mn-cs"/>
+              </a:defRPr>
+            </a:lvl8pPr>
+            <a:lvl9pPr marL="3657600" algn="l" defTabSz="914400" rtl="0" eaLnBrk="1" latinLnBrk="0" hangingPunct="1">
+              <a:defRPr sz="1800" kern="1200">
+                <a:solidFill>
+                  <a:schemeClr val="lt1"/>
+                </a:solidFill>
+                <a:latin typeface="+mn-lt"/>
+                <a:ea typeface="+mn-ea"/>
+                <a:cs typeface="+mn-cs"/>
+              </a:defRPr>
+            </a:lvl9pPr>
+          </a:lstStyle>
+          <a:p>
+            <a:pPr algn="ctr"/>
+            <a:endParaRPr lang="en-US"/>
+          </a:p>
+        </p:txBody>
+      </p:sp>
+      <p:sp>
+        <p:nvSpPr>
+          <p:cNvPr id="95" name="Oval 94">
+            <a:extLst>
+              <a:ext uri="{FF2B5EF4-FFF2-40B4-BE49-F238E27FC236}">
+                <a16:creationId xmlns:a16="http://schemas.microsoft.com/office/drawing/2014/main" id="{D50A56B4-BA1F-D208-6161-1AA3B59ABAED}"/>
+              </a:ext>
+            </a:extLst>
+          </p:cNvPr>
+          <p:cNvSpPr/>
+          <p:nvPr/>
+        </p:nvSpPr>
+        <p:spPr>
+          <a:xfrm>
+            <a:off x="10431290" y="4213614"/>
+            <a:ext cx="266218" cy="266217"/>
+          </a:xfrm>
+          <a:prstGeom prst="ellipse">
+            <a:avLst/>
+          </a:prstGeom>
+          <a:solidFill>
+            <a:schemeClr val="bg2">
+              <a:lumMod val="50000"/>
+            </a:schemeClr>
+          </a:solidFill>
+          <a:ln>
+            <a:solidFill>
+              <a:schemeClr val="bg2">
+                <a:lumMod val="25000"/>
+              </a:schemeClr>
+            </a:solidFill>
+          </a:ln>
+        </p:spPr>
+        <p:style>
+          <a:lnRef idx="2">
+            <a:schemeClr val="accent1">
+              <a:shade val="15000"/>
+            </a:schemeClr>
+          </a:lnRef>
+          <a:fillRef idx="1">
+            <a:schemeClr val="accent1"/>
+          </a:fillRef>
+          <a:effectRef idx="0">
+            <a:schemeClr val="accent1"/>
+          </a:effectRef>
+          <a:fontRef idx="minor">
+            <a:schemeClr val="lt1"/>
+          </a:fontRef>
+        </p:style>
+        <p:txBody>
+          <a:bodyPr rtlCol="0" anchor="ctr"/>
+          <a:lstStyle>
+            <a:defPPr>
+              <a:defRPr lang="en-US"/>
+            </a:defPPr>
+            <a:lvl1pPr marL="0" algn="l" defTabSz="914400" rtl="0" eaLnBrk="1" latinLnBrk="0" hangingPunct="1">
+              <a:defRPr sz="1800" kern="1200">
+                <a:solidFill>
+                  <a:schemeClr val="lt1"/>
+                </a:solidFill>
+                <a:latin typeface="+mn-lt"/>
+                <a:ea typeface="+mn-ea"/>
+                <a:cs typeface="+mn-cs"/>
+              </a:defRPr>
+            </a:lvl1pPr>
+            <a:lvl2pPr marL="457200" algn="l" defTabSz="914400" rtl="0" eaLnBrk="1" latinLnBrk="0" hangingPunct="1">
+              <a:defRPr sz="1800" kern="1200">
+                <a:solidFill>
+                  <a:schemeClr val="lt1"/>
+                </a:solidFill>
+                <a:latin typeface="+mn-lt"/>
+                <a:ea typeface="+mn-ea"/>
+                <a:cs typeface="+mn-cs"/>
+              </a:defRPr>
+            </a:lvl2pPr>
+            <a:lvl3pPr marL="914400" algn="l" defTabSz="914400" rtl="0" eaLnBrk="1" latinLnBrk="0" hangingPunct="1">
+              <a:defRPr sz="1800" kern="1200">
+                <a:solidFill>
+                  <a:schemeClr val="lt1"/>
+                </a:solidFill>
+                <a:latin typeface="+mn-lt"/>
+                <a:ea typeface="+mn-ea"/>
+                <a:cs typeface="+mn-cs"/>
+              </a:defRPr>
+            </a:lvl3pPr>
+            <a:lvl4pPr marL="1371600" algn="l" defTabSz="914400" rtl="0" eaLnBrk="1" latinLnBrk="0" hangingPunct="1">
+              <a:defRPr sz="1800" kern="1200">
+                <a:solidFill>
+                  <a:schemeClr val="lt1"/>
+                </a:solidFill>
+                <a:latin typeface="+mn-lt"/>
+                <a:ea typeface="+mn-ea"/>
+                <a:cs typeface="+mn-cs"/>
+              </a:defRPr>
+            </a:lvl4pPr>
+            <a:lvl5pPr marL="1828800" algn="l" defTabSz="914400" rtl="0" eaLnBrk="1" latinLnBrk="0" hangingPunct="1">
+              <a:defRPr sz="1800" kern="1200">
+                <a:solidFill>
+                  <a:schemeClr val="lt1"/>
+                </a:solidFill>
+                <a:latin typeface="+mn-lt"/>
+                <a:ea typeface="+mn-ea"/>
+                <a:cs typeface="+mn-cs"/>
+              </a:defRPr>
+            </a:lvl5pPr>
+            <a:lvl6pPr marL="2286000" algn="l" defTabSz="914400" rtl="0" eaLnBrk="1" latinLnBrk="0" hangingPunct="1">
+              <a:defRPr sz="1800" kern="1200">
+                <a:solidFill>
+                  <a:schemeClr val="lt1"/>
+                </a:solidFill>
+                <a:latin typeface="+mn-lt"/>
+                <a:ea typeface="+mn-ea"/>
+                <a:cs typeface="+mn-cs"/>
+              </a:defRPr>
+            </a:lvl6pPr>
+            <a:lvl7pPr marL="2743200" algn="l" defTabSz="914400" rtl="0" eaLnBrk="1" latinLnBrk="0" hangingPunct="1">
+              <a:defRPr sz="1800" kern="1200">
+                <a:solidFill>
+                  <a:schemeClr val="lt1"/>
+                </a:solidFill>
+                <a:latin typeface="+mn-lt"/>
+                <a:ea typeface="+mn-ea"/>
+                <a:cs typeface="+mn-cs"/>
+              </a:defRPr>
+            </a:lvl7pPr>
+            <a:lvl8pPr marL="3200400" algn="l" defTabSz="914400" rtl="0" eaLnBrk="1" latinLnBrk="0" hangingPunct="1">
+              <a:defRPr sz="1800" kern="1200">
+                <a:solidFill>
+                  <a:schemeClr val="lt1"/>
+                </a:solidFill>
+                <a:latin typeface="+mn-lt"/>
+                <a:ea typeface="+mn-ea"/>
+                <a:cs typeface="+mn-cs"/>
+              </a:defRPr>
+            </a:lvl8pPr>
+            <a:lvl9pPr marL="3657600" algn="l" defTabSz="914400" rtl="0" eaLnBrk="1" latinLnBrk="0" hangingPunct="1">
+              <a:defRPr sz="1800" kern="1200">
+                <a:solidFill>
+                  <a:schemeClr val="lt1"/>
+                </a:solidFill>
+                <a:latin typeface="+mn-lt"/>
+                <a:ea typeface="+mn-ea"/>
+                <a:cs typeface="+mn-cs"/>
+              </a:defRPr>
+            </a:lvl9pPr>
+          </a:lstStyle>
+          <a:p>
+            <a:pPr algn="ctr"/>
+            <a:endParaRPr lang="en-US"/>
+          </a:p>
+        </p:txBody>
+      </p:sp>
+      <p:cxnSp>
+        <p:nvCxnSpPr>
+          <p:cNvPr id="96" name="Straight Connector 95">
+            <a:extLst>
+              <a:ext uri="{FF2B5EF4-FFF2-40B4-BE49-F238E27FC236}">
+                <a16:creationId xmlns:a16="http://schemas.microsoft.com/office/drawing/2014/main" id="{37F64405-0D9D-9813-DAFC-35B3F3DA2244}"/>
+              </a:ext>
+            </a:extLst>
+          </p:cNvPr>
+          <p:cNvCxnSpPr>
+            <a:cxnSpLocks/>
+            <a:stCxn id="92" idx="3"/>
+            <a:endCxn id="94" idx="7"/>
+          </p:cNvCxnSpPr>
+          <p:nvPr/>
+        </p:nvCxnSpPr>
+        <p:spPr>
+          <a:xfrm flipH="1">
+            <a:off x="9940904" y="4036746"/>
+            <a:ext cx="176224" cy="230238"/>
+          </a:xfrm>
+          <a:prstGeom prst="line">
+            <a:avLst/>
+          </a:prstGeom>
+          <a:ln>
+            <a:solidFill>
+              <a:schemeClr val="bg2">
+                <a:lumMod val="25000"/>
+              </a:schemeClr>
+            </a:solidFill>
+          </a:ln>
+        </p:spPr>
+        <p:style>
+          <a:lnRef idx="2">
+            <a:schemeClr val="accent1"/>
+          </a:lnRef>
+          <a:fillRef idx="0">
+            <a:schemeClr val="accent1"/>
+          </a:fillRef>
+          <a:effectRef idx="1">
+            <a:schemeClr val="accent1"/>
+          </a:effectRef>
+          <a:fontRef idx="minor">
+            <a:schemeClr val="tx1"/>
+          </a:fontRef>
+        </p:style>
+      </p:cxnSp>
+      <p:cxnSp>
+        <p:nvCxnSpPr>
+          <p:cNvPr id="97" name="Straight Connector 96">
+            <a:extLst>
+              <a:ext uri="{FF2B5EF4-FFF2-40B4-BE49-F238E27FC236}">
+                <a16:creationId xmlns:a16="http://schemas.microsoft.com/office/drawing/2014/main" id="{AD89A438-4B9D-E49C-D4FD-8953407EEB4F}"/>
+              </a:ext>
+            </a:extLst>
+          </p:cNvPr>
+          <p:cNvCxnSpPr>
+            <a:cxnSpLocks/>
+            <a:stCxn id="92" idx="5"/>
+            <a:endCxn id="95" idx="1"/>
+          </p:cNvCxnSpPr>
+          <p:nvPr/>
+        </p:nvCxnSpPr>
+        <p:spPr>
+          <a:xfrm>
+            <a:off x="10305372" y="4036746"/>
+            <a:ext cx="164905" cy="215855"/>
+          </a:xfrm>
+          <a:prstGeom prst="line">
+            <a:avLst/>
+          </a:prstGeom>
+          <a:ln>
+            <a:solidFill>
+              <a:schemeClr val="bg2">
+                <a:lumMod val="25000"/>
+              </a:schemeClr>
+            </a:solidFill>
+          </a:ln>
+        </p:spPr>
+        <p:style>
+          <a:lnRef idx="2">
+            <a:schemeClr val="accent1"/>
+          </a:lnRef>
+          <a:fillRef idx="0">
+            <a:schemeClr val="accent1"/>
+          </a:fillRef>
+          <a:effectRef idx="1">
+            <a:schemeClr val="accent1"/>
+          </a:effectRef>
+          <a:fontRef idx="minor">
+            <a:schemeClr val="tx1"/>
+          </a:fontRef>
+        </p:style>
+      </p:cxnSp>
+      <p:cxnSp>
+        <p:nvCxnSpPr>
+          <p:cNvPr id="98" name="Straight Connector 97">
+            <a:extLst>
+              <a:ext uri="{FF2B5EF4-FFF2-40B4-BE49-F238E27FC236}">
+                <a16:creationId xmlns:a16="http://schemas.microsoft.com/office/drawing/2014/main" id="{9C4BDE27-7C1D-661F-069D-D645FD19DA62}"/>
+              </a:ext>
+            </a:extLst>
+          </p:cNvPr>
+          <p:cNvCxnSpPr>
+            <a:cxnSpLocks/>
+            <a:stCxn id="91" idx="5"/>
+            <a:endCxn id="93" idx="1"/>
+          </p:cNvCxnSpPr>
+          <p:nvPr/>
+        </p:nvCxnSpPr>
+        <p:spPr>
+          <a:xfrm>
+            <a:off x="10707707" y="3559395"/>
+            <a:ext cx="231233" cy="289108"/>
+          </a:xfrm>
+          <a:prstGeom prst="line">
+            <a:avLst/>
+          </a:prstGeom>
+          <a:ln>
+            <a:solidFill>
+              <a:schemeClr val="bg2">
+                <a:lumMod val="25000"/>
+              </a:schemeClr>
+            </a:solidFill>
+          </a:ln>
+        </p:spPr>
+        <p:style>
+          <a:lnRef idx="2">
+            <a:schemeClr val="accent1"/>
+          </a:lnRef>
+          <a:fillRef idx="0">
+            <a:schemeClr val="accent1"/>
+          </a:fillRef>
+          <a:effectRef idx="1">
+            <a:schemeClr val="accent1"/>
+          </a:effectRef>
+          <a:fontRef idx="minor">
+            <a:schemeClr val="tx1"/>
+          </a:fontRef>
+        </p:style>
+      </p:cxnSp>
+      <p:cxnSp>
+        <p:nvCxnSpPr>
+          <p:cNvPr id="99" name="Straight Connector 98">
+            <a:extLst>
+              <a:ext uri="{FF2B5EF4-FFF2-40B4-BE49-F238E27FC236}">
+                <a16:creationId xmlns:a16="http://schemas.microsoft.com/office/drawing/2014/main" id="{EFCEAE6A-D5ED-9E45-B7B5-EBE01CEA695B}"/>
+              </a:ext>
+            </a:extLst>
+          </p:cNvPr>
+          <p:cNvCxnSpPr>
+            <a:cxnSpLocks/>
+            <a:stCxn id="91" idx="3"/>
+            <a:endCxn id="92" idx="7"/>
+          </p:cNvCxnSpPr>
+          <p:nvPr/>
+        </p:nvCxnSpPr>
+        <p:spPr>
+          <a:xfrm flipH="1">
+            <a:off x="10305372" y="3559395"/>
+            <a:ext cx="214091" cy="289108"/>
+          </a:xfrm>
+          <a:prstGeom prst="line">
+            <a:avLst/>
+          </a:prstGeom>
+          <a:ln>
+            <a:solidFill>
+              <a:schemeClr val="bg2">
+                <a:lumMod val="25000"/>
+              </a:schemeClr>
+            </a:solidFill>
+          </a:ln>
+        </p:spPr>
+        <p:style>
+          <a:lnRef idx="2">
+            <a:schemeClr val="accent1"/>
+          </a:lnRef>
+          <a:fillRef idx="0">
+            <a:schemeClr val="accent1"/>
+          </a:fillRef>
+          <a:effectRef idx="1">
+            <a:schemeClr val="accent1"/>
+          </a:effectRef>
+          <a:fontRef idx="minor">
+            <a:schemeClr val="tx1"/>
+          </a:fontRef>
+        </p:style>
+      </p:cxnSp>
+      <p:sp>
+        <p:nvSpPr>
+          <p:cNvPr id="100" name="Oval 99">
+            <a:extLst>
+              <a:ext uri="{FF2B5EF4-FFF2-40B4-BE49-F238E27FC236}">
+                <a16:creationId xmlns:a16="http://schemas.microsoft.com/office/drawing/2014/main" id="{0EA0FAAE-3B8F-AD7B-CA9F-22B7C1BF039E}"/>
+              </a:ext>
+            </a:extLst>
+          </p:cNvPr>
+          <p:cNvSpPr/>
+          <p:nvPr/>
+        </p:nvSpPr>
+        <p:spPr>
+          <a:xfrm>
+            <a:off x="11251617" y="4213614"/>
+            <a:ext cx="266218" cy="266217"/>
+          </a:xfrm>
+          <a:prstGeom prst="ellipse">
+            <a:avLst/>
+          </a:prstGeom>
+          <a:solidFill>
+            <a:schemeClr val="bg2">
+              <a:lumMod val="50000"/>
+            </a:schemeClr>
+          </a:solidFill>
+          <a:ln>
+            <a:solidFill>
+              <a:schemeClr val="bg2">
+                <a:lumMod val="25000"/>
+              </a:schemeClr>
+            </a:solidFill>
+          </a:ln>
+        </p:spPr>
+        <p:style>
+          <a:lnRef idx="2">
+            <a:schemeClr val="accent1">
+              <a:shade val="15000"/>
+            </a:schemeClr>
+          </a:lnRef>
+          <a:fillRef idx="1">
+            <a:schemeClr val="accent1"/>
+          </a:fillRef>
+          <a:effectRef idx="0">
+            <a:schemeClr val="accent1"/>
+          </a:effectRef>
+          <a:fontRef idx="minor">
+            <a:schemeClr val="lt1"/>
+          </a:fontRef>
+        </p:style>
+        <p:txBody>
+          <a:bodyPr rtlCol="0" anchor="ctr"/>
+          <a:lstStyle>
+            <a:defPPr>
+              <a:defRPr lang="en-US"/>
+            </a:defPPr>
+            <a:lvl1pPr marL="0" algn="l" defTabSz="914400" rtl="0" eaLnBrk="1" latinLnBrk="0" hangingPunct="1">
+              <a:defRPr sz="1800" kern="1200">
+                <a:solidFill>
+                  <a:schemeClr val="lt1"/>
+                </a:solidFill>
+                <a:latin typeface="+mn-lt"/>
+                <a:ea typeface="+mn-ea"/>
+                <a:cs typeface="+mn-cs"/>
+              </a:defRPr>
+            </a:lvl1pPr>
+            <a:lvl2pPr marL="457200" algn="l" defTabSz="914400" rtl="0" eaLnBrk="1" latinLnBrk="0" hangingPunct="1">
+              <a:defRPr sz="1800" kern="1200">
+                <a:solidFill>
+                  <a:schemeClr val="lt1"/>
+                </a:solidFill>
+                <a:latin typeface="+mn-lt"/>
+                <a:ea typeface="+mn-ea"/>
+                <a:cs typeface="+mn-cs"/>
+              </a:defRPr>
+            </a:lvl2pPr>
+            <a:lvl3pPr marL="914400" algn="l" defTabSz="914400" rtl="0" eaLnBrk="1" latinLnBrk="0" hangingPunct="1">
+              <a:defRPr sz="1800" kern="1200">
+                <a:solidFill>
+                  <a:schemeClr val="lt1"/>
+                </a:solidFill>
+                <a:latin typeface="+mn-lt"/>
+                <a:ea typeface="+mn-ea"/>
+                <a:cs typeface="+mn-cs"/>
+              </a:defRPr>
+            </a:lvl3pPr>
+            <a:lvl4pPr marL="1371600" algn="l" defTabSz="914400" rtl="0" eaLnBrk="1" latinLnBrk="0" hangingPunct="1">
+              <a:defRPr sz="1800" kern="1200">
+                <a:solidFill>
+                  <a:schemeClr val="lt1"/>
+                </a:solidFill>
+                <a:latin typeface="+mn-lt"/>
+                <a:ea typeface="+mn-ea"/>
+                <a:cs typeface="+mn-cs"/>
+              </a:defRPr>
+            </a:lvl4pPr>
+            <a:lvl5pPr marL="1828800" algn="l" defTabSz="914400" rtl="0" eaLnBrk="1" latinLnBrk="0" hangingPunct="1">
+              <a:defRPr sz="1800" kern="1200">
+                <a:solidFill>
+                  <a:schemeClr val="lt1"/>
+                </a:solidFill>
+                <a:latin typeface="+mn-lt"/>
+                <a:ea typeface="+mn-ea"/>
+                <a:cs typeface="+mn-cs"/>
+              </a:defRPr>
+            </a:lvl5pPr>
+            <a:lvl6pPr marL="2286000" algn="l" defTabSz="914400" rtl="0" eaLnBrk="1" latinLnBrk="0" hangingPunct="1">
+              <a:defRPr sz="1800" kern="1200">
+                <a:solidFill>
+                  <a:schemeClr val="lt1"/>
+                </a:solidFill>
+                <a:latin typeface="+mn-lt"/>
+                <a:ea typeface="+mn-ea"/>
+                <a:cs typeface="+mn-cs"/>
+              </a:defRPr>
+            </a:lvl6pPr>
+            <a:lvl7pPr marL="2743200" algn="l" defTabSz="914400" rtl="0" eaLnBrk="1" latinLnBrk="0" hangingPunct="1">
+              <a:defRPr sz="1800" kern="1200">
+                <a:solidFill>
+                  <a:schemeClr val="lt1"/>
+                </a:solidFill>
+                <a:latin typeface="+mn-lt"/>
+                <a:ea typeface="+mn-ea"/>
+                <a:cs typeface="+mn-cs"/>
+              </a:defRPr>
+            </a:lvl7pPr>
+            <a:lvl8pPr marL="3200400" algn="l" defTabSz="914400" rtl="0" eaLnBrk="1" latinLnBrk="0" hangingPunct="1">
+              <a:defRPr sz="1800" kern="1200">
+                <a:solidFill>
+                  <a:schemeClr val="lt1"/>
+                </a:solidFill>
+                <a:latin typeface="+mn-lt"/>
+                <a:ea typeface="+mn-ea"/>
+                <a:cs typeface="+mn-cs"/>
+              </a:defRPr>
+            </a:lvl8pPr>
+            <a:lvl9pPr marL="3657600" algn="l" defTabSz="914400" rtl="0" eaLnBrk="1" latinLnBrk="0" hangingPunct="1">
+              <a:defRPr sz="1800" kern="1200">
+                <a:solidFill>
+                  <a:schemeClr val="lt1"/>
+                </a:solidFill>
+                <a:latin typeface="+mn-lt"/>
+                <a:ea typeface="+mn-ea"/>
+                <a:cs typeface="+mn-cs"/>
+              </a:defRPr>
+            </a:lvl9pPr>
+          </a:lstStyle>
+          <a:p>
+            <a:pPr algn="ctr"/>
+            <a:endParaRPr lang="en-US"/>
+          </a:p>
+        </p:txBody>
+      </p:sp>
+      <p:cxnSp>
+        <p:nvCxnSpPr>
+          <p:cNvPr id="101" name="Straight Connector 100">
+            <a:extLst>
+              <a:ext uri="{FF2B5EF4-FFF2-40B4-BE49-F238E27FC236}">
+                <a16:creationId xmlns:a16="http://schemas.microsoft.com/office/drawing/2014/main" id="{E86C561A-CD83-5521-6F28-AA1A5A84D4B2}"/>
+              </a:ext>
+            </a:extLst>
+          </p:cNvPr>
+          <p:cNvCxnSpPr>
+            <a:cxnSpLocks/>
+            <a:stCxn id="93" idx="5"/>
+            <a:endCxn id="100" idx="1"/>
+          </p:cNvCxnSpPr>
+          <p:nvPr/>
+        </p:nvCxnSpPr>
+        <p:spPr>
+          <a:xfrm>
+            <a:off x="11127184" y="4036746"/>
+            <a:ext cx="163420" cy="215855"/>
+          </a:xfrm>
+          <a:prstGeom prst="line">
+            <a:avLst/>
+          </a:prstGeom>
+          <a:ln>
+            <a:solidFill>
+              <a:schemeClr val="bg2">
+                <a:lumMod val="25000"/>
+              </a:schemeClr>
+            </a:solidFill>
+          </a:ln>
+        </p:spPr>
+        <p:style>
+          <a:lnRef idx="2">
+            <a:schemeClr val="accent1"/>
+          </a:lnRef>
+          <a:fillRef idx="0">
+            <a:schemeClr val="accent1"/>
+          </a:fillRef>
+          <a:effectRef idx="1">
+            <a:schemeClr val="accent1"/>
+          </a:effectRef>
+          <a:fontRef idx="minor">
+            <a:schemeClr val="tx1"/>
+          </a:fontRef>
+        </p:style>
+      </p:cxnSp>
+      <p:sp>
+        <p:nvSpPr>
+          <p:cNvPr id="102" name="Rectangle 101">
+            <a:extLst>
+              <a:ext uri="{FF2B5EF4-FFF2-40B4-BE49-F238E27FC236}">
+                <a16:creationId xmlns:a16="http://schemas.microsoft.com/office/drawing/2014/main" id="{5C832D21-5A3E-FBD2-4508-908835A22F7D}"/>
+              </a:ext>
+            </a:extLst>
+          </p:cNvPr>
+          <p:cNvSpPr/>
+          <p:nvPr/>
+        </p:nvSpPr>
+        <p:spPr>
+          <a:xfrm>
+            <a:off x="9943472" y="3325258"/>
+            <a:ext cx="202445" cy="210106"/>
+          </a:xfrm>
+          <a:prstGeom prst="rect">
+            <a:avLst/>
+          </a:prstGeom>
+          <a:solidFill>
+            <a:schemeClr val="accent2">
+              <a:lumMod val="40000"/>
+              <a:lumOff val="60000"/>
+            </a:schemeClr>
+          </a:solidFill>
+        </p:spPr>
+        <p:style>
+          <a:lnRef idx="2">
+            <a:schemeClr val="accent1">
+              <a:shade val="15000"/>
+            </a:schemeClr>
+          </a:lnRef>
+          <a:fillRef idx="1">
+            <a:schemeClr val="accent1"/>
+          </a:fillRef>
+          <a:effectRef idx="0">
+            <a:schemeClr val="accent1"/>
+          </a:effectRef>
+          <a:fontRef idx="minor">
+            <a:schemeClr val="lt1"/>
+          </a:fontRef>
+        </p:style>
+        <p:txBody>
+          <a:bodyPr rtlCol="0" anchor="ctr"/>
+          <a:lstStyle/>
+          <a:p>
+            <a:pPr algn="ctr"/>
+            <a:endParaRPr lang="en-US"/>
+          </a:p>
+        </p:txBody>
+      </p:sp>
+      <p:sp>
+        <p:nvSpPr>
+          <p:cNvPr id="103" name="Rectangle 102">
+            <a:extLst>
+              <a:ext uri="{FF2B5EF4-FFF2-40B4-BE49-F238E27FC236}">
+                <a16:creationId xmlns:a16="http://schemas.microsoft.com/office/drawing/2014/main" id="{CB9F893C-97E5-EBDF-2225-F293C1993E2A}"/>
+              </a:ext>
+            </a:extLst>
+          </p:cNvPr>
+          <p:cNvSpPr/>
+          <p:nvPr/>
+        </p:nvSpPr>
+        <p:spPr>
+          <a:xfrm>
+            <a:off x="10157999" y="3325258"/>
+            <a:ext cx="202445" cy="210106"/>
+          </a:xfrm>
+          <a:prstGeom prst="rect">
+            <a:avLst/>
+          </a:prstGeom>
+          <a:solidFill>
+            <a:schemeClr val="accent2">
+              <a:lumMod val="50000"/>
+            </a:schemeClr>
+          </a:solidFill>
+          <a:ln>
+            <a:solidFill>
+              <a:schemeClr val="bg2"/>
+            </a:solidFill>
+          </a:ln>
+        </p:spPr>
+        <p:style>
+          <a:lnRef idx="2">
+            <a:schemeClr val="accent1">
+              <a:shade val="15000"/>
+            </a:schemeClr>
+          </a:lnRef>
+          <a:fillRef idx="1">
+            <a:schemeClr val="accent1"/>
+          </a:fillRef>
+          <a:effectRef idx="0">
+            <a:schemeClr val="accent1"/>
+          </a:effectRef>
+          <a:fontRef idx="minor">
+            <a:schemeClr val="lt1"/>
+          </a:fontRef>
+        </p:style>
+        <p:txBody>
+          <a:bodyPr rtlCol="0" anchor="ctr"/>
+          <a:lstStyle/>
+          <a:p>
+            <a:pPr algn="ctr"/>
+            <a:endParaRPr lang="en-US"/>
+          </a:p>
+        </p:txBody>
+      </p:sp>
+      <p:sp>
+        <p:nvSpPr>
+          <p:cNvPr id="104" name="Rectangle 103">
+            <a:extLst>
+              <a:ext uri="{FF2B5EF4-FFF2-40B4-BE49-F238E27FC236}">
+                <a16:creationId xmlns:a16="http://schemas.microsoft.com/office/drawing/2014/main" id="{E150630C-9C4A-0B4F-B449-B626165033E7}"/>
+              </a:ext>
+            </a:extLst>
+          </p:cNvPr>
+          <p:cNvSpPr/>
+          <p:nvPr/>
+        </p:nvSpPr>
+        <p:spPr>
+          <a:xfrm>
+            <a:off x="9718813" y="3325258"/>
+            <a:ext cx="202445" cy="210106"/>
+          </a:xfrm>
+          <a:prstGeom prst="rect">
+            <a:avLst/>
+          </a:prstGeom>
+          <a:solidFill>
+            <a:schemeClr val="accent2"/>
+          </a:solidFill>
+          <a:ln>
+            <a:solidFill>
+              <a:schemeClr val="bg2"/>
+            </a:solidFill>
+          </a:ln>
+        </p:spPr>
+        <p:style>
+          <a:lnRef idx="2">
+            <a:schemeClr val="accent1">
+              <a:shade val="15000"/>
+            </a:schemeClr>
+          </a:lnRef>
+          <a:fillRef idx="1">
+            <a:schemeClr val="accent1"/>
+          </a:fillRef>
+          <a:effectRef idx="0">
+            <a:schemeClr val="accent1"/>
+          </a:effectRef>
+          <a:fontRef idx="minor">
+            <a:schemeClr val="lt1"/>
+          </a:fontRef>
+        </p:style>
+        <p:txBody>
+          <a:bodyPr rtlCol="0" anchor="ctr"/>
+          <a:lstStyle/>
+          <a:p>
+            <a:pPr algn="ctr"/>
+            <a:endParaRPr lang="en-US"/>
+          </a:p>
+        </p:txBody>
+      </p:sp>
+      <p:sp>
+        <p:nvSpPr>
+          <p:cNvPr id="105" name="Rectangle 104">
+            <a:extLst>
+              <a:ext uri="{FF2B5EF4-FFF2-40B4-BE49-F238E27FC236}">
+                <a16:creationId xmlns:a16="http://schemas.microsoft.com/office/drawing/2014/main" id="{1E2D6AF6-210B-A473-8D69-8B2B39F16DD6}"/>
+              </a:ext>
+            </a:extLst>
+          </p:cNvPr>
+          <p:cNvSpPr/>
+          <p:nvPr/>
+        </p:nvSpPr>
+        <p:spPr>
+          <a:xfrm>
+            <a:off x="9516294" y="3807784"/>
+            <a:ext cx="202445" cy="210106"/>
+          </a:xfrm>
+          <a:prstGeom prst="rect">
+            <a:avLst/>
+          </a:prstGeom>
+          <a:solidFill>
+            <a:schemeClr val="accent1">
+              <a:lumMod val="20000"/>
+              <a:lumOff val="80000"/>
+            </a:schemeClr>
+          </a:solidFill>
+          <a:ln>
+            <a:solidFill>
+              <a:schemeClr val="bg2"/>
+            </a:solidFill>
+          </a:ln>
+        </p:spPr>
+        <p:style>
+          <a:lnRef idx="2">
+            <a:schemeClr val="accent1">
+              <a:shade val="15000"/>
+            </a:schemeClr>
+          </a:lnRef>
+          <a:fillRef idx="1">
+            <a:schemeClr val="accent1"/>
+          </a:fillRef>
+          <a:effectRef idx="0">
+            <a:schemeClr val="accent1"/>
+          </a:effectRef>
+          <a:fontRef idx="minor">
+            <a:schemeClr val="lt1"/>
+          </a:fontRef>
+        </p:style>
+        <p:txBody>
+          <a:bodyPr rtlCol="0" anchor="ctr"/>
+          <a:lstStyle/>
+          <a:p>
+            <a:pPr algn="ctr"/>
+            <a:endParaRPr lang="en-US"/>
+          </a:p>
+        </p:txBody>
+      </p:sp>
+      <p:sp>
+        <p:nvSpPr>
+          <p:cNvPr id="106" name="Rectangle 105">
+            <a:extLst>
+              <a:ext uri="{FF2B5EF4-FFF2-40B4-BE49-F238E27FC236}">
+                <a16:creationId xmlns:a16="http://schemas.microsoft.com/office/drawing/2014/main" id="{15CAE7D5-DA6B-6B7F-7E78-B050CDA76193}"/>
+              </a:ext>
+            </a:extLst>
+          </p:cNvPr>
+          <p:cNvSpPr/>
+          <p:nvPr/>
+        </p:nvSpPr>
+        <p:spPr>
+          <a:xfrm>
+            <a:off x="9724471" y="3807784"/>
+            <a:ext cx="202445" cy="210106"/>
+          </a:xfrm>
+          <a:prstGeom prst="rect">
+            <a:avLst/>
+          </a:prstGeom>
+          <a:solidFill>
+            <a:srgbClr val="FFFF00"/>
+          </a:solidFill>
+          <a:ln>
+            <a:solidFill>
+              <a:schemeClr val="tx2"/>
+            </a:solidFill>
+          </a:ln>
+        </p:spPr>
+        <p:style>
+          <a:lnRef idx="2">
+            <a:schemeClr val="accent1">
+              <a:shade val="15000"/>
+            </a:schemeClr>
+          </a:lnRef>
+          <a:fillRef idx="1">
+            <a:schemeClr val="accent1"/>
+          </a:fillRef>
+          <a:effectRef idx="0">
+            <a:schemeClr val="accent1"/>
+          </a:effectRef>
+          <a:fontRef idx="minor">
+            <a:schemeClr val="lt1"/>
+          </a:fontRef>
+        </p:style>
+        <p:txBody>
+          <a:bodyPr rtlCol="0" anchor="ctr"/>
+          <a:lstStyle/>
+          <a:p>
+            <a:pPr algn="ctr"/>
+            <a:endParaRPr lang="en-US"/>
+          </a:p>
+        </p:txBody>
+      </p:sp>
+      <p:sp>
+        <p:nvSpPr>
+          <p:cNvPr id="107" name="Rectangle 106">
+            <a:extLst>
+              <a:ext uri="{FF2B5EF4-FFF2-40B4-BE49-F238E27FC236}">
+                <a16:creationId xmlns:a16="http://schemas.microsoft.com/office/drawing/2014/main" id="{4C75495F-3A9F-A0A7-70D0-53B8EF4F3CC4}"/>
+              </a:ext>
+            </a:extLst>
+          </p:cNvPr>
+          <p:cNvSpPr/>
+          <p:nvPr/>
+        </p:nvSpPr>
+        <p:spPr>
+          <a:xfrm>
+            <a:off x="9297985" y="3807784"/>
+            <a:ext cx="202445" cy="210106"/>
+          </a:xfrm>
+          <a:prstGeom prst="rect">
+            <a:avLst/>
+          </a:prstGeom>
+          <a:solidFill>
+            <a:schemeClr val="accent6">
+              <a:lumMod val="60000"/>
+              <a:lumOff val="40000"/>
+            </a:schemeClr>
+          </a:solidFill>
+          <a:ln>
+            <a:solidFill>
+              <a:schemeClr val="bg2"/>
+            </a:solidFill>
+          </a:ln>
+        </p:spPr>
+        <p:style>
+          <a:lnRef idx="2">
+            <a:schemeClr val="accent1">
+              <a:shade val="15000"/>
+            </a:schemeClr>
+          </a:lnRef>
+          <a:fillRef idx="1">
+            <a:schemeClr val="accent1"/>
+          </a:fillRef>
+          <a:effectRef idx="0">
+            <a:schemeClr val="accent1"/>
+          </a:effectRef>
+          <a:fontRef idx="minor">
+            <a:schemeClr val="lt1"/>
+          </a:fontRef>
+        </p:style>
+        <p:txBody>
+          <a:bodyPr rtlCol="0" anchor="ctr"/>
+          <a:lstStyle/>
+          <a:p>
+            <a:pPr algn="ctr"/>
+            <a:endParaRPr lang="en-US"/>
+          </a:p>
+        </p:txBody>
+      </p:sp>
+      <p:sp>
+        <p:nvSpPr>
+          <p:cNvPr id="108" name="Rectangle 107">
+            <a:extLst>
+              <a:ext uri="{FF2B5EF4-FFF2-40B4-BE49-F238E27FC236}">
+                <a16:creationId xmlns:a16="http://schemas.microsoft.com/office/drawing/2014/main" id="{0FB79676-16BE-1E67-BEA4-00093209AA7C}"/>
+              </a:ext>
+            </a:extLst>
+          </p:cNvPr>
+          <p:cNvSpPr/>
+          <p:nvPr/>
+        </p:nvSpPr>
+        <p:spPr>
+          <a:xfrm>
+            <a:off x="11452464" y="3818078"/>
+            <a:ext cx="202445" cy="210106"/>
+          </a:xfrm>
+          <a:prstGeom prst="rect">
+            <a:avLst/>
+          </a:prstGeom>
+          <a:solidFill>
+            <a:schemeClr val="accent2">
+              <a:lumMod val="50000"/>
+            </a:schemeClr>
+          </a:solidFill>
+        </p:spPr>
+        <p:style>
+          <a:lnRef idx="2">
+            <a:schemeClr val="accent1">
+              <a:shade val="15000"/>
+            </a:schemeClr>
+          </a:lnRef>
+          <a:fillRef idx="1">
+            <a:schemeClr val="accent1"/>
+          </a:fillRef>
+          <a:effectRef idx="0">
+            <a:schemeClr val="accent1"/>
+          </a:effectRef>
+          <a:fontRef idx="minor">
+            <a:schemeClr val="lt1"/>
+          </a:fontRef>
+        </p:style>
+        <p:txBody>
+          <a:bodyPr rtlCol="0" anchor="ctr"/>
+          <a:lstStyle/>
+          <a:p>
+            <a:pPr algn="ctr"/>
+            <a:endParaRPr lang="en-US"/>
+          </a:p>
+        </p:txBody>
+      </p:sp>
+      <p:sp>
+        <p:nvSpPr>
+          <p:cNvPr id="109" name="Rectangle 108">
+            <a:extLst>
+              <a:ext uri="{FF2B5EF4-FFF2-40B4-BE49-F238E27FC236}">
+                <a16:creationId xmlns:a16="http://schemas.microsoft.com/office/drawing/2014/main" id="{AFCF6A64-EEA4-0B8E-B542-52F3A9B4945B}"/>
+              </a:ext>
+            </a:extLst>
+          </p:cNvPr>
+          <p:cNvSpPr/>
+          <p:nvPr/>
+        </p:nvSpPr>
+        <p:spPr>
+          <a:xfrm>
+            <a:off x="11673341" y="3818078"/>
+            <a:ext cx="202445" cy="210106"/>
+          </a:xfrm>
+          <a:prstGeom prst="rect">
+            <a:avLst/>
+          </a:prstGeom>
+          <a:solidFill>
+            <a:schemeClr val="accent5">
+              <a:lumMod val="40000"/>
+              <a:lumOff val="60000"/>
+            </a:schemeClr>
+          </a:solidFill>
+          <a:ln>
+            <a:solidFill>
+              <a:schemeClr val="bg2"/>
+            </a:solidFill>
+          </a:ln>
+        </p:spPr>
+        <p:style>
+          <a:lnRef idx="2">
+            <a:schemeClr val="accent1">
+              <a:shade val="15000"/>
+            </a:schemeClr>
+          </a:lnRef>
+          <a:fillRef idx="1">
+            <a:schemeClr val="accent1"/>
+          </a:fillRef>
+          <a:effectRef idx="0">
+            <a:schemeClr val="accent1"/>
+          </a:effectRef>
+          <a:fontRef idx="minor">
+            <a:schemeClr val="lt1"/>
+          </a:fontRef>
+        </p:style>
+        <p:txBody>
+          <a:bodyPr rtlCol="0" anchor="ctr"/>
+          <a:lstStyle/>
+          <a:p>
+            <a:pPr algn="ctr"/>
+            <a:endParaRPr lang="en-US"/>
+          </a:p>
+        </p:txBody>
+      </p:sp>
+      <p:sp>
+        <p:nvSpPr>
+          <p:cNvPr id="110" name="Rectangle 109">
+            <a:extLst>
+              <a:ext uri="{FF2B5EF4-FFF2-40B4-BE49-F238E27FC236}">
+                <a16:creationId xmlns:a16="http://schemas.microsoft.com/office/drawing/2014/main" id="{1A28BEC9-C9DB-D107-D5B5-62AAEECD9CDD}"/>
+              </a:ext>
+            </a:extLst>
+          </p:cNvPr>
+          <p:cNvSpPr/>
+          <p:nvPr/>
+        </p:nvSpPr>
+        <p:spPr>
+          <a:xfrm>
+            <a:off x="11234155" y="3818078"/>
+            <a:ext cx="202445" cy="210106"/>
+          </a:xfrm>
+          <a:prstGeom prst="rect">
+            <a:avLst/>
+          </a:prstGeom>
+          <a:solidFill>
+            <a:srgbClr val="FFC000"/>
+          </a:solidFill>
+          <a:ln>
+            <a:solidFill>
+              <a:schemeClr val="bg2"/>
+            </a:solidFill>
+          </a:ln>
+        </p:spPr>
+        <p:style>
+          <a:lnRef idx="2">
+            <a:schemeClr val="accent1">
+              <a:shade val="15000"/>
+            </a:schemeClr>
+          </a:lnRef>
+          <a:fillRef idx="1">
+            <a:schemeClr val="accent1"/>
+          </a:fillRef>
+          <a:effectRef idx="0">
+            <a:schemeClr val="accent1"/>
+          </a:effectRef>
+          <a:fontRef idx="minor">
+            <a:schemeClr val="lt1"/>
+          </a:fontRef>
+        </p:style>
+        <p:txBody>
+          <a:bodyPr rtlCol="0" anchor="ctr"/>
+          <a:lstStyle/>
+          <a:p>
+            <a:pPr algn="ctr"/>
+            <a:endParaRPr lang="en-US"/>
+          </a:p>
+        </p:txBody>
+      </p:sp>
+      <p:sp>
+        <p:nvSpPr>
+          <p:cNvPr id="113" name="TextBox 112">
+            <a:extLst>
+              <a:ext uri="{FF2B5EF4-FFF2-40B4-BE49-F238E27FC236}">
+                <a16:creationId xmlns:a16="http://schemas.microsoft.com/office/drawing/2014/main" id="{DADB9FB5-8D4A-BD1F-7DF9-E32A7BE98E69}"/>
+              </a:ext>
+            </a:extLst>
+          </p:cNvPr>
+          <p:cNvSpPr txBox="1"/>
+          <p:nvPr/>
+        </p:nvSpPr>
+        <p:spPr>
+          <a:xfrm>
+            <a:off x="7811920" y="2461133"/>
+            <a:ext cx="1192386" cy="646331"/>
+          </a:xfrm>
+          <a:prstGeom prst="rect">
+            <a:avLst/>
+          </a:prstGeom>
+          <a:noFill/>
+        </p:spPr>
+        <p:txBody>
+          <a:bodyPr wrap="square" rtlCol="0">
+            <a:spAutoFit/>
+          </a:bodyPr>
+          <a:lstStyle/>
+          <a:p>
+            <a:pPr algn="ctr"/>
+            <a:r>
+              <a:rPr lang="en-US" dirty="0">
+                <a:solidFill>
+                  <a:schemeClr val="accent1"/>
+                </a:solidFill>
+              </a:rPr>
+              <a:t>Permuted values</a:t>
+            </a:r>
+          </a:p>
+        </p:txBody>
+      </p:sp>
+      <p:sp>
+        <p:nvSpPr>
+          <p:cNvPr id="115" name="Arrow: Right 114">
+            <a:extLst>
+              <a:ext uri="{FF2B5EF4-FFF2-40B4-BE49-F238E27FC236}">
+                <a16:creationId xmlns:a16="http://schemas.microsoft.com/office/drawing/2014/main" id="{A8402E9F-B387-78F0-8DFF-E2A0339A854B}"/>
+              </a:ext>
+            </a:extLst>
+          </p:cNvPr>
+          <p:cNvSpPr/>
+          <p:nvPr/>
+        </p:nvSpPr>
+        <p:spPr>
+          <a:xfrm>
+            <a:off x="8324514" y="4017890"/>
+            <a:ext cx="1099345" cy="596106"/>
+          </a:xfrm>
+          <a:prstGeom prst="rightArrow">
+            <a:avLst/>
+          </a:prstGeom>
+          <a:solidFill>
+            <a:schemeClr val="bg2">
+              <a:lumMod val="50000"/>
+            </a:schemeClr>
+          </a:solidFill>
+          <a:ln>
+            <a:solidFill>
+              <a:schemeClr val="bg2">
+                <a:lumMod val="25000"/>
+              </a:schemeClr>
+            </a:solidFill>
+          </a:ln>
+        </p:spPr>
+        <p:style>
+          <a:lnRef idx="2">
+            <a:schemeClr val="accent1">
+              <a:shade val="15000"/>
+            </a:schemeClr>
+          </a:lnRef>
+          <a:fillRef idx="1">
+            <a:schemeClr val="accent1"/>
+          </a:fillRef>
+          <a:effectRef idx="0">
+            <a:schemeClr val="accent1"/>
+          </a:effectRef>
+          <a:fontRef idx="minor">
+            <a:schemeClr val="lt1"/>
+          </a:fontRef>
+        </p:style>
+        <p:txBody>
+          <a:bodyPr rtlCol="0" anchor="ctr"/>
+          <a:lstStyle/>
+          <a:p>
+            <a:pPr algn="ctr"/>
+            <a:endParaRPr lang="en-US"/>
+          </a:p>
+        </p:txBody>
+      </p:sp>
+      <p:sp>
+        <p:nvSpPr>
+          <p:cNvPr id="116" name="TextBox 115">
+            <a:extLst>
+              <a:ext uri="{FF2B5EF4-FFF2-40B4-BE49-F238E27FC236}">
+                <a16:creationId xmlns:a16="http://schemas.microsoft.com/office/drawing/2014/main" id="{EEACC97A-3F39-7324-59AB-274C6FED96AA}"/>
+              </a:ext>
+            </a:extLst>
+          </p:cNvPr>
+          <p:cNvSpPr txBox="1"/>
+          <p:nvPr/>
+        </p:nvSpPr>
+        <p:spPr>
+          <a:xfrm>
+            <a:off x="8379790" y="4110499"/>
+            <a:ext cx="918195" cy="369332"/>
+          </a:xfrm>
+          <a:prstGeom prst="rect">
+            <a:avLst/>
+          </a:prstGeom>
+          <a:noFill/>
+        </p:spPr>
+        <p:txBody>
+          <a:bodyPr wrap="square" rtlCol="0">
+            <a:spAutoFit/>
+          </a:bodyPr>
+          <a:lstStyle/>
+          <a:p>
+            <a:r>
+              <a:rPr lang="en-US" dirty="0"/>
+              <a:t>New</a:t>
+            </a:r>
+            <a:r>
+              <a:rPr lang="en-US" i="1" dirty="0"/>
+              <a:t> p</a:t>
+            </a:r>
+          </a:p>
+        </p:txBody>
+      </p:sp>
+      <p:sp>
+        <p:nvSpPr>
+          <p:cNvPr id="117" name="Arrow: Down 116">
+            <a:extLst>
+              <a:ext uri="{FF2B5EF4-FFF2-40B4-BE49-F238E27FC236}">
+                <a16:creationId xmlns:a16="http://schemas.microsoft.com/office/drawing/2014/main" id="{17607F9C-41D0-BE29-31EC-9ACD0D99D5CC}"/>
+              </a:ext>
+            </a:extLst>
+          </p:cNvPr>
+          <p:cNvSpPr/>
+          <p:nvPr/>
+        </p:nvSpPr>
+        <p:spPr>
+          <a:xfrm rot="19969540">
+            <a:off x="7609251" y="4801816"/>
+            <a:ext cx="557214" cy="538957"/>
+          </a:xfrm>
+          <a:prstGeom prst="downArrow">
+            <a:avLst/>
+          </a:prstGeom>
+          <a:solidFill>
+            <a:schemeClr val="bg2">
+              <a:lumMod val="50000"/>
+            </a:schemeClr>
+          </a:solidFill>
+          <a:ln>
+            <a:solidFill>
+              <a:schemeClr val="bg2">
+                <a:lumMod val="25000"/>
+              </a:schemeClr>
+            </a:solidFill>
+          </a:ln>
+        </p:spPr>
+        <p:style>
+          <a:lnRef idx="2">
+            <a:schemeClr val="accent1">
+              <a:shade val="15000"/>
+            </a:schemeClr>
+          </a:lnRef>
+          <a:fillRef idx="1">
+            <a:schemeClr val="accent1"/>
+          </a:fillRef>
+          <a:effectRef idx="0">
+            <a:schemeClr val="accent1"/>
+          </a:effectRef>
+          <a:fontRef idx="minor">
+            <a:schemeClr val="lt1"/>
+          </a:fontRef>
+        </p:style>
+        <p:txBody>
+          <a:bodyPr rtlCol="0" anchor="ctr"/>
+          <a:lstStyle/>
+          <a:p>
+            <a:pPr algn="ctr"/>
+            <a:endParaRPr lang="en-US"/>
+          </a:p>
+        </p:txBody>
+      </p:sp>
+      <p:sp>
+        <p:nvSpPr>
+          <p:cNvPr id="118" name="Arrow: Down 117">
+            <a:extLst>
+              <a:ext uri="{FF2B5EF4-FFF2-40B4-BE49-F238E27FC236}">
+                <a16:creationId xmlns:a16="http://schemas.microsoft.com/office/drawing/2014/main" id="{FD6C7FCE-CE6F-5750-D332-6DD5F404C65E}"/>
+              </a:ext>
+            </a:extLst>
+          </p:cNvPr>
+          <p:cNvSpPr/>
+          <p:nvPr/>
+        </p:nvSpPr>
+        <p:spPr>
+          <a:xfrm rot="1710504">
+            <a:off x="9120599" y="4804622"/>
+            <a:ext cx="557214" cy="538957"/>
+          </a:xfrm>
+          <a:prstGeom prst="downArrow">
+            <a:avLst/>
+          </a:prstGeom>
+          <a:solidFill>
+            <a:schemeClr val="bg2">
+              <a:lumMod val="50000"/>
+            </a:schemeClr>
+          </a:solidFill>
+          <a:ln>
+            <a:solidFill>
+              <a:schemeClr val="bg2">
+                <a:lumMod val="25000"/>
+              </a:schemeClr>
+            </a:solidFill>
+          </a:ln>
+        </p:spPr>
+        <p:style>
+          <a:lnRef idx="2">
+            <a:schemeClr val="accent1">
+              <a:shade val="15000"/>
+            </a:schemeClr>
+          </a:lnRef>
+          <a:fillRef idx="1">
+            <a:schemeClr val="accent1"/>
+          </a:fillRef>
+          <a:effectRef idx="0">
+            <a:schemeClr val="accent1"/>
+          </a:effectRef>
+          <a:fontRef idx="minor">
+            <a:schemeClr val="lt1"/>
+          </a:fontRef>
+        </p:style>
+        <p:txBody>
+          <a:bodyPr rtlCol="0" anchor="ctr"/>
+          <a:lstStyle/>
+          <a:p>
+            <a:pPr algn="ctr"/>
+            <a:endParaRPr lang="en-US"/>
+          </a:p>
+        </p:txBody>
+      </p:sp>
+      <p:sp>
+        <p:nvSpPr>
+          <p:cNvPr id="119" name="Arrow: Down 118">
+            <a:extLst>
+              <a:ext uri="{FF2B5EF4-FFF2-40B4-BE49-F238E27FC236}">
+                <a16:creationId xmlns:a16="http://schemas.microsoft.com/office/drawing/2014/main" id="{27FE095C-7393-4340-49FD-BF4A51F4C919}"/>
+              </a:ext>
+            </a:extLst>
+          </p:cNvPr>
+          <p:cNvSpPr/>
+          <p:nvPr/>
+        </p:nvSpPr>
+        <p:spPr>
+          <a:xfrm rot="16200000">
+            <a:off x="9838521" y="5379936"/>
+            <a:ext cx="557214" cy="1036840"/>
+          </a:xfrm>
+          <a:prstGeom prst="downArrow">
+            <a:avLst/>
+          </a:prstGeom>
+          <a:solidFill>
+            <a:schemeClr val="bg2">
+              <a:lumMod val="50000"/>
+            </a:schemeClr>
+          </a:solidFill>
+          <a:ln>
+            <a:solidFill>
+              <a:schemeClr val="bg2">
+                <a:lumMod val="25000"/>
+              </a:schemeClr>
+            </a:solidFill>
+          </a:ln>
+        </p:spPr>
+        <p:style>
+          <a:lnRef idx="2">
+            <a:schemeClr val="accent1">
+              <a:shade val="15000"/>
+            </a:schemeClr>
+          </a:lnRef>
+          <a:fillRef idx="1">
+            <a:schemeClr val="accent1"/>
+          </a:fillRef>
+          <a:effectRef idx="0">
+            <a:schemeClr val="accent1"/>
+          </a:effectRef>
+          <a:fontRef idx="minor">
+            <a:schemeClr val="lt1"/>
+          </a:fontRef>
+        </p:style>
+        <p:txBody>
+          <a:bodyPr rtlCol="0" anchor="ctr"/>
+          <a:lstStyle/>
+          <a:p>
+            <a:pPr algn="ctr"/>
+            <a:endParaRPr lang="en-US"/>
+          </a:p>
+        </p:txBody>
+      </p:sp>
+      <p:sp>
+        <p:nvSpPr>
+          <p:cNvPr id="120" name="TextBox 119">
+            <a:extLst>
+              <a:ext uri="{FF2B5EF4-FFF2-40B4-BE49-F238E27FC236}">
+                <a16:creationId xmlns:a16="http://schemas.microsoft.com/office/drawing/2014/main" id="{E10E6265-9A48-F368-AD6D-A622D031174C}"/>
+              </a:ext>
+            </a:extLst>
+          </p:cNvPr>
+          <p:cNvSpPr txBox="1"/>
+          <p:nvPr/>
+        </p:nvSpPr>
+        <p:spPr>
+          <a:xfrm>
+            <a:off x="6247416" y="5547951"/>
+            <a:ext cx="1136433" cy="646331"/>
+          </a:xfrm>
+          <a:prstGeom prst="rect">
+            <a:avLst/>
+          </a:prstGeom>
+          <a:noFill/>
+        </p:spPr>
+        <p:txBody>
+          <a:bodyPr wrap="square" rtlCol="0">
+            <a:spAutoFit/>
+          </a:bodyPr>
+          <a:lstStyle/>
+          <a:p>
+            <a:pPr algn="ctr"/>
+            <a:r>
+              <a:rPr lang="en-US" dirty="0">
+                <a:solidFill>
+                  <a:schemeClr val="accent1"/>
+                </a:solidFill>
+              </a:rPr>
+              <a:t>OOB</a:t>
+            </a:r>
+          </a:p>
+          <a:p>
+            <a:pPr algn="ctr"/>
+            <a:r>
+              <a:rPr lang="en-US" dirty="0">
+                <a:solidFill>
+                  <a:schemeClr val="accent1"/>
+                </a:solidFill>
+              </a:rPr>
+              <a:t>Accuracy</a:t>
+            </a:r>
+          </a:p>
+        </p:txBody>
+      </p:sp>
+      <p:sp>
+        <p:nvSpPr>
+          <p:cNvPr id="121" name="TextBox 120">
+            <a:extLst>
+              <a:ext uri="{FF2B5EF4-FFF2-40B4-BE49-F238E27FC236}">
+                <a16:creationId xmlns:a16="http://schemas.microsoft.com/office/drawing/2014/main" id="{C083E608-94BA-0624-5607-F44A2572DE34}"/>
+              </a:ext>
+            </a:extLst>
+          </p:cNvPr>
+          <p:cNvSpPr txBox="1"/>
+          <p:nvPr/>
+        </p:nvSpPr>
+        <p:spPr>
+          <a:xfrm>
+            <a:off x="10697508" y="5178619"/>
+            <a:ext cx="1465188" cy="369332"/>
+          </a:xfrm>
+          <a:prstGeom prst="rect">
+            <a:avLst/>
+          </a:prstGeom>
+          <a:noFill/>
+        </p:spPr>
+        <p:txBody>
+          <a:bodyPr wrap="square" rtlCol="0">
+            <a:spAutoFit/>
+          </a:bodyPr>
+          <a:lstStyle/>
+          <a:p>
+            <a:pPr algn="ctr"/>
+            <a:r>
+              <a:rPr lang="en-US" dirty="0">
+                <a:solidFill>
+                  <a:schemeClr val="accent1"/>
+                </a:solidFill>
+              </a:rPr>
+              <a:t>Importance</a:t>
+            </a:r>
+          </a:p>
+        </p:txBody>
+      </p:sp>
+      <p:sp>
+        <p:nvSpPr>
+          <p:cNvPr id="122" name="TextBox 121">
+            <a:extLst>
+              <a:ext uri="{FF2B5EF4-FFF2-40B4-BE49-F238E27FC236}">
+                <a16:creationId xmlns:a16="http://schemas.microsoft.com/office/drawing/2014/main" id="{560A9838-576E-E739-CF63-CC474C6B3243}"/>
+              </a:ext>
+            </a:extLst>
+          </p:cNvPr>
+          <p:cNvSpPr txBox="1"/>
+          <p:nvPr/>
+        </p:nvSpPr>
+        <p:spPr>
+          <a:xfrm>
+            <a:off x="9552834" y="5697948"/>
+            <a:ext cx="1100490" cy="369332"/>
+          </a:xfrm>
+          <a:prstGeom prst="rect">
+            <a:avLst/>
+          </a:prstGeom>
+          <a:noFill/>
+        </p:spPr>
+        <p:txBody>
+          <a:bodyPr wrap="square" rtlCol="0">
+            <a:spAutoFit/>
+          </a:bodyPr>
+          <a:lstStyle/>
+          <a:p>
+            <a:r>
+              <a:rPr lang="en-US" dirty="0"/>
+              <a:t>Average</a:t>
+            </a:r>
+            <a:endParaRPr lang="en-US" i="1" dirty="0"/>
+          </a:p>
+        </p:txBody>
+      </p:sp>
+      <p:sp>
+        <p:nvSpPr>
+          <p:cNvPr id="123" name="Rectangle 122">
+            <a:extLst>
+              <a:ext uri="{FF2B5EF4-FFF2-40B4-BE49-F238E27FC236}">
+                <a16:creationId xmlns:a16="http://schemas.microsoft.com/office/drawing/2014/main" id="{EA8D45B5-E96D-CBB3-27BF-B352D322A85D}"/>
+              </a:ext>
+            </a:extLst>
+          </p:cNvPr>
+          <p:cNvSpPr/>
+          <p:nvPr/>
+        </p:nvSpPr>
+        <p:spPr>
+          <a:xfrm>
+            <a:off x="7493296" y="5566807"/>
+            <a:ext cx="458193" cy="729237"/>
+          </a:xfrm>
+          <a:prstGeom prst="rect">
+            <a:avLst/>
+          </a:prstGeom>
+          <a:solidFill>
+            <a:schemeClr val="accent3"/>
+          </a:solidFill>
+          <a:ln>
+            <a:noFill/>
+          </a:ln>
+        </p:spPr>
+        <p:style>
+          <a:lnRef idx="2">
+            <a:schemeClr val="accent1">
+              <a:shade val="15000"/>
+            </a:schemeClr>
+          </a:lnRef>
+          <a:fillRef idx="1">
+            <a:schemeClr val="accent1"/>
+          </a:fillRef>
+          <a:effectRef idx="0">
+            <a:schemeClr val="accent1"/>
+          </a:effectRef>
+          <a:fontRef idx="minor">
+            <a:schemeClr val="lt1"/>
+          </a:fontRef>
+        </p:style>
+        <p:txBody>
+          <a:bodyPr rtlCol="0" anchor="ctr"/>
+          <a:lstStyle/>
+          <a:p>
+            <a:pPr algn="ctr"/>
+            <a:endParaRPr lang="en-US"/>
+          </a:p>
+        </p:txBody>
+      </p:sp>
+      <p:sp>
+        <p:nvSpPr>
+          <p:cNvPr id="124" name="TextBox 123">
+            <a:extLst>
+              <a:ext uri="{FF2B5EF4-FFF2-40B4-BE49-F238E27FC236}">
+                <a16:creationId xmlns:a16="http://schemas.microsoft.com/office/drawing/2014/main" id="{AF6F3CAD-DC14-FBD7-696E-407B4D8A9D58}"/>
+              </a:ext>
+            </a:extLst>
+          </p:cNvPr>
+          <p:cNvSpPr txBox="1"/>
+          <p:nvPr/>
+        </p:nvSpPr>
+        <p:spPr>
+          <a:xfrm>
+            <a:off x="8097919" y="5742046"/>
+            <a:ext cx="364265" cy="369332"/>
+          </a:xfrm>
+          <a:prstGeom prst="rect">
+            <a:avLst/>
+          </a:prstGeom>
+          <a:noFill/>
+        </p:spPr>
+        <p:txBody>
+          <a:bodyPr wrap="square" rtlCol="0">
+            <a:spAutoFit/>
+          </a:bodyPr>
+          <a:lstStyle/>
+          <a:p>
+            <a:pPr algn="ctr"/>
+            <a:r>
+              <a:rPr lang="en-US" dirty="0">
+                <a:solidFill>
+                  <a:schemeClr val="accent1"/>
+                </a:solidFill>
+              </a:rPr>
+              <a:t>-</a:t>
+            </a:r>
+          </a:p>
+        </p:txBody>
+      </p:sp>
+      <p:sp>
+        <p:nvSpPr>
+          <p:cNvPr id="125" name="Rectangle 124">
+            <a:extLst>
+              <a:ext uri="{FF2B5EF4-FFF2-40B4-BE49-F238E27FC236}">
+                <a16:creationId xmlns:a16="http://schemas.microsoft.com/office/drawing/2014/main" id="{E4773D73-0637-97CD-CEEF-FAFDE6DC7A04}"/>
+              </a:ext>
+            </a:extLst>
+          </p:cNvPr>
+          <p:cNvSpPr/>
+          <p:nvPr/>
+        </p:nvSpPr>
+        <p:spPr>
+          <a:xfrm>
+            <a:off x="8596744" y="5945645"/>
+            <a:ext cx="458193" cy="369332"/>
+          </a:xfrm>
+          <a:prstGeom prst="rect">
+            <a:avLst/>
+          </a:prstGeom>
+          <a:solidFill>
+            <a:schemeClr val="accent3"/>
+          </a:solidFill>
+          <a:ln>
+            <a:noFill/>
+          </a:ln>
+        </p:spPr>
+        <p:style>
+          <a:lnRef idx="2">
+            <a:schemeClr val="accent1">
+              <a:shade val="15000"/>
+            </a:schemeClr>
+          </a:lnRef>
+          <a:fillRef idx="1">
+            <a:schemeClr val="accent1"/>
+          </a:fillRef>
+          <a:effectRef idx="0">
+            <a:schemeClr val="accent1"/>
+          </a:effectRef>
+          <a:fontRef idx="minor">
+            <a:schemeClr val="lt1"/>
+          </a:fontRef>
+        </p:style>
+        <p:txBody>
+          <a:bodyPr rtlCol="0" anchor="ctr"/>
+          <a:lstStyle/>
+          <a:p>
+            <a:pPr algn="ctr"/>
+            <a:endParaRPr lang="en-US"/>
+          </a:p>
+        </p:txBody>
+      </p:sp>
+      <p:sp>
+        <p:nvSpPr>
+          <p:cNvPr id="126" name="Rectangle 125">
+            <a:extLst>
+              <a:ext uri="{FF2B5EF4-FFF2-40B4-BE49-F238E27FC236}">
+                <a16:creationId xmlns:a16="http://schemas.microsoft.com/office/drawing/2014/main" id="{0635965A-EF04-2387-1CB0-51ED9EBF2332}"/>
+              </a:ext>
+            </a:extLst>
+          </p:cNvPr>
+          <p:cNvSpPr/>
+          <p:nvPr/>
+        </p:nvSpPr>
+        <p:spPr>
+          <a:xfrm>
+            <a:off x="11196403" y="5926712"/>
+            <a:ext cx="458193" cy="369332"/>
+          </a:xfrm>
+          <a:prstGeom prst="rect">
+            <a:avLst/>
+          </a:prstGeom>
+          <a:solidFill>
+            <a:schemeClr val="accent3"/>
+          </a:solidFill>
+          <a:ln>
+            <a:noFill/>
+          </a:ln>
+        </p:spPr>
+        <p:style>
+          <a:lnRef idx="2">
+            <a:schemeClr val="accent1">
+              <a:shade val="15000"/>
+            </a:schemeClr>
+          </a:lnRef>
+          <a:fillRef idx="1">
+            <a:schemeClr val="accent1"/>
+          </a:fillRef>
+          <a:effectRef idx="0">
+            <a:schemeClr val="accent1"/>
+          </a:effectRef>
+          <a:fontRef idx="minor">
+            <a:schemeClr val="lt1"/>
+          </a:fontRef>
+        </p:style>
+        <p:txBody>
+          <a:bodyPr rtlCol="0" anchor="ctr"/>
+          <a:lstStyle/>
+          <a:p>
+            <a:pPr algn="ctr"/>
+            <a:endParaRPr lang="en-US"/>
+          </a:p>
+        </p:txBody>
+      </p:sp>
+      <p:sp>
+        <p:nvSpPr>
+          <p:cNvPr id="127" name="Rectangle 126">
+            <a:extLst>
+              <a:ext uri="{FF2B5EF4-FFF2-40B4-BE49-F238E27FC236}">
+                <a16:creationId xmlns:a16="http://schemas.microsoft.com/office/drawing/2014/main" id="{7750DC3D-4F81-3F70-6B6D-14BB2384B056}"/>
+              </a:ext>
+            </a:extLst>
+          </p:cNvPr>
+          <p:cNvSpPr/>
+          <p:nvPr/>
+        </p:nvSpPr>
+        <p:spPr>
+          <a:xfrm>
+            <a:off x="8596744" y="5576313"/>
+            <a:ext cx="458193" cy="369332"/>
+          </a:xfrm>
+          <a:prstGeom prst="rect">
+            <a:avLst/>
+          </a:prstGeom>
+          <a:solidFill>
+            <a:schemeClr val="bg2"/>
+          </a:solidFill>
+          <a:ln>
+            <a:noFill/>
+          </a:ln>
+        </p:spPr>
+        <p:style>
+          <a:lnRef idx="2">
+            <a:schemeClr val="accent1">
+              <a:shade val="15000"/>
+            </a:schemeClr>
+          </a:lnRef>
+          <a:fillRef idx="1">
+            <a:schemeClr val="accent1"/>
+          </a:fillRef>
+          <a:effectRef idx="0">
+            <a:schemeClr val="accent1"/>
+          </a:effectRef>
+          <a:fontRef idx="minor">
+            <a:schemeClr val="lt1"/>
+          </a:fontRef>
+        </p:style>
+        <p:txBody>
+          <a:bodyPr rtlCol="0" anchor="ctr"/>
+          <a:lstStyle/>
+          <a:p>
+            <a:pPr algn="ctr"/>
+            <a:endParaRPr lang="en-US"/>
+          </a:p>
+        </p:txBody>
+      </p:sp>
+    </p:spTree>
+    <p:extLst>
+      <p:ext uri="{BB962C8B-B14F-4D97-AF65-F5344CB8AC3E}">
+        <p14:creationId xmlns:p14="http://schemas.microsoft.com/office/powerpoint/2010/main" val="297100576"/>
       </p:ext>
     </p:extLst>
   </p:cSld>
@@ -3631,7 +9657,7 @@
         <p:spPr/>
         <p:txBody>
           <a:bodyPr>
-            <a:normAutofit fontScale="92500" lnSpcReduction="20000"/>
+            <a:normAutofit fontScale="92500" lnSpcReduction="10000"/>
           </a:bodyPr>
           <a:lstStyle/>
           <a:p>
@@ -3670,35 +9696,19 @@
           <a:p>
             <a:r>
               <a:rPr lang="en-US" dirty="0"/>
-              <a:t>Example model with correlated predictors</a:t>
-            </a:r>
-          </a:p>
-          <a:p>
-            <a:pPr lvl="1"/>
-            <a:r>
-              <a:rPr lang="en-US" dirty="0"/>
-              <a:t>A look at predictive performance</a:t>
-            </a:r>
-          </a:p>
-          <a:p>
-            <a:pPr lvl="1"/>
-            <a:r>
-              <a:rPr lang="en-US" dirty="0"/>
-              <a:t>A look at model interpretation</a:t>
-            </a:r>
-          </a:p>
-          <a:p>
-            <a:pPr lvl="1"/>
-            <a:r>
-              <a:rPr lang="en-US" dirty="0"/>
               <a:t>Variable importance - intention and calculation</a:t>
             </a:r>
           </a:p>
           <a:p>
-            <a:pPr lvl="1"/>
             <a:r>
               <a:rPr lang="en-US" dirty="0"/>
               <a:t>Partial dependence - how it's calculated and how to interpret</a:t>
+            </a:r>
+          </a:p>
+          <a:p>
+            <a:r>
+              <a:rPr lang="en-US" dirty="0"/>
+              <a:t>Considerations with correlated predictors</a:t>
             </a:r>
           </a:p>
           <a:p>
